--- a/modulo-06_Gobierno y Calidad de Datos/01_Introduccion Gobierno de Datos.pptx
+++ b/modulo-06_Gobierno y Calidad de Datos/01_Introduccion Gobierno de Datos.pptx
@@ -5,63 +5,57 @@
     <p:sldMasterId id="2147483648" r:id="rId4"/>
   </p:sldMasterIdLst>
   <p:notesMasterIdLst>
-    <p:notesMasterId r:id="rId37"/>
+    <p:notesMasterId r:id="rId31"/>
   </p:notesMasterIdLst>
   <p:sldIdLst>
     <p:sldId id="257" r:id="rId5"/>
-    <p:sldId id="332" r:id="rId6"/>
-    <p:sldId id="331" r:id="rId7"/>
-    <p:sldId id="333" r:id="rId8"/>
-    <p:sldId id="378" r:id="rId9"/>
-    <p:sldId id="379" r:id="rId10"/>
-    <p:sldId id="389" r:id="rId11"/>
-    <p:sldId id="390" r:id="rId12"/>
-    <p:sldId id="380" r:id="rId13"/>
-    <p:sldId id="391" r:id="rId14"/>
-    <p:sldId id="367" r:id="rId15"/>
-    <p:sldId id="368" r:id="rId16"/>
-    <p:sldId id="285" r:id="rId17"/>
-    <p:sldId id="370" r:id="rId18"/>
-    <p:sldId id="385" r:id="rId19"/>
-    <p:sldId id="369" r:id="rId20"/>
-    <p:sldId id="371" r:id="rId21"/>
-    <p:sldId id="386" r:id="rId22"/>
-    <p:sldId id="372" r:id="rId23"/>
-    <p:sldId id="375" r:id="rId24"/>
-    <p:sldId id="376" r:id="rId25"/>
-    <p:sldId id="387" r:id="rId26"/>
-    <p:sldId id="374" r:id="rId27"/>
-    <p:sldId id="377" r:id="rId28"/>
-    <p:sldId id="388" r:id="rId29"/>
-    <p:sldId id="373" r:id="rId30"/>
-    <p:sldId id="381" r:id="rId31"/>
-    <p:sldId id="382" r:id="rId32"/>
-    <p:sldId id="383" r:id="rId33"/>
-    <p:sldId id="384" r:id="rId34"/>
-    <p:sldId id="278" r:id="rId35"/>
-    <p:sldId id="342" r:id="rId36"/>
+    <p:sldId id="333" r:id="rId6"/>
+    <p:sldId id="378" r:id="rId7"/>
+    <p:sldId id="379" r:id="rId8"/>
+    <p:sldId id="389" r:id="rId9"/>
+    <p:sldId id="390" r:id="rId10"/>
+    <p:sldId id="380" r:id="rId11"/>
+    <p:sldId id="391" r:id="rId12"/>
+    <p:sldId id="367" r:id="rId13"/>
+    <p:sldId id="368" r:id="rId14"/>
+    <p:sldId id="285" r:id="rId15"/>
+    <p:sldId id="370" r:id="rId16"/>
+    <p:sldId id="385" r:id="rId17"/>
+    <p:sldId id="369" r:id="rId18"/>
+    <p:sldId id="371" r:id="rId19"/>
+    <p:sldId id="386" r:id="rId20"/>
+    <p:sldId id="372" r:id="rId21"/>
+    <p:sldId id="375" r:id="rId22"/>
+    <p:sldId id="376" r:id="rId23"/>
+    <p:sldId id="387" r:id="rId24"/>
+    <p:sldId id="374" r:id="rId25"/>
+    <p:sldId id="377" r:id="rId26"/>
+    <p:sldId id="388" r:id="rId27"/>
+    <p:sldId id="373" r:id="rId28"/>
+    <p:sldId id="278" r:id="rId29"/>
+    <p:sldId id="342" r:id="rId30"/>
   </p:sldIdLst>
   <p:sldSz cx="18288000" cy="10287000"/>
   <p:notesSz cx="6858000" cy="9144000"/>
   <p:embeddedFontLst>
     <p:embeddedFont>
       <p:font typeface="Poppins" panose="00000500000000000000" pitchFamily="2" charset="0"/>
-      <p:regular r:id="rId38"/>
-      <p:bold r:id="rId39"/>
-      <p:italic r:id="rId40"/>
-      <p:boldItalic r:id="rId41"/>
+      <p:regular r:id="rId32"/>
+      <p:bold r:id="rId33"/>
+      <p:italic r:id="rId34"/>
+      <p:boldItalic r:id="rId35"/>
     </p:embeddedFont>
     <p:embeddedFont>
       <p:font typeface="Poppins 1 Bold" panose="020B0604020202020204" charset="0"/>
-      <p:regular r:id="rId42"/>
+      <p:regular r:id="rId36"/>
     </p:embeddedFont>
     <p:embeddedFont>
       <p:font typeface="Poppins 2" panose="020B0604020202020204" charset="0"/>
-      <p:regular r:id="rId43"/>
+      <p:regular r:id="rId37"/>
     </p:embeddedFont>
     <p:embeddedFont>
       <p:font typeface="Poppins 3" panose="020B0604020202020204" charset="0"/>
-      <p:regular r:id="rId44"/>
+      <p:regular r:id="rId38"/>
     </p:embeddedFont>
   </p:embeddedFontLst>
   <p:defaultTextStyle>
@@ -2688,7 +2682,7 @@
           <a:p>
             <a:fld id="{B7268E1E-0E44-426D-905E-8AD9B19D2182}" type="datetimeFigureOut">
               <a:rPr lang="cs-CZ" smtClean="0"/>
-              <a:t>23.02.2026</a:t>
+              <a:t>24.02.2026</a:t>
             </a:fld>
             <a:endParaRPr lang="cs-CZ"/>
           </a:p>
@@ -3136,7 +3130,7 @@
             <a:fld id="{1D8BD707-D9CF-40AE-B4C6-C98DA3205C09}" type="datetimeFigureOut">
               <a:rPr lang="en-US" smtClean="0"/>
               <a:pPr/>
-              <a:t>2/23/2026</a:t>
+              <a:t>2/24/2026</a:t>
             </a:fld>
             <a:endParaRPr lang="en-US"/>
           </a:p>
@@ -3301,7 +3295,7 @@
             <a:fld id="{1D8BD707-D9CF-40AE-B4C6-C98DA3205C09}" type="datetimeFigureOut">
               <a:rPr lang="en-US" smtClean="0"/>
               <a:pPr/>
-              <a:t>2/23/2026</a:t>
+              <a:t>2/24/2026</a:t>
             </a:fld>
             <a:endParaRPr lang="en-US"/>
           </a:p>
@@ -3476,7 +3470,7 @@
             <a:fld id="{1D8BD707-D9CF-40AE-B4C6-C98DA3205C09}" type="datetimeFigureOut">
               <a:rPr lang="en-US" smtClean="0"/>
               <a:pPr/>
-              <a:t>2/23/2026</a:t>
+              <a:t>2/24/2026</a:t>
             </a:fld>
             <a:endParaRPr lang="en-US"/>
           </a:p>
@@ -3641,7 +3635,7 @@
             <a:fld id="{1D8BD707-D9CF-40AE-B4C6-C98DA3205C09}" type="datetimeFigureOut">
               <a:rPr lang="en-US" smtClean="0"/>
               <a:pPr/>
-              <a:t>2/23/2026</a:t>
+              <a:t>2/24/2026</a:t>
             </a:fld>
             <a:endParaRPr lang="en-US"/>
           </a:p>
@@ -3883,7 +3877,7 @@
             <a:fld id="{1D8BD707-D9CF-40AE-B4C6-C98DA3205C09}" type="datetimeFigureOut">
               <a:rPr lang="en-US" smtClean="0"/>
               <a:pPr/>
-              <a:t>2/23/2026</a:t>
+              <a:t>2/24/2026</a:t>
             </a:fld>
             <a:endParaRPr lang="en-US"/>
           </a:p>
@@ -4165,7 +4159,7 @@
             <a:fld id="{1D8BD707-D9CF-40AE-B4C6-C98DA3205C09}" type="datetimeFigureOut">
               <a:rPr lang="en-US" smtClean="0"/>
               <a:pPr/>
-              <a:t>2/23/2026</a:t>
+              <a:t>2/24/2026</a:t>
             </a:fld>
             <a:endParaRPr lang="en-US"/>
           </a:p>
@@ -4581,7 +4575,7 @@
             <a:fld id="{1D8BD707-D9CF-40AE-B4C6-C98DA3205C09}" type="datetimeFigureOut">
               <a:rPr lang="en-US" smtClean="0"/>
               <a:pPr/>
-              <a:t>2/23/2026</a:t>
+              <a:t>2/24/2026</a:t>
             </a:fld>
             <a:endParaRPr lang="en-US"/>
           </a:p>
@@ -4695,7 +4689,7 @@
             <a:fld id="{1D8BD707-D9CF-40AE-B4C6-C98DA3205C09}" type="datetimeFigureOut">
               <a:rPr lang="en-US" smtClean="0"/>
               <a:pPr/>
-              <a:t>2/23/2026</a:t>
+              <a:t>2/24/2026</a:t>
             </a:fld>
             <a:endParaRPr lang="en-US"/>
           </a:p>
@@ -4787,7 +4781,7 @@
             <a:fld id="{1D8BD707-D9CF-40AE-B4C6-C98DA3205C09}" type="datetimeFigureOut">
               <a:rPr lang="en-US" smtClean="0"/>
               <a:pPr/>
-              <a:t>2/23/2026</a:t>
+              <a:t>2/24/2026</a:t>
             </a:fld>
             <a:endParaRPr lang="en-US"/>
           </a:p>
@@ -5059,7 +5053,7 @@
             <a:fld id="{1D8BD707-D9CF-40AE-B4C6-C98DA3205C09}" type="datetimeFigureOut">
               <a:rPr lang="en-US" smtClean="0"/>
               <a:pPr/>
-              <a:t>2/23/2026</a:t>
+              <a:t>2/24/2026</a:t>
             </a:fld>
             <a:endParaRPr lang="en-US"/>
           </a:p>
@@ -5308,7 +5302,7 @@
             <a:fld id="{1D8BD707-D9CF-40AE-B4C6-C98DA3205C09}" type="datetimeFigureOut">
               <a:rPr lang="en-US" smtClean="0"/>
               <a:pPr/>
-              <a:t>2/23/2026</a:t>
+              <a:t>2/24/2026</a:t>
             </a:fld>
             <a:endParaRPr lang="en-US"/>
           </a:p>
@@ -5516,7 +5510,7 @@
             <a:fld id="{1D8BD707-D9CF-40AE-B4C6-C98DA3205C09}" type="datetimeFigureOut">
               <a:rPr lang="en-US" smtClean="0"/>
               <a:pPr/>
-              <a:t>2/23/2026</a:t>
+              <a:t>2/24/2026</a:t>
             </a:fld>
             <a:endParaRPr lang="en-US"/>
           </a:p>
@@ -6567,1541 +6561,6 @@
         <p:cNvPr id="1" name="">
           <a:extLst>
             <a:ext uri="{FF2B5EF4-FFF2-40B4-BE49-F238E27FC236}">
-              <a16:creationId xmlns:a16="http://schemas.microsoft.com/office/drawing/2014/main" id="{B5D88ACE-0934-647C-8FCF-121E882F0308}"/>
-            </a:ext>
-          </a:extLst>
-        </p:cNvPr>
-        <p:cNvGrpSpPr/>
-        <p:nvPr/>
-      </p:nvGrpSpPr>
-      <p:grpSpPr>
-        <a:xfrm>
-          <a:off x="0" y="0"/>
-          <a:ext cx="0" cy="0"/>
-          <a:chOff x="0" y="0"/>
-          <a:chExt cx="0" cy="0"/>
-        </a:xfrm>
-      </p:grpSpPr>
-      <p:grpSp>
-        <p:nvGrpSpPr>
-          <p:cNvPr id="3" name="Group 3">
-            <a:extLst>
-              <a:ext uri="{FF2B5EF4-FFF2-40B4-BE49-F238E27FC236}">
-                <a16:creationId xmlns:a16="http://schemas.microsoft.com/office/drawing/2014/main" id="{BEF84AEF-807A-B5DE-42ED-1785323DE85C}"/>
-              </a:ext>
-            </a:extLst>
-          </p:cNvPr>
-          <p:cNvGrpSpPr/>
-          <p:nvPr/>
-        </p:nvGrpSpPr>
-        <p:grpSpPr>
-          <a:xfrm rot="-10800000">
-            <a:off x="10392303" y="0"/>
-            <a:ext cx="7895697" cy="10287000"/>
-            <a:chOff x="0" y="0"/>
-            <a:chExt cx="2079525" cy="2709333"/>
-          </a:xfrm>
-        </p:grpSpPr>
-        <p:sp>
-          <p:nvSpPr>
-            <p:cNvPr id="4" name="Freeform 4">
-              <a:extLst>
-                <a:ext uri="{FF2B5EF4-FFF2-40B4-BE49-F238E27FC236}">
-                  <a16:creationId xmlns:a16="http://schemas.microsoft.com/office/drawing/2014/main" id="{37CC4582-EB5A-35C4-227E-3E31C66AC0B0}"/>
-                </a:ext>
-              </a:extLst>
-            </p:cNvPr>
-            <p:cNvSpPr/>
-            <p:nvPr/>
-          </p:nvSpPr>
-          <p:spPr>
-            <a:xfrm>
-              <a:off x="0" y="0"/>
-              <a:ext cx="2079525" cy="2709333"/>
-            </a:xfrm>
-            <a:custGeom>
-              <a:avLst/>
-              <a:gdLst/>
-              <a:ahLst/>
-              <a:cxnLst/>
-              <a:rect l="l" t="t" r="r" b="b"/>
-              <a:pathLst>
-                <a:path w="2079525" h="2709333">
-                  <a:moveTo>
-                    <a:pt x="0" y="0"/>
-                  </a:moveTo>
-                  <a:lnTo>
-                    <a:pt x="2079525" y="0"/>
-                  </a:lnTo>
-                  <a:lnTo>
-                    <a:pt x="2079525" y="2709333"/>
-                  </a:lnTo>
-                  <a:lnTo>
-                    <a:pt x="0" y="2709333"/>
-                  </a:lnTo>
-                  <a:close/>
-                </a:path>
-              </a:pathLst>
-            </a:custGeom>
-            <a:gradFill rotWithShape="1">
-              <a:gsLst>
-                <a:gs pos="0">
-                  <a:srgbClr val="6B1374">
-                    <a:alpha val="100000"/>
-                  </a:srgbClr>
-                </a:gs>
-                <a:gs pos="33333">
-                  <a:srgbClr val="700A89">
-                    <a:alpha val="100000"/>
-                  </a:srgbClr>
-                </a:gs>
-                <a:gs pos="66667">
-                  <a:srgbClr val="C20052">
-                    <a:alpha val="100000"/>
-                  </a:srgbClr>
-                </a:gs>
-                <a:gs pos="100000">
-                  <a:srgbClr val="FF0055">
-                    <a:alpha val="100000"/>
-                  </a:srgbClr>
-                </a:gs>
-              </a:gsLst>
-              <a:lin ang="5400000"/>
-            </a:gradFill>
-          </p:spPr>
-          <p:txBody>
-            <a:bodyPr/>
-            <a:lstStyle/>
-            <a:p>
-              <a:endParaRPr lang="es-CO"/>
-            </a:p>
-          </p:txBody>
-        </p:sp>
-        <p:sp>
-          <p:nvSpPr>
-            <p:cNvPr id="5" name="TextBox 5">
-              <a:extLst>
-                <a:ext uri="{FF2B5EF4-FFF2-40B4-BE49-F238E27FC236}">
-                  <a16:creationId xmlns:a16="http://schemas.microsoft.com/office/drawing/2014/main" id="{76CEA01E-93D8-5B7C-8300-467FC9212128}"/>
-                </a:ext>
-              </a:extLst>
-            </p:cNvPr>
-            <p:cNvSpPr txBox="1"/>
-            <p:nvPr/>
-          </p:nvSpPr>
-          <p:spPr>
-            <a:xfrm>
-              <a:off x="0" y="-38100"/>
-              <a:ext cx="2079525" cy="2747433"/>
-            </a:xfrm>
-            <a:prstGeom prst="rect">
-              <a:avLst/>
-            </a:prstGeom>
-          </p:spPr>
-          <p:txBody>
-            <a:bodyPr lIns="50800" tIns="50800" rIns="50800" bIns="50800" rtlCol="0" anchor="ctr"/>
-            <a:lstStyle/>
-            <a:p>
-              <a:pPr algn="ctr">
-                <a:lnSpc>
-                  <a:spcPts val="2659"/>
-                </a:lnSpc>
-                <a:spcBef>
-                  <a:spcPct val="0"/>
-                </a:spcBef>
-              </a:pPr>
-              <a:endParaRPr/>
-            </a:p>
-          </p:txBody>
-        </p:sp>
-      </p:grpSp>
-      <p:sp>
-        <p:nvSpPr>
-          <p:cNvPr id="6" name="Freeform 6">
-            <a:extLst>
-              <a:ext uri="{FF2B5EF4-FFF2-40B4-BE49-F238E27FC236}">
-                <a16:creationId xmlns:a16="http://schemas.microsoft.com/office/drawing/2014/main" id="{B31202AB-6ABA-521E-EC5A-944AB28253B4}"/>
-              </a:ext>
-            </a:extLst>
-          </p:cNvPr>
-          <p:cNvSpPr/>
-          <p:nvPr/>
-        </p:nvSpPr>
-        <p:spPr>
-          <a:xfrm>
-            <a:off x="9562641" y="4953536"/>
-            <a:ext cx="4777510" cy="4687932"/>
-          </a:xfrm>
-          <a:custGeom>
-            <a:avLst/>
-            <a:gdLst/>
-            <a:ahLst/>
-            <a:cxnLst/>
-            <a:rect l="l" t="t" r="r" b="b"/>
-            <a:pathLst>
-              <a:path w="4777510" h="4687932">
-                <a:moveTo>
-                  <a:pt x="0" y="0"/>
-                </a:moveTo>
-                <a:lnTo>
-                  <a:pt x="4777511" y="0"/>
-                </a:lnTo>
-                <a:lnTo>
-                  <a:pt x="4777511" y="4687932"/>
-                </a:lnTo>
-                <a:lnTo>
-                  <a:pt x="0" y="4687932"/>
-                </a:lnTo>
-                <a:lnTo>
-                  <a:pt x="0" y="0"/>
-                </a:lnTo>
-                <a:close/>
-              </a:path>
-            </a:pathLst>
-          </a:custGeom>
-          <a:blipFill>
-            <a:blip r:embed="rId2">
-              <a:extLst>
-                <a:ext uri="{96DAC541-7B7A-43D3-8B79-37D633B846F1}">
-                  <asvg:svgBlip xmlns:asvg="http://schemas.microsoft.com/office/drawing/2016/SVG/main" r:embed="rId3"/>
-                </a:ext>
-              </a:extLst>
-            </a:blip>
-            <a:stretch>
-              <a:fillRect/>
-            </a:stretch>
-          </a:blipFill>
-        </p:spPr>
-        <p:txBody>
-          <a:bodyPr/>
-          <a:lstStyle/>
-          <a:p>
-            <a:endParaRPr lang="es-CO"/>
-          </a:p>
-        </p:txBody>
-      </p:sp>
-      <p:sp>
-        <p:nvSpPr>
-          <p:cNvPr id="7" name="Freeform 7">
-            <a:extLst>
-              <a:ext uri="{FF2B5EF4-FFF2-40B4-BE49-F238E27FC236}">
-                <a16:creationId xmlns:a16="http://schemas.microsoft.com/office/drawing/2014/main" id="{F432B313-B9A6-8BDB-8B78-FF15D5121508}"/>
-              </a:ext>
-            </a:extLst>
-          </p:cNvPr>
-          <p:cNvSpPr/>
-          <p:nvPr/>
-        </p:nvSpPr>
-        <p:spPr>
-          <a:xfrm rot="-10800000">
-            <a:off x="14340152" y="455568"/>
-            <a:ext cx="4777510" cy="4687932"/>
-          </a:xfrm>
-          <a:custGeom>
-            <a:avLst/>
-            <a:gdLst/>
-            <a:ahLst/>
-            <a:cxnLst/>
-            <a:rect l="l" t="t" r="r" b="b"/>
-            <a:pathLst>
-              <a:path w="4777510" h="4687932">
-                <a:moveTo>
-                  <a:pt x="0" y="0"/>
-                </a:moveTo>
-                <a:lnTo>
-                  <a:pt x="4777510" y="0"/>
-                </a:lnTo>
-                <a:lnTo>
-                  <a:pt x="4777510" y="4687932"/>
-                </a:lnTo>
-                <a:lnTo>
-                  <a:pt x="0" y="4687932"/>
-                </a:lnTo>
-                <a:lnTo>
-                  <a:pt x="0" y="0"/>
-                </a:lnTo>
-                <a:close/>
-              </a:path>
-            </a:pathLst>
-          </a:custGeom>
-          <a:blipFill>
-            <a:blip r:embed="rId2">
-              <a:extLst>
-                <a:ext uri="{96DAC541-7B7A-43D3-8B79-37D633B846F1}">
-                  <asvg:svgBlip xmlns:asvg="http://schemas.microsoft.com/office/drawing/2016/SVG/main" r:embed="rId3"/>
-                </a:ext>
-              </a:extLst>
-            </a:blip>
-            <a:stretch>
-              <a:fillRect/>
-            </a:stretch>
-          </a:blipFill>
-        </p:spPr>
-        <p:txBody>
-          <a:bodyPr/>
-          <a:lstStyle/>
-          <a:p>
-            <a:endParaRPr lang="es-CO"/>
-          </a:p>
-        </p:txBody>
-      </p:sp>
-      <p:grpSp>
-        <p:nvGrpSpPr>
-          <p:cNvPr id="8" name="Group 8">
-            <a:extLst>
-              <a:ext uri="{FF2B5EF4-FFF2-40B4-BE49-F238E27FC236}">
-                <a16:creationId xmlns:a16="http://schemas.microsoft.com/office/drawing/2014/main" id="{6F2461D1-DC62-F542-FFA3-22E8F0C3E806}"/>
-              </a:ext>
-            </a:extLst>
-          </p:cNvPr>
-          <p:cNvGrpSpPr/>
-          <p:nvPr/>
-        </p:nvGrpSpPr>
-        <p:grpSpPr>
-          <a:xfrm rot="1460314">
-            <a:off x="10661875" y="4518938"/>
-            <a:ext cx="7356554" cy="1249125"/>
-            <a:chOff x="0" y="0"/>
-            <a:chExt cx="1937529" cy="328988"/>
-          </a:xfrm>
-        </p:grpSpPr>
-        <p:sp>
-          <p:nvSpPr>
-            <p:cNvPr id="9" name="Freeform 9">
-              <a:extLst>
-                <a:ext uri="{FF2B5EF4-FFF2-40B4-BE49-F238E27FC236}">
-                  <a16:creationId xmlns:a16="http://schemas.microsoft.com/office/drawing/2014/main" id="{2D82D9F8-CBB4-CF7D-5984-E4588ECC4998}"/>
-                </a:ext>
-              </a:extLst>
-            </p:cNvPr>
-            <p:cNvSpPr/>
-            <p:nvPr/>
-          </p:nvSpPr>
-          <p:spPr>
-            <a:xfrm>
-              <a:off x="0" y="0"/>
-              <a:ext cx="1937528" cy="328988"/>
-            </a:xfrm>
-            <a:custGeom>
-              <a:avLst/>
-              <a:gdLst/>
-              <a:ahLst/>
-              <a:cxnLst/>
-              <a:rect l="l" t="t" r="r" b="b"/>
-              <a:pathLst>
-                <a:path w="1937528" h="328988">
-                  <a:moveTo>
-                    <a:pt x="105238" y="0"/>
-                  </a:moveTo>
-                  <a:lnTo>
-                    <a:pt x="1832290" y="0"/>
-                  </a:lnTo>
-                  <a:cubicBezTo>
-                    <a:pt x="1860201" y="0"/>
-                    <a:pt x="1886969" y="11088"/>
-                    <a:pt x="1906705" y="30824"/>
-                  </a:cubicBezTo>
-                  <a:cubicBezTo>
-                    <a:pt x="1926441" y="50560"/>
-                    <a:pt x="1937528" y="77327"/>
-                    <a:pt x="1937528" y="105238"/>
-                  </a:cubicBezTo>
-                  <a:lnTo>
-                    <a:pt x="1937528" y="223749"/>
-                  </a:lnTo>
-                  <a:cubicBezTo>
-                    <a:pt x="1937528" y="281871"/>
-                    <a:pt x="1890412" y="328988"/>
-                    <a:pt x="1832290" y="328988"/>
-                  </a:cubicBezTo>
-                  <a:lnTo>
-                    <a:pt x="105238" y="328988"/>
-                  </a:lnTo>
-                  <a:cubicBezTo>
-                    <a:pt x="77327" y="328988"/>
-                    <a:pt x="50560" y="317900"/>
-                    <a:pt x="30824" y="298164"/>
-                  </a:cubicBezTo>
-                  <a:cubicBezTo>
-                    <a:pt x="11088" y="278428"/>
-                    <a:pt x="0" y="251660"/>
-                    <a:pt x="0" y="223749"/>
-                  </a:cubicBezTo>
-                  <a:lnTo>
-                    <a:pt x="0" y="105238"/>
-                  </a:lnTo>
-                  <a:cubicBezTo>
-                    <a:pt x="0" y="47117"/>
-                    <a:pt x="47117" y="0"/>
-                    <a:pt x="105238" y="0"/>
-                  </a:cubicBezTo>
-                  <a:close/>
-                </a:path>
-              </a:pathLst>
-            </a:custGeom>
-            <a:solidFill>
-              <a:srgbClr val="FFFFFF"/>
-            </a:solidFill>
-          </p:spPr>
-          <p:txBody>
-            <a:bodyPr/>
-            <a:lstStyle/>
-            <a:p>
-              <a:endParaRPr lang="es-CO"/>
-            </a:p>
-          </p:txBody>
-        </p:sp>
-        <p:sp>
-          <p:nvSpPr>
-            <p:cNvPr id="10" name="TextBox 10">
-              <a:extLst>
-                <a:ext uri="{FF2B5EF4-FFF2-40B4-BE49-F238E27FC236}">
-                  <a16:creationId xmlns:a16="http://schemas.microsoft.com/office/drawing/2014/main" id="{8F7C098D-42FF-08DA-AF5B-B27E87EE6C14}"/>
-                </a:ext>
-              </a:extLst>
-            </p:cNvPr>
-            <p:cNvSpPr txBox="1"/>
-            <p:nvPr/>
-          </p:nvSpPr>
-          <p:spPr>
-            <a:xfrm>
-              <a:off x="0" y="-38100"/>
-              <a:ext cx="1937529" cy="367088"/>
-            </a:xfrm>
-            <a:prstGeom prst="rect">
-              <a:avLst/>
-            </a:prstGeom>
-          </p:spPr>
-          <p:txBody>
-            <a:bodyPr lIns="50800" tIns="50800" rIns="50800" bIns="50800" rtlCol="0" anchor="ctr"/>
-            <a:lstStyle/>
-            <a:p>
-              <a:pPr algn="ctr">
-                <a:lnSpc>
-                  <a:spcPts val="2659"/>
-                </a:lnSpc>
-              </a:pPr>
-              <a:endParaRPr/>
-            </a:p>
-          </p:txBody>
-        </p:sp>
-      </p:grpSp>
-      <p:grpSp>
-        <p:nvGrpSpPr>
-          <p:cNvPr id="11" name="Group 11">
-            <a:extLst>
-              <a:ext uri="{FF2B5EF4-FFF2-40B4-BE49-F238E27FC236}">
-                <a16:creationId xmlns:a16="http://schemas.microsoft.com/office/drawing/2014/main" id="{5D52CD3B-B1FB-5A39-7926-1783EA512620}"/>
-              </a:ext>
-            </a:extLst>
-          </p:cNvPr>
-          <p:cNvGrpSpPr/>
-          <p:nvPr/>
-        </p:nvGrpSpPr>
-        <p:grpSpPr>
-          <a:xfrm rot="-10800000">
-            <a:off x="-536257" y="9574006"/>
-            <a:ext cx="8704391" cy="134923"/>
-            <a:chOff x="0" y="0"/>
-            <a:chExt cx="2292514" cy="35535"/>
-          </a:xfrm>
-        </p:grpSpPr>
-        <p:sp>
-          <p:nvSpPr>
-            <p:cNvPr id="12" name="Freeform 12">
-              <a:extLst>
-                <a:ext uri="{FF2B5EF4-FFF2-40B4-BE49-F238E27FC236}">
-                  <a16:creationId xmlns:a16="http://schemas.microsoft.com/office/drawing/2014/main" id="{B3B82B96-B0B3-EDFD-EBE1-2B0CA9DA1981}"/>
-                </a:ext>
-              </a:extLst>
-            </p:cNvPr>
-            <p:cNvSpPr/>
-            <p:nvPr/>
-          </p:nvSpPr>
-          <p:spPr>
-            <a:xfrm>
-              <a:off x="0" y="0"/>
-              <a:ext cx="2292515" cy="35535"/>
-            </a:xfrm>
-            <a:custGeom>
-              <a:avLst/>
-              <a:gdLst/>
-              <a:ahLst/>
-              <a:cxnLst/>
-              <a:rect l="l" t="t" r="r" b="b"/>
-              <a:pathLst>
-                <a:path w="2292515" h="35535">
-                  <a:moveTo>
-                    <a:pt x="17768" y="0"/>
-                  </a:moveTo>
-                  <a:lnTo>
-                    <a:pt x="2274747" y="0"/>
-                  </a:lnTo>
-                  <a:cubicBezTo>
-                    <a:pt x="2284560" y="0"/>
-                    <a:pt x="2292515" y="7955"/>
-                    <a:pt x="2292515" y="17768"/>
-                  </a:cubicBezTo>
-                  <a:lnTo>
-                    <a:pt x="2292515" y="17768"/>
-                  </a:lnTo>
-                  <a:cubicBezTo>
-                    <a:pt x="2292515" y="22480"/>
-                    <a:pt x="2290643" y="26999"/>
-                    <a:pt x="2287311" y="30331"/>
-                  </a:cubicBezTo>
-                  <a:cubicBezTo>
-                    <a:pt x="2283978" y="33663"/>
-                    <a:pt x="2279459" y="35535"/>
-                    <a:pt x="2274747" y="35535"/>
-                  </a:cubicBezTo>
-                  <a:lnTo>
-                    <a:pt x="17768" y="35535"/>
-                  </a:lnTo>
-                  <a:cubicBezTo>
-                    <a:pt x="13055" y="35535"/>
-                    <a:pt x="8536" y="33663"/>
-                    <a:pt x="5204" y="30331"/>
-                  </a:cubicBezTo>
-                  <a:cubicBezTo>
-                    <a:pt x="1872" y="26999"/>
-                    <a:pt x="0" y="22480"/>
-                    <a:pt x="0" y="17768"/>
-                  </a:cubicBezTo>
-                  <a:lnTo>
-                    <a:pt x="0" y="17768"/>
-                  </a:lnTo>
-                  <a:cubicBezTo>
-                    <a:pt x="0" y="13055"/>
-                    <a:pt x="1872" y="8536"/>
-                    <a:pt x="5204" y="5204"/>
-                  </a:cubicBezTo>
-                  <a:cubicBezTo>
-                    <a:pt x="8536" y="1872"/>
-                    <a:pt x="13055" y="0"/>
-                    <a:pt x="17768" y="0"/>
-                  </a:cubicBezTo>
-                  <a:close/>
-                </a:path>
-              </a:pathLst>
-            </a:custGeom>
-            <a:gradFill rotWithShape="1">
-              <a:gsLst>
-                <a:gs pos="0">
-                  <a:srgbClr val="6B1374">
-                    <a:alpha val="100000"/>
-                  </a:srgbClr>
-                </a:gs>
-                <a:gs pos="33333">
-                  <a:srgbClr val="700A89">
-                    <a:alpha val="100000"/>
-                  </a:srgbClr>
-                </a:gs>
-                <a:gs pos="66667">
-                  <a:srgbClr val="C20052">
-                    <a:alpha val="100000"/>
-                  </a:srgbClr>
-                </a:gs>
-                <a:gs pos="100000">
-                  <a:srgbClr val="FF0055">
-                    <a:alpha val="100000"/>
-                  </a:srgbClr>
-                </a:gs>
-              </a:gsLst>
-              <a:lin ang="0"/>
-            </a:gradFill>
-          </p:spPr>
-          <p:txBody>
-            <a:bodyPr/>
-            <a:lstStyle/>
-            <a:p>
-              <a:endParaRPr lang="es-CO"/>
-            </a:p>
-          </p:txBody>
-        </p:sp>
-        <p:sp>
-          <p:nvSpPr>
-            <p:cNvPr id="13" name="TextBox 13">
-              <a:extLst>
-                <a:ext uri="{FF2B5EF4-FFF2-40B4-BE49-F238E27FC236}">
-                  <a16:creationId xmlns:a16="http://schemas.microsoft.com/office/drawing/2014/main" id="{BAD4412D-5693-E3AA-D106-377EBC613354}"/>
-                </a:ext>
-              </a:extLst>
-            </p:cNvPr>
-            <p:cNvSpPr txBox="1"/>
-            <p:nvPr/>
-          </p:nvSpPr>
-          <p:spPr>
-            <a:xfrm>
-              <a:off x="0" y="-38100"/>
-              <a:ext cx="2292514" cy="73635"/>
-            </a:xfrm>
-            <a:prstGeom prst="rect">
-              <a:avLst/>
-            </a:prstGeom>
-          </p:spPr>
-          <p:txBody>
-            <a:bodyPr lIns="50800" tIns="50800" rIns="50800" bIns="50800" rtlCol="0" anchor="ctr"/>
-            <a:lstStyle/>
-            <a:p>
-              <a:pPr algn="ctr">
-                <a:lnSpc>
-                  <a:spcPts val="2659"/>
-                </a:lnSpc>
-              </a:pPr>
-              <a:endParaRPr/>
-            </a:p>
-          </p:txBody>
-        </p:sp>
-      </p:grpSp>
-      <p:sp>
-        <p:nvSpPr>
-          <p:cNvPr id="15" name="TextBox 15">
-            <a:extLst>
-              <a:ext uri="{FF2B5EF4-FFF2-40B4-BE49-F238E27FC236}">
-                <a16:creationId xmlns:a16="http://schemas.microsoft.com/office/drawing/2014/main" id="{ABE0AB94-776F-2C13-6497-74ED6134EEEE}"/>
-              </a:ext>
-            </a:extLst>
-          </p:cNvPr>
-          <p:cNvSpPr txBox="1"/>
-          <p:nvPr/>
-        </p:nvSpPr>
-        <p:spPr>
-          <a:xfrm>
-            <a:off x="790434" y="4457700"/>
-            <a:ext cx="8321721" cy="2342693"/>
-          </a:xfrm>
-          <a:prstGeom prst="rect">
-            <a:avLst/>
-          </a:prstGeom>
-        </p:spPr>
-        <p:txBody>
-          <a:bodyPr wrap="square" lIns="0" tIns="0" rIns="0" bIns="0" rtlCol="0" anchor="t">
-            <a:spAutoFit/>
-          </a:bodyPr>
-          <a:lstStyle/>
-          <a:p>
-            <a:pPr algn="ctr">
-              <a:lnSpc>
-                <a:spcPts val="6159"/>
-              </a:lnSpc>
-              <a:spcBef>
-                <a:spcPct val="0"/>
-              </a:spcBef>
-            </a:pPr>
-            <a:r>
-              <a:rPr lang="es-ES" sz="4400" b="1" dirty="0"/>
-              <a:t>Fundamentos del Catálogo y Gobierno de Datos</a:t>
-            </a:r>
-          </a:p>
-          <a:p>
-            <a:pPr algn="ctr">
-              <a:lnSpc>
-                <a:spcPts val="6159"/>
-              </a:lnSpc>
-              <a:spcBef>
-                <a:spcPct val="0"/>
-              </a:spcBef>
-            </a:pPr>
-            <a:endParaRPr lang="es-CO" sz="4350" b="1" noProof="0" dirty="0">
-              <a:solidFill>
-                <a:srgbClr val="700A89"/>
-              </a:solidFill>
-              <a:latin typeface="Poppins 1 Bold"/>
-              <a:cs typeface="Poppins 1 Bold"/>
-              <a:sym typeface="Poppins 1 Bold"/>
-            </a:endParaRPr>
-          </a:p>
-        </p:txBody>
-      </p:sp>
-    </p:spTree>
-    <p:extLst>
-      <p:ext uri="{BB962C8B-B14F-4D97-AF65-F5344CB8AC3E}">
-        <p14:creationId xmlns:p14="http://schemas.microsoft.com/office/powerpoint/2010/main" val="1275157545"/>
-      </p:ext>
-    </p:extLst>
-  </p:cSld>
-  <p:clrMapOvr>
-    <a:masterClrMapping/>
-  </p:clrMapOvr>
-</p:sld>
-</file>
-
-<file path=ppt/slides/slide11.xml><?xml version="1.0" encoding="utf-8"?>
-<p:sld xmlns:a="http://schemas.openxmlformats.org/drawingml/2006/main" xmlns:r="http://schemas.openxmlformats.org/officeDocument/2006/relationships" xmlns:p="http://schemas.openxmlformats.org/presentationml/2006/main">
-  <p:cSld>
-    <p:spTree>
-      <p:nvGrpSpPr>
-        <p:cNvPr id="1" name="">
-          <a:extLst>
-            <a:ext uri="{FF2B5EF4-FFF2-40B4-BE49-F238E27FC236}">
-              <a16:creationId xmlns:a16="http://schemas.microsoft.com/office/drawing/2014/main" id="{3B9EFC6E-A5CD-9E5C-4311-FF65B43EFC60}"/>
-            </a:ext>
-          </a:extLst>
-        </p:cNvPr>
-        <p:cNvGrpSpPr/>
-        <p:nvPr/>
-      </p:nvGrpSpPr>
-      <p:grpSpPr>
-        <a:xfrm>
-          <a:off x="0" y="0"/>
-          <a:ext cx="0" cy="0"/>
-          <a:chOff x="0" y="0"/>
-          <a:chExt cx="0" cy="0"/>
-        </a:xfrm>
-      </p:grpSpPr>
-      <p:sp>
-        <p:nvSpPr>
-          <p:cNvPr id="2" name="Freeform 2">
-            <a:extLst>
-              <a:ext uri="{FF2B5EF4-FFF2-40B4-BE49-F238E27FC236}">
-                <a16:creationId xmlns:a16="http://schemas.microsoft.com/office/drawing/2014/main" id="{1CC49C0E-1754-9F32-2373-EC45F069D606}"/>
-              </a:ext>
-            </a:extLst>
-          </p:cNvPr>
-          <p:cNvSpPr/>
-          <p:nvPr/>
-        </p:nvSpPr>
-        <p:spPr>
-          <a:xfrm>
-            <a:off x="16240722" y="9245973"/>
-            <a:ext cx="1388509" cy="555404"/>
-          </a:xfrm>
-          <a:custGeom>
-            <a:avLst/>
-            <a:gdLst/>
-            <a:ahLst/>
-            <a:cxnLst/>
-            <a:rect l="l" t="t" r="r" b="b"/>
-            <a:pathLst>
-              <a:path w="1388509" h="555404">
-                <a:moveTo>
-                  <a:pt x="0" y="0"/>
-                </a:moveTo>
-                <a:lnTo>
-                  <a:pt x="1388510" y="0"/>
-                </a:lnTo>
-                <a:lnTo>
-                  <a:pt x="1388510" y="555404"/>
-                </a:lnTo>
-                <a:lnTo>
-                  <a:pt x="0" y="555404"/>
-                </a:lnTo>
-                <a:lnTo>
-                  <a:pt x="0" y="0"/>
-                </a:lnTo>
-                <a:close/>
-              </a:path>
-            </a:pathLst>
-          </a:custGeom>
-          <a:blipFill>
-            <a:blip r:embed="rId2"/>
-            <a:stretch>
-              <a:fillRect/>
-            </a:stretch>
-          </a:blipFill>
-        </p:spPr>
-        <p:txBody>
-          <a:bodyPr/>
-          <a:lstStyle/>
-          <a:p>
-            <a:endParaRPr lang="es-CO"/>
-          </a:p>
-        </p:txBody>
-      </p:sp>
-      <p:grpSp>
-        <p:nvGrpSpPr>
-          <p:cNvPr id="3" name="Group 3">
-            <a:extLst>
-              <a:ext uri="{FF2B5EF4-FFF2-40B4-BE49-F238E27FC236}">
-                <a16:creationId xmlns:a16="http://schemas.microsoft.com/office/drawing/2014/main" id="{99337439-6C28-FBCA-4F0C-5E4A2EE9A447}"/>
-              </a:ext>
-            </a:extLst>
-          </p:cNvPr>
-          <p:cNvGrpSpPr/>
-          <p:nvPr/>
-        </p:nvGrpSpPr>
-        <p:grpSpPr>
-          <a:xfrm flipV="1">
-            <a:off x="-762000" y="1516854"/>
-            <a:ext cx="8458200" cy="45719"/>
-            <a:chOff x="0" y="0"/>
-            <a:chExt cx="1495010" cy="20069"/>
-          </a:xfrm>
-        </p:grpSpPr>
-        <p:sp>
-          <p:nvSpPr>
-            <p:cNvPr id="4" name="Freeform 4">
-              <a:extLst>
-                <a:ext uri="{FF2B5EF4-FFF2-40B4-BE49-F238E27FC236}">
-                  <a16:creationId xmlns:a16="http://schemas.microsoft.com/office/drawing/2014/main" id="{21D743D3-CA48-1123-7331-BA57B6C2D700}"/>
-                </a:ext>
-              </a:extLst>
-            </p:cNvPr>
-            <p:cNvSpPr/>
-            <p:nvPr/>
-          </p:nvSpPr>
-          <p:spPr>
-            <a:xfrm>
-              <a:off x="0" y="0"/>
-              <a:ext cx="1495010" cy="20069"/>
-            </a:xfrm>
-            <a:custGeom>
-              <a:avLst/>
-              <a:gdLst/>
-              <a:ahLst/>
-              <a:cxnLst/>
-              <a:rect l="l" t="t" r="r" b="b"/>
-              <a:pathLst>
-                <a:path w="1495010" h="20069">
-                  <a:moveTo>
-                    <a:pt x="10035" y="0"/>
-                  </a:moveTo>
-                  <a:lnTo>
-                    <a:pt x="1484976" y="0"/>
-                  </a:lnTo>
-                  <a:cubicBezTo>
-                    <a:pt x="1487637" y="0"/>
-                    <a:pt x="1490189" y="1057"/>
-                    <a:pt x="1492071" y="2939"/>
-                  </a:cubicBezTo>
-                  <a:cubicBezTo>
-                    <a:pt x="1493953" y="4821"/>
-                    <a:pt x="1495010" y="7373"/>
-                    <a:pt x="1495010" y="10035"/>
-                  </a:cubicBezTo>
-                  <a:lnTo>
-                    <a:pt x="1495010" y="10035"/>
-                  </a:lnTo>
-                  <a:cubicBezTo>
-                    <a:pt x="1495010" y="12696"/>
-                    <a:pt x="1493953" y="15248"/>
-                    <a:pt x="1492071" y="17130"/>
-                  </a:cubicBezTo>
-                  <a:cubicBezTo>
-                    <a:pt x="1490189" y="19012"/>
-                    <a:pt x="1487637" y="20069"/>
-                    <a:pt x="1484976" y="20069"/>
-                  </a:cubicBezTo>
-                  <a:lnTo>
-                    <a:pt x="10035" y="20069"/>
-                  </a:lnTo>
-                  <a:cubicBezTo>
-                    <a:pt x="7373" y="20069"/>
-                    <a:pt x="4821" y="19012"/>
-                    <a:pt x="2939" y="17130"/>
-                  </a:cubicBezTo>
-                  <a:cubicBezTo>
-                    <a:pt x="1057" y="15248"/>
-                    <a:pt x="0" y="12696"/>
-                    <a:pt x="0" y="10035"/>
-                  </a:cubicBezTo>
-                  <a:lnTo>
-                    <a:pt x="0" y="10035"/>
-                  </a:lnTo>
-                  <a:cubicBezTo>
-                    <a:pt x="0" y="7373"/>
-                    <a:pt x="1057" y="4821"/>
-                    <a:pt x="2939" y="2939"/>
-                  </a:cubicBezTo>
-                  <a:cubicBezTo>
-                    <a:pt x="4821" y="1057"/>
-                    <a:pt x="7373" y="0"/>
-                    <a:pt x="10035" y="0"/>
-                  </a:cubicBezTo>
-                  <a:close/>
-                </a:path>
-              </a:pathLst>
-            </a:custGeom>
-            <a:gradFill rotWithShape="1">
-              <a:gsLst>
-                <a:gs pos="0">
-                  <a:srgbClr val="6B1374">
-                    <a:alpha val="100000"/>
-                  </a:srgbClr>
-                </a:gs>
-                <a:gs pos="33333">
-                  <a:srgbClr val="700A89">
-                    <a:alpha val="100000"/>
-                  </a:srgbClr>
-                </a:gs>
-                <a:gs pos="66667">
-                  <a:srgbClr val="C20052">
-                    <a:alpha val="100000"/>
-                  </a:srgbClr>
-                </a:gs>
-                <a:gs pos="100000">
-                  <a:srgbClr val="FF0055">
-                    <a:alpha val="100000"/>
-                  </a:srgbClr>
-                </a:gs>
-              </a:gsLst>
-              <a:lin ang="0"/>
-            </a:gradFill>
-          </p:spPr>
-          <p:txBody>
-            <a:bodyPr/>
-            <a:lstStyle/>
-            <a:p>
-              <a:endParaRPr lang="es-CO"/>
-            </a:p>
-          </p:txBody>
-        </p:sp>
-        <p:sp>
-          <p:nvSpPr>
-            <p:cNvPr id="5" name="TextBox 5">
-              <a:extLst>
-                <a:ext uri="{FF2B5EF4-FFF2-40B4-BE49-F238E27FC236}">
-                  <a16:creationId xmlns:a16="http://schemas.microsoft.com/office/drawing/2014/main" id="{F7807437-F125-3B9C-4F31-3570A28EFA56}"/>
-                </a:ext>
-              </a:extLst>
-            </p:cNvPr>
-            <p:cNvSpPr txBox="1"/>
-            <p:nvPr/>
-          </p:nvSpPr>
-          <p:spPr>
-            <a:xfrm>
-              <a:off x="0" y="-38100"/>
-              <a:ext cx="1495010" cy="58169"/>
-            </a:xfrm>
-            <a:prstGeom prst="rect">
-              <a:avLst/>
-            </a:prstGeom>
-          </p:spPr>
-          <p:txBody>
-            <a:bodyPr lIns="50800" tIns="50800" rIns="50800" bIns="50800" rtlCol="0" anchor="ctr"/>
-            <a:lstStyle/>
-            <a:p>
-              <a:pPr algn="ctr">
-                <a:lnSpc>
-                  <a:spcPts val="2659"/>
-                </a:lnSpc>
-              </a:pPr>
-              <a:endParaRPr/>
-            </a:p>
-          </p:txBody>
-        </p:sp>
-      </p:grpSp>
-      <p:grpSp>
-        <p:nvGrpSpPr>
-          <p:cNvPr id="6" name="Group 6">
-            <a:extLst>
-              <a:ext uri="{FF2B5EF4-FFF2-40B4-BE49-F238E27FC236}">
-                <a16:creationId xmlns:a16="http://schemas.microsoft.com/office/drawing/2014/main" id="{31044BC0-693B-691C-3219-35747D6A8A35}"/>
-              </a:ext>
-            </a:extLst>
-          </p:cNvPr>
-          <p:cNvGrpSpPr/>
-          <p:nvPr/>
-        </p:nvGrpSpPr>
-        <p:grpSpPr>
-          <a:xfrm>
-            <a:off x="17896105" y="0"/>
-            <a:ext cx="449045" cy="10287000"/>
-            <a:chOff x="0" y="0"/>
-            <a:chExt cx="598727" cy="13716000"/>
-          </a:xfrm>
-        </p:grpSpPr>
-        <p:grpSp>
-          <p:nvGrpSpPr>
-            <p:cNvPr id="7" name="Group 7">
-              <a:extLst>
-                <a:ext uri="{FF2B5EF4-FFF2-40B4-BE49-F238E27FC236}">
-                  <a16:creationId xmlns:a16="http://schemas.microsoft.com/office/drawing/2014/main" id="{0C9CA8E9-5F04-4FCE-7D1D-8A68AC35FC77}"/>
-                </a:ext>
-              </a:extLst>
-            </p:cNvPr>
-            <p:cNvGrpSpPr/>
-            <p:nvPr/>
-          </p:nvGrpSpPr>
-          <p:grpSpPr>
-            <a:xfrm>
-              <a:off x="77114" y="0"/>
-              <a:ext cx="444500" cy="13716000"/>
-              <a:chOff x="0" y="0"/>
-              <a:chExt cx="87802" cy="2709333"/>
-            </a:xfrm>
-          </p:grpSpPr>
-          <p:sp>
-            <p:nvSpPr>
-              <p:cNvPr id="8" name="Freeform 8">
-                <a:extLst>
-                  <a:ext uri="{FF2B5EF4-FFF2-40B4-BE49-F238E27FC236}">
-                    <a16:creationId xmlns:a16="http://schemas.microsoft.com/office/drawing/2014/main" id="{E711F5DD-7AB1-8A81-F7E2-373F97A20AB5}"/>
-                  </a:ext>
-                </a:extLst>
-              </p:cNvPr>
-              <p:cNvSpPr/>
-              <p:nvPr/>
-            </p:nvSpPr>
-            <p:spPr>
-              <a:xfrm>
-                <a:off x="0" y="0"/>
-                <a:ext cx="87802" cy="2709333"/>
-              </a:xfrm>
-              <a:custGeom>
-                <a:avLst/>
-                <a:gdLst/>
-                <a:ahLst/>
-                <a:cxnLst/>
-                <a:rect l="l" t="t" r="r" b="b"/>
-                <a:pathLst>
-                  <a:path w="87802" h="2709333">
-                    <a:moveTo>
-                      <a:pt x="0" y="0"/>
-                    </a:moveTo>
-                    <a:lnTo>
-                      <a:pt x="87802" y="0"/>
-                    </a:lnTo>
-                    <a:lnTo>
-                      <a:pt x="87802" y="2709333"/>
-                    </a:lnTo>
-                    <a:lnTo>
-                      <a:pt x="0" y="2709333"/>
-                    </a:lnTo>
-                    <a:close/>
-                  </a:path>
-                </a:pathLst>
-              </a:custGeom>
-              <a:gradFill rotWithShape="1">
-                <a:gsLst>
-                  <a:gs pos="0">
-                    <a:srgbClr val="6B1374">
-                      <a:alpha val="100000"/>
-                    </a:srgbClr>
-                  </a:gs>
-                  <a:gs pos="33333">
-                    <a:srgbClr val="700A89">
-                      <a:alpha val="100000"/>
-                    </a:srgbClr>
-                  </a:gs>
-                  <a:gs pos="66667">
-                    <a:srgbClr val="C20052">
-                      <a:alpha val="100000"/>
-                    </a:srgbClr>
-                  </a:gs>
-                  <a:gs pos="100000">
-                    <a:srgbClr val="FF0055">
-                      <a:alpha val="100000"/>
-                    </a:srgbClr>
-                  </a:gs>
-                </a:gsLst>
-                <a:lin ang="5400000"/>
-              </a:gradFill>
-            </p:spPr>
-            <p:txBody>
-              <a:bodyPr/>
-              <a:lstStyle/>
-              <a:p>
-                <a:endParaRPr lang="es-CO"/>
-              </a:p>
-            </p:txBody>
-          </p:sp>
-          <p:sp>
-            <p:nvSpPr>
-              <p:cNvPr id="9" name="TextBox 9">
-                <a:extLst>
-                  <a:ext uri="{FF2B5EF4-FFF2-40B4-BE49-F238E27FC236}">
-                    <a16:creationId xmlns:a16="http://schemas.microsoft.com/office/drawing/2014/main" id="{BA55F2D7-D7D9-82D4-F9A6-E6D7C9137352}"/>
-                  </a:ext>
-                </a:extLst>
-              </p:cNvPr>
-              <p:cNvSpPr txBox="1"/>
-              <p:nvPr/>
-            </p:nvSpPr>
-            <p:spPr>
-              <a:xfrm>
-                <a:off x="0" y="-38100"/>
-                <a:ext cx="87802" cy="2747433"/>
-              </a:xfrm>
-              <a:prstGeom prst="rect">
-                <a:avLst/>
-              </a:prstGeom>
-            </p:spPr>
-            <p:txBody>
-              <a:bodyPr lIns="50800" tIns="50800" rIns="50800" bIns="50800" rtlCol="0" anchor="ctr"/>
-              <a:lstStyle/>
-              <a:p>
-                <a:pPr algn="ctr">
-                  <a:lnSpc>
-                    <a:spcPts val="2659"/>
-                  </a:lnSpc>
-                </a:pPr>
-                <a:endParaRPr/>
-              </a:p>
-            </p:txBody>
-          </p:sp>
-        </p:grpSp>
-        <p:sp>
-          <p:nvSpPr>
-            <p:cNvPr id="10" name="Freeform 10">
-              <a:extLst>
-                <a:ext uri="{FF2B5EF4-FFF2-40B4-BE49-F238E27FC236}">
-                  <a16:creationId xmlns:a16="http://schemas.microsoft.com/office/drawing/2014/main" id="{1FB331B8-4917-F854-3846-36D0781CECD8}"/>
-                </a:ext>
-              </a:extLst>
-            </p:cNvPr>
-            <p:cNvSpPr/>
-            <p:nvPr/>
-          </p:nvSpPr>
-          <p:spPr>
-            <a:xfrm>
-              <a:off x="22810" y="1020609"/>
-              <a:ext cx="553108" cy="542737"/>
-            </a:xfrm>
-            <a:custGeom>
-              <a:avLst/>
-              <a:gdLst/>
-              <a:ahLst/>
-              <a:cxnLst/>
-              <a:rect l="l" t="t" r="r" b="b"/>
-              <a:pathLst>
-                <a:path w="553108" h="542737">
-                  <a:moveTo>
-                    <a:pt x="0" y="0"/>
-                  </a:moveTo>
-                  <a:lnTo>
-                    <a:pt x="553108" y="0"/>
-                  </a:lnTo>
-                  <a:lnTo>
-                    <a:pt x="553108" y="542737"/>
-                  </a:lnTo>
-                  <a:lnTo>
-                    <a:pt x="0" y="542737"/>
-                  </a:lnTo>
-                  <a:lnTo>
-                    <a:pt x="0" y="0"/>
-                  </a:lnTo>
-                  <a:close/>
-                </a:path>
-              </a:pathLst>
-            </a:custGeom>
-            <a:blipFill>
-              <a:blip r:embed="rId3">
-                <a:extLst>
-                  <a:ext uri="{96DAC541-7B7A-43D3-8B79-37D633B846F1}">
-                    <asvg:svgBlip xmlns:asvg="http://schemas.microsoft.com/office/drawing/2016/SVG/main" r:embed="rId4"/>
-                  </a:ext>
-                </a:extLst>
-              </a:blip>
-              <a:stretch>
-                <a:fillRect/>
-              </a:stretch>
-            </a:blipFill>
-          </p:spPr>
-          <p:txBody>
-            <a:bodyPr/>
-            <a:lstStyle/>
-            <a:p>
-              <a:endParaRPr lang="es-CO"/>
-            </a:p>
-          </p:txBody>
-        </p:sp>
-        <p:sp>
-          <p:nvSpPr>
-            <p:cNvPr id="11" name="Freeform 11">
-              <a:extLst>
-                <a:ext uri="{FF2B5EF4-FFF2-40B4-BE49-F238E27FC236}">
-                  <a16:creationId xmlns:a16="http://schemas.microsoft.com/office/drawing/2014/main" id="{A82BF2E0-25BC-0029-251E-069D8EA2E7D6}"/>
-                </a:ext>
-              </a:extLst>
-            </p:cNvPr>
-            <p:cNvSpPr/>
-            <p:nvPr/>
-          </p:nvSpPr>
-          <p:spPr>
-            <a:xfrm rot="-10800000">
-              <a:off x="22810" y="102655"/>
-              <a:ext cx="553108" cy="542737"/>
-            </a:xfrm>
-            <a:custGeom>
-              <a:avLst/>
-              <a:gdLst/>
-              <a:ahLst/>
-              <a:cxnLst/>
-              <a:rect l="l" t="t" r="r" b="b"/>
-              <a:pathLst>
-                <a:path w="553108" h="542737">
-                  <a:moveTo>
-                    <a:pt x="0" y="0"/>
-                  </a:moveTo>
-                  <a:lnTo>
-                    <a:pt x="553108" y="0"/>
-                  </a:lnTo>
-                  <a:lnTo>
-                    <a:pt x="553108" y="542737"/>
-                  </a:lnTo>
-                  <a:lnTo>
-                    <a:pt x="0" y="542737"/>
-                  </a:lnTo>
-                  <a:lnTo>
-                    <a:pt x="0" y="0"/>
-                  </a:lnTo>
-                  <a:close/>
-                </a:path>
-              </a:pathLst>
-            </a:custGeom>
-            <a:blipFill>
-              <a:blip r:embed="rId3">
-                <a:extLst>
-                  <a:ext uri="{96DAC541-7B7A-43D3-8B79-37D633B846F1}">
-                    <asvg:svgBlip xmlns:asvg="http://schemas.microsoft.com/office/drawing/2016/SVG/main" r:embed="rId4"/>
-                  </a:ext>
-                </a:extLst>
-              </a:blip>
-              <a:stretch>
-                <a:fillRect/>
-              </a:stretch>
-            </a:blipFill>
-          </p:spPr>
-          <p:txBody>
-            <a:bodyPr/>
-            <a:lstStyle/>
-            <a:p>
-              <a:endParaRPr lang="es-CO"/>
-            </a:p>
-          </p:txBody>
-        </p:sp>
-        <p:grpSp>
-          <p:nvGrpSpPr>
-            <p:cNvPr id="12" name="Group 12">
-              <a:extLst>
-                <a:ext uri="{FF2B5EF4-FFF2-40B4-BE49-F238E27FC236}">
-                  <a16:creationId xmlns:a16="http://schemas.microsoft.com/office/drawing/2014/main" id="{00DB9B39-18D7-B8B7-1D1E-B569F2543D6A}"/>
-                </a:ext>
-              </a:extLst>
-            </p:cNvPr>
-            <p:cNvGrpSpPr/>
-            <p:nvPr/>
-          </p:nvGrpSpPr>
-          <p:grpSpPr>
-            <a:xfrm rot="1460314">
-              <a:off x="1518" y="765089"/>
-              <a:ext cx="595692" cy="135824"/>
-              <a:chOff x="0" y="0"/>
-              <a:chExt cx="1355149" cy="308989"/>
-            </a:xfrm>
-          </p:grpSpPr>
-          <p:sp>
-            <p:nvSpPr>
-              <p:cNvPr id="13" name="Freeform 13">
-                <a:extLst>
-                  <a:ext uri="{FF2B5EF4-FFF2-40B4-BE49-F238E27FC236}">
-                    <a16:creationId xmlns:a16="http://schemas.microsoft.com/office/drawing/2014/main" id="{EA788FAC-38FC-FE05-B21F-35A28AE29CDC}"/>
-                  </a:ext>
-                </a:extLst>
-              </p:cNvPr>
-              <p:cNvSpPr/>
-              <p:nvPr/>
-            </p:nvSpPr>
-            <p:spPr>
-              <a:xfrm>
-                <a:off x="0" y="0"/>
-                <a:ext cx="1355149" cy="308989"/>
-              </a:xfrm>
-              <a:custGeom>
-                <a:avLst/>
-                <a:gdLst/>
-                <a:ahLst/>
-                <a:cxnLst/>
-                <a:rect l="l" t="t" r="r" b="b"/>
-                <a:pathLst>
-                  <a:path w="1355149" h="308989">
-                    <a:moveTo>
-                      <a:pt x="154494" y="0"/>
-                    </a:moveTo>
-                    <a:lnTo>
-                      <a:pt x="1200655" y="0"/>
-                    </a:lnTo>
-                    <a:cubicBezTo>
-                      <a:pt x="1241629" y="0"/>
-                      <a:pt x="1280926" y="16277"/>
-                      <a:pt x="1309899" y="45250"/>
-                    </a:cubicBezTo>
-                    <a:cubicBezTo>
-                      <a:pt x="1338872" y="74224"/>
-                      <a:pt x="1355149" y="113520"/>
-                      <a:pt x="1355149" y="154494"/>
-                    </a:cubicBezTo>
-                    <a:lnTo>
-                      <a:pt x="1355149" y="154494"/>
-                    </a:lnTo>
-                    <a:cubicBezTo>
-                      <a:pt x="1355149" y="239819"/>
-                      <a:pt x="1285980" y="308989"/>
-                      <a:pt x="1200655" y="308989"/>
-                    </a:cubicBezTo>
-                    <a:lnTo>
-                      <a:pt x="154494" y="308989"/>
-                    </a:lnTo>
-                    <a:cubicBezTo>
-                      <a:pt x="113520" y="308989"/>
-                      <a:pt x="74224" y="292712"/>
-                      <a:pt x="45250" y="263738"/>
-                    </a:cubicBezTo>
-                    <a:cubicBezTo>
-                      <a:pt x="16277" y="234765"/>
-                      <a:pt x="0" y="195469"/>
-                      <a:pt x="0" y="154494"/>
-                    </a:cubicBezTo>
-                    <a:lnTo>
-                      <a:pt x="0" y="154494"/>
-                    </a:lnTo>
-                    <a:cubicBezTo>
-                      <a:pt x="0" y="113520"/>
-                      <a:pt x="16277" y="74224"/>
-                      <a:pt x="45250" y="45250"/>
-                    </a:cubicBezTo>
-                    <a:cubicBezTo>
-                      <a:pt x="74224" y="16277"/>
-                      <a:pt x="113520" y="0"/>
-                      <a:pt x="154494" y="0"/>
-                    </a:cubicBezTo>
-                    <a:close/>
-                  </a:path>
-                </a:pathLst>
-              </a:custGeom>
-              <a:solidFill>
-                <a:srgbClr val="FFFFFF"/>
-              </a:solidFill>
-            </p:spPr>
-            <p:txBody>
-              <a:bodyPr/>
-              <a:lstStyle/>
-              <a:p>
-                <a:endParaRPr lang="es-CO"/>
-              </a:p>
-            </p:txBody>
-          </p:sp>
-          <p:sp>
-            <p:nvSpPr>
-              <p:cNvPr id="14" name="TextBox 14">
-                <a:extLst>
-                  <a:ext uri="{FF2B5EF4-FFF2-40B4-BE49-F238E27FC236}">
-                    <a16:creationId xmlns:a16="http://schemas.microsoft.com/office/drawing/2014/main" id="{5584151F-3190-7AB1-C98A-F0C2BBB8AF18}"/>
-                  </a:ext>
-                </a:extLst>
-              </p:cNvPr>
-              <p:cNvSpPr txBox="1"/>
-              <p:nvPr/>
-            </p:nvSpPr>
-            <p:spPr>
-              <a:xfrm>
-                <a:off x="0" y="-38100"/>
-                <a:ext cx="1355149" cy="347089"/>
-              </a:xfrm>
-              <a:prstGeom prst="rect">
-                <a:avLst/>
-              </a:prstGeom>
-            </p:spPr>
-            <p:txBody>
-              <a:bodyPr lIns="50800" tIns="50800" rIns="50800" bIns="50800" rtlCol="0" anchor="ctr"/>
-              <a:lstStyle/>
-              <a:p>
-                <a:pPr algn="ctr">
-                  <a:lnSpc>
-                    <a:spcPts val="2659"/>
-                  </a:lnSpc>
-                </a:pPr>
-                <a:endParaRPr/>
-              </a:p>
-            </p:txBody>
-          </p:sp>
-        </p:grpSp>
-      </p:grpSp>
-      <p:sp>
-        <p:nvSpPr>
-          <p:cNvPr id="16" name="CuadroTexto 15">
-            <a:extLst>
-              <a:ext uri="{FF2B5EF4-FFF2-40B4-BE49-F238E27FC236}">
-                <a16:creationId xmlns:a16="http://schemas.microsoft.com/office/drawing/2014/main" id="{A09C7E0D-B603-D015-945F-4A6AD4A7A8C4}"/>
-              </a:ext>
-            </a:extLst>
-          </p:cNvPr>
-          <p:cNvSpPr txBox="1"/>
-          <p:nvPr/>
-        </p:nvSpPr>
-        <p:spPr>
-          <a:xfrm>
-            <a:off x="609600" y="2476500"/>
-            <a:ext cx="15322680" cy="6494085"/>
-          </a:xfrm>
-          <a:prstGeom prst="rect">
-            <a:avLst/>
-          </a:prstGeom>
-          <a:noFill/>
-        </p:spPr>
-        <p:txBody>
-          <a:bodyPr wrap="square">
-            <a:spAutoFit/>
-          </a:bodyPr>
-          <a:lstStyle/>
-          <a:p>
-            <a:pPr>
-              <a:buFont typeface="Arial" panose="020B0604020202020204" pitchFamily="34" charset="0"/>
-              <a:buChar char="•"/>
-            </a:pPr>
-            <a:r>
-              <a:rPr lang="es-ES" sz="3200" b="1" dirty="0"/>
-              <a:t>Necesidad de un Framework:</a:t>
-            </a:r>
-            <a:r>
-              <a:rPr lang="es-ES" sz="3200" dirty="0"/>
-              <a:t> Las organizaciones requieren un marco de gobierno de datos para extraer </a:t>
-            </a:r>
-            <a:r>
-              <a:rPr lang="es-ES" sz="3200" i="1" dirty="0" err="1"/>
-              <a:t>insights</a:t>
-            </a:r>
-            <a:r>
-              <a:rPr lang="es-ES" sz="3200" dirty="0"/>
-              <a:t> técnicos y de negocio profundos de sus activos de información.</a:t>
-            </a:r>
-          </a:p>
-          <a:p>
-            <a:pPr>
-              <a:buFont typeface="Arial" panose="020B0604020202020204" pitchFamily="34" charset="0"/>
-              <a:buChar char="•"/>
-            </a:pPr>
-            <a:endParaRPr lang="es-ES" sz="3200" dirty="0"/>
-          </a:p>
-          <a:p>
-            <a:pPr>
-              <a:buFont typeface="Arial" panose="020B0604020202020204" pitchFamily="34" charset="0"/>
-              <a:buChar char="•"/>
-            </a:pPr>
-            <a:r>
-              <a:rPr lang="es-ES" sz="3200" b="1" dirty="0"/>
-              <a:t>El Núcleo son los Metadatos:</a:t>
-            </a:r>
-            <a:r>
-              <a:rPr lang="es-ES" sz="3200" dirty="0"/>
-              <a:t> Un catálogo de gobierno gira en torno a dos categorías principales:</a:t>
-            </a:r>
-          </a:p>
-          <a:p>
-            <a:pPr marL="742950" lvl="1" indent="-285750">
-              <a:buFont typeface="Arial" panose="020B0604020202020204" pitchFamily="34" charset="0"/>
-              <a:buChar char="•"/>
-            </a:pPr>
-            <a:r>
-              <a:rPr lang="es-ES" sz="3200" b="1" dirty="0"/>
-              <a:t>Metadatos Técnicos:</a:t>
-            </a:r>
-            <a:r>
-              <a:rPr lang="es-ES" sz="3200" dirty="0"/>
-              <a:t> Información operativa como autor, fechas de creación/modificación, sistema de origen y tamaño del </a:t>
-            </a:r>
-            <a:r>
-              <a:rPr lang="es-ES" sz="3200" i="1" dirty="0" err="1"/>
-              <a:t>dataset</a:t>
-            </a:r>
-            <a:r>
-              <a:rPr lang="es-ES" sz="3200" dirty="0"/>
-              <a:t>.</a:t>
-            </a:r>
-          </a:p>
-          <a:p>
-            <a:pPr marL="742950" lvl="1" indent="-285750">
-              <a:buFont typeface="Arial" panose="020B0604020202020204" pitchFamily="34" charset="0"/>
-              <a:buChar char="•"/>
-            </a:pPr>
-            <a:r>
-              <a:rPr lang="es-ES" sz="3200" b="1" dirty="0"/>
-              <a:t>Metadatos de Negocio:</a:t>
-            </a:r>
-            <a:r>
-              <a:rPr lang="es-ES" sz="3200" dirty="0"/>
-              <a:t> Contexto que enriquece al dato, incluyendo clasificación, estructura, taxonomía y periodos de retención.</a:t>
-            </a:r>
-          </a:p>
-          <a:p>
-            <a:pPr lvl="1"/>
-            <a:endParaRPr lang="es-ES" sz="3200" dirty="0"/>
-          </a:p>
-          <a:p>
-            <a:pPr>
-              <a:buFont typeface="Arial" panose="020B0604020202020204" pitchFamily="34" charset="0"/>
-              <a:buChar char="•"/>
-            </a:pPr>
-            <a:r>
-              <a:rPr lang="es-ES" sz="3200" b="1" dirty="0"/>
-              <a:t>Cultura "Data-</a:t>
-            </a:r>
-            <a:r>
-              <a:rPr lang="es-ES" sz="3200" b="1" dirty="0" err="1"/>
-              <a:t>Driven</a:t>
-            </a:r>
-            <a:r>
-              <a:rPr lang="es-ES" sz="3200" b="1" dirty="0"/>
-              <a:t>":</a:t>
-            </a:r>
-            <a:r>
-              <a:rPr lang="es-ES" sz="3200" dirty="0"/>
-              <a:t> La falta de decisiones basadas en datos limita el potencial de la empresa, relegando las estrategias a simples suposiciones. Un enfoque centrado en los datos optimiza la logística, las ventas y la interacción con el cliente.</a:t>
-            </a:r>
-          </a:p>
-        </p:txBody>
-      </p:sp>
-      <p:sp>
-        <p:nvSpPr>
-          <p:cNvPr id="18" name="CuadroTexto 17">
-            <a:extLst>
-              <a:ext uri="{FF2B5EF4-FFF2-40B4-BE49-F238E27FC236}">
-                <a16:creationId xmlns:a16="http://schemas.microsoft.com/office/drawing/2014/main" id="{FDC8DC18-E4EB-5F51-703F-64513938A365}"/>
-              </a:ext>
-            </a:extLst>
-          </p:cNvPr>
-          <p:cNvSpPr txBox="1"/>
-          <p:nvPr/>
-        </p:nvSpPr>
-        <p:spPr>
-          <a:xfrm>
-            <a:off x="381000" y="594478"/>
-            <a:ext cx="9560256" cy="646331"/>
-          </a:xfrm>
-          <a:prstGeom prst="rect">
-            <a:avLst/>
-          </a:prstGeom>
-          <a:noFill/>
-        </p:spPr>
-        <p:txBody>
-          <a:bodyPr wrap="square">
-            <a:spAutoFit/>
-          </a:bodyPr>
-          <a:lstStyle/>
-          <a:p>
-            <a:pPr>
-              <a:buNone/>
-            </a:pPr>
-            <a:r>
-              <a:rPr lang="es-ES" sz="3600" b="1" dirty="0"/>
-              <a:t>Fundamentos del Catálogo y Gobierno de Datos</a:t>
-            </a:r>
-          </a:p>
-        </p:txBody>
-      </p:sp>
-    </p:spTree>
-    <p:extLst>
-      <p:ext uri="{BB962C8B-B14F-4D97-AF65-F5344CB8AC3E}">
-        <p14:creationId xmlns:p14="http://schemas.microsoft.com/office/powerpoint/2010/main" val="3670276952"/>
-      </p:ext>
-    </p:extLst>
-  </p:cSld>
-  <p:clrMapOvr>
-    <a:masterClrMapping/>
-  </p:clrMapOvr>
-</p:sld>
-</file>
-
-<file path=ppt/slides/slide12.xml><?xml version="1.0" encoding="utf-8"?>
-<p:sld xmlns:a="http://schemas.openxmlformats.org/drawingml/2006/main" xmlns:r="http://schemas.openxmlformats.org/officeDocument/2006/relationships" xmlns:p="http://schemas.openxmlformats.org/presentationml/2006/main">
-  <p:cSld>
-    <p:spTree>
-      <p:nvGrpSpPr>
-        <p:cNvPr id="1" name="">
-          <a:extLst>
-            <a:ext uri="{FF2B5EF4-FFF2-40B4-BE49-F238E27FC236}">
               <a16:creationId xmlns:a16="http://schemas.microsoft.com/office/drawing/2014/main" id="{E99BE28B-0CE5-28FA-BCFF-C540D9F9D046}"/>
             </a:ext>
           </a:extLst>
@@ -8997,7 +7456,7 @@
 </p:sld>
 </file>
 
-<file path=ppt/slides/slide13.xml><?xml version="1.0" encoding="utf-8"?>
+<file path=ppt/slides/slide11.xml><?xml version="1.0" encoding="utf-8"?>
 <p:sld xmlns:a="http://schemas.openxmlformats.org/drawingml/2006/main" xmlns:r="http://schemas.openxmlformats.org/officeDocument/2006/relationships" xmlns:p="http://schemas.openxmlformats.org/presentationml/2006/main">
   <p:cSld>
     <p:spTree>
@@ -9549,7 +8008,7 @@
 </p:sld>
 </file>
 
-<file path=ppt/slides/slide14.xml><?xml version="1.0" encoding="utf-8"?>
+<file path=ppt/slides/slide12.xml><?xml version="1.0" encoding="utf-8"?>
 <p:sld xmlns:a="http://schemas.openxmlformats.org/drawingml/2006/main" xmlns:r="http://schemas.openxmlformats.org/officeDocument/2006/relationships" xmlns:p="http://schemas.openxmlformats.org/presentationml/2006/main">
   <p:cSld>
     <p:spTree>
@@ -10380,7 +8839,7 @@
 </p:sld>
 </file>
 
-<file path=ppt/slides/slide15.xml><?xml version="1.0" encoding="utf-8"?>
+<file path=ppt/slides/slide13.xml><?xml version="1.0" encoding="utf-8"?>
 <p:sld xmlns:a="http://schemas.openxmlformats.org/drawingml/2006/main" xmlns:r="http://schemas.openxmlformats.org/officeDocument/2006/relationships" xmlns:p="http://schemas.openxmlformats.org/presentationml/2006/main">
   <p:cSld>
     <p:spTree>
@@ -11223,7 +9682,7 @@
 </p:sld>
 </file>
 
-<file path=ppt/slides/slide16.xml><?xml version="1.0" encoding="utf-8"?>
+<file path=ppt/slides/slide14.xml><?xml version="1.0" encoding="utf-8"?>
 <p:sld xmlns:a="http://schemas.openxmlformats.org/drawingml/2006/main" xmlns:r="http://schemas.openxmlformats.org/officeDocument/2006/relationships" xmlns:p="http://schemas.openxmlformats.org/presentationml/2006/main">
   <p:cSld>
     <p:spTree>
@@ -11775,7 +10234,7 @@
 </p:sld>
 </file>
 
-<file path=ppt/slides/slide17.xml><?xml version="1.0" encoding="utf-8"?>
+<file path=ppt/slides/slide15.xml><?xml version="1.0" encoding="utf-8"?>
 <p:sld xmlns:a="http://schemas.openxmlformats.org/drawingml/2006/main" xmlns:r="http://schemas.openxmlformats.org/officeDocument/2006/relationships" xmlns:p="http://schemas.openxmlformats.org/presentationml/2006/main">
   <p:cSld>
     <p:spTree>
@@ -12642,7 +11101,7 @@
 </p:sld>
 </file>
 
-<file path=ppt/slides/slide18.xml><?xml version="1.0" encoding="utf-8"?>
+<file path=ppt/slides/slide16.xml><?xml version="1.0" encoding="utf-8"?>
 <p:sld xmlns:a="http://schemas.openxmlformats.org/drawingml/2006/main" xmlns:r="http://schemas.openxmlformats.org/officeDocument/2006/relationships" xmlns:p="http://schemas.openxmlformats.org/presentationml/2006/main">
   <p:cSld>
     <p:spTree>
@@ -13760,7 +12219,7 @@
 </p:sld>
 </file>
 
-<file path=ppt/slides/slide19.xml><?xml version="1.0" encoding="utf-8"?>
+<file path=ppt/slides/slide17.xml><?xml version="1.0" encoding="utf-8"?>
 <p:sld xmlns:a="http://schemas.openxmlformats.org/drawingml/2006/main" xmlns:r="http://schemas.openxmlformats.org/officeDocument/2006/relationships" xmlns:p="http://schemas.openxmlformats.org/presentationml/2006/main">
   <p:cSld>
     <p:spTree>
@@ -14613,688 +13072,7 @@
 </p:sld>
 </file>
 
-<file path=ppt/slides/slide2.xml><?xml version="1.0" encoding="utf-8"?>
-<p:sld xmlns:a="http://schemas.openxmlformats.org/drawingml/2006/main" xmlns:r="http://schemas.openxmlformats.org/officeDocument/2006/relationships" xmlns:p="http://schemas.openxmlformats.org/presentationml/2006/main">
-  <p:cSld>
-    <p:spTree>
-      <p:nvGrpSpPr>
-        <p:cNvPr id="1" name="">
-          <a:extLst>
-            <a:ext uri="{FF2B5EF4-FFF2-40B4-BE49-F238E27FC236}">
-              <a16:creationId xmlns:a16="http://schemas.microsoft.com/office/drawing/2014/main" id="{4D01EC2D-CC15-1BC1-30D0-D14EFB623874}"/>
-            </a:ext>
-          </a:extLst>
-        </p:cNvPr>
-        <p:cNvGrpSpPr/>
-        <p:nvPr/>
-      </p:nvGrpSpPr>
-      <p:grpSpPr>
-        <a:xfrm>
-          <a:off x="0" y="0"/>
-          <a:ext cx="0" cy="0"/>
-          <a:chOff x="0" y="0"/>
-          <a:chExt cx="0" cy="0"/>
-        </a:xfrm>
-      </p:grpSpPr>
-      <p:sp>
-        <p:nvSpPr>
-          <p:cNvPr id="2" name="Freeform 2">
-            <a:extLst>
-              <a:ext uri="{FF2B5EF4-FFF2-40B4-BE49-F238E27FC236}">
-                <a16:creationId xmlns:a16="http://schemas.microsoft.com/office/drawing/2014/main" id="{FE2E2753-61EF-6902-23C1-D1188C235BF8}"/>
-              </a:ext>
-            </a:extLst>
-          </p:cNvPr>
-          <p:cNvSpPr/>
-          <p:nvPr/>
-        </p:nvSpPr>
-        <p:spPr>
-          <a:xfrm>
-            <a:off x="16526945" y="207818"/>
-            <a:ext cx="1388509" cy="555404"/>
-          </a:xfrm>
-          <a:custGeom>
-            <a:avLst/>
-            <a:gdLst/>
-            <a:ahLst/>
-            <a:cxnLst/>
-            <a:rect l="l" t="t" r="r" b="b"/>
-            <a:pathLst>
-              <a:path w="1388509" h="555404">
-                <a:moveTo>
-                  <a:pt x="0" y="0"/>
-                </a:moveTo>
-                <a:lnTo>
-                  <a:pt x="1388510" y="0"/>
-                </a:lnTo>
-                <a:lnTo>
-                  <a:pt x="1388510" y="555404"/>
-                </a:lnTo>
-                <a:lnTo>
-                  <a:pt x="0" y="555404"/>
-                </a:lnTo>
-                <a:lnTo>
-                  <a:pt x="0" y="0"/>
-                </a:lnTo>
-                <a:close/>
-              </a:path>
-            </a:pathLst>
-          </a:custGeom>
-          <a:blipFill>
-            <a:blip r:embed="rId2"/>
-            <a:stretch>
-              <a:fillRect/>
-            </a:stretch>
-          </a:blipFill>
-        </p:spPr>
-        <p:txBody>
-          <a:bodyPr/>
-          <a:lstStyle/>
-          <a:p>
-            <a:endParaRPr lang="es-CO"/>
-          </a:p>
-        </p:txBody>
-      </p:sp>
-      <p:grpSp>
-        <p:nvGrpSpPr>
-          <p:cNvPr id="3" name="Group 3">
-            <a:extLst>
-              <a:ext uri="{FF2B5EF4-FFF2-40B4-BE49-F238E27FC236}">
-                <a16:creationId xmlns:a16="http://schemas.microsoft.com/office/drawing/2014/main" id="{D17B99F0-DF08-043E-32EA-0700AFA8089F}"/>
-              </a:ext>
-            </a:extLst>
-          </p:cNvPr>
-          <p:cNvGrpSpPr/>
-          <p:nvPr/>
-        </p:nvGrpSpPr>
-        <p:grpSpPr>
-          <a:xfrm>
-            <a:off x="-76200" y="0"/>
-            <a:ext cx="449045" cy="10287000"/>
-            <a:chOff x="0" y="0"/>
-            <a:chExt cx="598727" cy="13716000"/>
-          </a:xfrm>
-        </p:grpSpPr>
-        <p:grpSp>
-          <p:nvGrpSpPr>
-            <p:cNvPr id="4" name="Group 4">
-              <a:extLst>
-                <a:ext uri="{FF2B5EF4-FFF2-40B4-BE49-F238E27FC236}">
-                  <a16:creationId xmlns:a16="http://schemas.microsoft.com/office/drawing/2014/main" id="{014AE4B9-3FFA-A795-90E9-B1B001AB8F1D}"/>
-                </a:ext>
-              </a:extLst>
-            </p:cNvPr>
-            <p:cNvGrpSpPr/>
-            <p:nvPr/>
-          </p:nvGrpSpPr>
-          <p:grpSpPr>
-            <a:xfrm>
-              <a:off x="77114" y="0"/>
-              <a:ext cx="444500" cy="13716000"/>
-              <a:chOff x="0" y="0"/>
-              <a:chExt cx="87802" cy="2709333"/>
-            </a:xfrm>
-          </p:grpSpPr>
-          <p:sp>
-            <p:nvSpPr>
-              <p:cNvPr id="5" name="Freeform 5">
-                <a:extLst>
-                  <a:ext uri="{FF2B5EF4-FFF2-40B4-BE49-F238E27FC236}">
-                    <a16:creationId xmlns:a16="http://schemas.microsoft.com/office/drawing/2014/main" id="{6D0CA364-AB4C-4622-BFF6-E8AD30030BA1}"/>
-                  </a:ext>
-                </a:extLst>
-              </p:cNvPr>
-              <p:cNvSpPr/>
-              <p:nvPr/>
-            </p:nvSpPr>
-            <p:spPr>
-              <a:xfrm>
-                <a:off x="0" y="0"/>
-                <a:ext cx="87802" cy="2709333"/>
-              </a:xfrm>
-              <a:custGeom>
-                <a:avLst/>
-                <a:gdLst/>
-                <a:ahLst/>
-                <a:cxnLst/>
-                <a:rect l="l" t="t" r="r" b="b"/>
-                <a:pathLst>
-                  <a:path w="87802" h="2709333">
-                    <a:moveTo>
-                      <a:pt x="0" y="0"/>
-                    </a:moveTo>
-                    <a:lnTo>
-                      <a:pt x="87802" y="0"/>
-                    </a:lnTo>
-                    <a:lnTo>
-                      <a:pt x="87802" y="2709333"/>
-                    </a:lnTo>
-                    <a:lnTo>
-                      <a:pt x="0" y="2709333"/>
-                    </a:lnTo>
-                    <a:close/>
-                  </a:path>
-                </a:pathLst>
-              </a:custGeom>
-              <a:gradFill rotWithShape="1">
-                <a:gsLst>
-                  <a:gs pos="0">
-                    <a:srgbClr val="6B1374">
-                      <a:alpha val="100000"/>
-                    </a:srgbClr>
-                  </a:gs>
-                  <a:gs pos="33333">
-                    <a:srgbClr val="700A89">
-                      <a:alpha val="100000"/>
-                    </a:srgbClr>
-                  </a:gs>
-                  <a:gs pos="66667">
-                    <a:srgbClr val="C20052">
-                      <a:alpha val="100000"/>
-                    </a:srgbClr>
-                  </a:gs>
-                  <a:gs pos="100000">
-                    <a:srgbClr val="FF0055">
-                      <a:alpha val="100000"/>
-                    </a:srgbClr>
-                  </a:gs>
-                </a:gsLst>
-                <a:lin ang="5400000"/>
-              </a:gradFill>
-            </p:spPr>
-            <p:txBody>
-              <a:bodyPr/>
-              <a:lstStyle/>
-              <a:p>
-                <a:endParaRPr lang="es-CO"/>
-              </a:p>
-            </p:txBody>
-          </p:sp>
-          <p:sp>
-            <p:nvSpPr>
-              <p:cNvPr id="6" name="TextBox 6">
-                <a:extLst>
-                  <a:ext uri="{FF2B5EF4-FFF2-40B4-BE49-F238E27FC236}">
-                    <a16:creationId xmlns:a16="http://schemas.microsoft.com/office/drawing/2014/main" id="{0DF0665E-10AB-9040-B06E-B406849BFDC1}"/>
-                  </a:ext>
-                </a:extLst>
-              </p:cNvPr>
-              <p:cNvSpPr txBox="1"/>
-              <p:nvPr/>
-            </p:nvSpPr>
-            <p:spPr>
-              <a:xfrm>
-                <a:off x="0" y="-38100"/>
-                <a:ext cx="87802" cy="2747433"/>
-              </a:xfrm>
-              <a:prstGeom prst="rect">
-                <a:avLst/>
-              </a:prstGeom>
-            </p:spPr>
-            <p:txBody>
-              <a:bodyPr lIns="50800" tIns="50800" rIns="50800" bIns="50800" rtlCol="0" anchor="ctr"/>
-              <a:lstStyle/>
-              <a:p>
-                <a:pPr algn="ctr">
-                  <a:lnSpc>
-                    <a:spcPts val="2659"/>
-                  </a:lnSpc>
-                </a:pPr>
-                <a:endParaRPr/>
-              </a:p>
-            </p:txBody>
-          </p:sp>
-        </p:grpSp>
-        <p:sp>
-          <p:nvSpPr>
-            <p:cNvPr id="7" name="Freeform 7">
-              <a:extLst>
-                <a:ext uri="{FF2B5EF4-FFF2-40B4-BE49-F238E27FC236}">
-                  <a16:creationId xmlns:a16="http://schemas.microsoft.com/office/drawing/2014/main" id="{DFC060FF-E0B3-88DE-D40A-36B9D6BC891B}"/>
-                </a:ext>
-              </a:extLst>
-            </p:cNvPr>
-            <p:cNvSpPr/>
-            <p:nvPr/>
-          </p:nvSpPr>
-          <p:spPr>
-            <a:xfrm>
-              <a:off x="22810" y="1020609"/>
-              <a:ext cx="553108" cy="542737"/>
-            </a:xfrm>
-            <a:custGeom>
-              <a:avLst/>
-              <a:gdLst/>
-              <a:ahLst/>
-              <a:cxnLst/>
-              <a:rect l="l" t="t" r="r" b="b"/>
-              <a:pathLst>
-                <a:path w="553108" h="542737">
-                  <a:moveTo>
-                    <a:pt x="0" y="0"/>
-                  </a:moveTo>
-                  <a:lnTo>
-                    <a:pt x="553108" y="0"/>
-                  </a:lnTo>
-                  <a:lnTo>
-                    <a:pt x="553108" y="542737"/>
-                  </a:lnTo>
-                  <a:lnTo>
-                    <a:pt x="0" y="542737"/>
-                  </a:lnTo>
-                  <a:lnTo>
-                    <a:pt x="0" y="0"/>
-                  </a:lnTo>
-                  <a:close/>
-                </a:path>
-              </a:pathLst>
-            </a:custGeom>
-            <a:blipFill>
-              <a:blip r:embed="rId3">
-                <a:extLst>
-                  <a:ext uri="{96DAC541-7B7A-43D3-8B79-37D633B846F1}">
-                    <asvg:svgBlip xmlns:asvg="http://schemas.microsoft.com/office/drawing/2016/SVG/main" r:embed="rId4"/>
-                  </a:ext>
-                </a:extLst>
-              </a:blip>
-              <a:stretch>
-                <a:fillRect/>
-              </a:stretch>
-            </a:blipFill>
-          </p:spPr>
-          <p:txBody>
-            <a:bodyPr/>
-            <a:lstStyle/>
-            <a:p>
-              <a:endParaRPr lang="es-CO"/>
-            </a:p>
-          </p:txBody>
-        </p:sp>
-        <p:sp>
-          <p:nvSpPr>
-            <p:cNvPr id="8" name="Freeform 8">
-              <a:extLst>
-                <a:ext uri="{FF2B5EF4-FFF2-40B4-BE49-F238E27FC236}">
-                  <a16:creationId xmlns:a16="http://schemas.microsoft.com/office/drawing/2014/main" id="{CCC9AE82-8B1D-D875-E75A-B6962ACD39C4}"/>
-                </a:ext>
-              </a:extLst>
-            </p:cNvPr>
-            <p:cNvSpPr/>
-            <p:nvPr/>
-          </p:nvSpPr>
-          <p:spPr>
-            <a:xfrm rot="-10800000">
-              <a:off x="22810" y="102655"/>
-              <a:ext cx="553108" cy="542737"/>
-            </a:xfrm>
-            <a:custGeom>
-              <a:avLst/>
-              <a:gdLst/>
-              <a:ahLst/>
-              <a:cxnLst/>
-              <a:rect l="l" t="t" r="r" b="b"/>
-              <a:pathLst>
-                <a:path w="553108" h="542737">
-                  <a:moveTo>
-                    <a:pt x="0" y="0"/>
-                  </a:moveTo>
-                  <a:lnTo>
-                    <a:pt x="553108" y="0"/>
-                  </a:lnTo>
-                  <a:lnTo>
-                    <a:pt x="553108" y="542737"/>
-                  </a:lnTo>
-                  <a:lnTo>
-                    <a:pt x="0" y="542737"/>
-                  </a:lnTo>
-                  <a:lnTo>
-                    <a:pt x="0" y="0"/>
-                  </a:lnTo>
-                  <a:close/>
-                </a:path>
-              </a:pathLst>
-            </a:custGeom>
-            <a:blipFill>
-              <a:blip r:embed="rId3">
-                <a:extLst>
-                  <a:ext uri="{96DAC541-7B7A-43D3-8B79-37D633B846F1}">
-                    <asvg:svgBlip xmlns:asvg="http://schemas.microsoft.com/office/drawing/2016/SVG/main" r:embed="rId4"/>
-                  </a:ext>
-                </a:extLst>
-              </a:blip>
-              <a:stretch>
-                <a:fillRect/>
-              </a:stretch>
-            </a:blipFill>
-          </p:spPr>
-          <p:txBody>
-            <a:bodyPr/>
-            <a:lstStyle/>
-            <a:p>
-              <a:endParaRPr lang="es-CO"/>
-            </a:p>
-          </p:txBody>
-        </p:sp>
-        <p:grpSp>
-          <p:nvGrpSpPr>
-            <p:cNvPr id="9" name="Group 9">
-              <a:extLst>
-                <a:ext uri="{FF2B5EF4-FFF2-40B4-BE49-F238E27FC236}">
-                  <a16:creationId xmlns:a16="http://schemas.microsoft.com/office/drawing/2014/main" id="{AC0CE72D-58F6-0C19-D2FB-83BCC72F7EC9}"/>
-                </a:ext>
-              </a:extLst>
-            </p:cNvPr>
-            <p:cNvGrpSpPr/>
-            <p:nvPr/>
-          </p:nvGrpSpPr>
-          <p:grpSpPr>
-            <a:xfrm rot="1460314">
-              <a:off x="1518" y="765089"/>
-              <a:ext cx="595692" cy="135824"/>
-              <a:chOff x="0" y="0"/>
-              <a:chExt cx="1355149" cy="308989"/>
-            </a:xfrm>
-          </p:grpSpPr>
-          <p:sp>
-            <p:nvSpPr>
-              <p:cNvPr id="10" name="Freeform 10">
-                <a:extLst>
-                  <a:ext uri="{FF2B5EF4-FFF2-40B4-BE49-F238E27FC236}">
-                    <a16:creationId xmlns:a16="http://schemas.microsoft.com/office/drawing/2014/main" id="{30A2E158-AC94-3BA6-6C2D-75D53DCCA429}"/>
-                  </a:ext>
-                </a:extLst>
-              </p:cNvPr>
-              <p:cNvSpPr/>
-              <p:nvPr/>
-            </p:nvSpPr>
-            <p:spPr>
-              <a:xfrm>
-                <a:off x="0" y="0"/>
-                <a:ext cx="1355149" cy="308989"/>
-              </a:xfrm>
-              <a:custGeom>
-                <a:avLst/>
-                <a:gdLst/>
-                <a:ahLst/>
-                <a:cxnLst/>
-                <a:rect l="l" t="t" r="r" b="b"/>
-                <a:pathLst>
-                  <a:path w="1355149" h="308989">
-                    <a:moveTo>
-                      <a:pt x="154494" y="0"/>
-                    </a:moveTo>
-                    <a:lnTo>
-                      <a:pt x="1200655" y="0"/>
-                    </a:lnTo>
-                    <a:cubicBezTo>
-                      <a:pt x="1241629" y="0"/>
-                      <a:pt x="1280926" y="16277"/>
-                      <a:pt x="1309899" y="45250"/>
-                    </a:cubicBezTo>
-                    <a:cubicBezTo>
-                      <a:pt x="1338872" y="74224"/>
-                      <a:pt x="1355149" y="113520"/>
-                      <a:pt x="1355149" y="154494"/>
-                    </a:cubicBezTo>
-                    <a:lnTo>
-                      <a:pt x="1355149" y="154494"/>
-                    </a:lnTo>
-                    <a:cubicBezTo>
-                      <a:pt x="1355149" y="239819"/>
-                      <a:pt x="1285980" y="308989"/>
-                      <a:pt x="1200655" y="308989"/>
-                    </a:cubicBezTo>
-                    <a:lnTo>
-                      <a:pt x="154494" y="308989"/>
-                    </a:lnTo>
-                    <a:cubicBezTo>
-                      <a:pt x="113520" y="308989"/>
-                      <a:pt x="74224" y="292712"/>
-                      <a:pt x="45250" y="263738"/>
-                    </a:cubicBezTo>
-                    <a:cubicBezTo>
-                      <a:pt x="16277" y="234765"/>
-                      <a:pt x="0" y="195469"/>
-                      <a:pt x="0" y="154494"/>
-                    </a:cubicBezTo>
-                    <a:lnTo>
-                      <a:pt x="0" y="154494"/>
-                    </a:lnTo>
-                    <a:cubicBezTo>
-                      <a:pt x="0" y="113520"/>
-                      <a:pt x="16277" y="74224"/>
-                      <a:pt x="45250" y="45250"/>
-                    </a:cubicBezTo>
-                    <a:cubicBezTo>
-                      <a:pt x="74224" y="16277"/>
-                      <a:pt x="113520" y="0"/>
-                      <a:pt x="154494" y="0"/>
-                    </a:cubicBezTo>
-                    <a:close/>
-                  </a:path>
-                </a:pathLst>
-              </a:custGeom>
-              <a:solidFill>
-                <a:srgbClr val="FFFFFF"/>
-              </a:solidFill>
-            </p:spPr>
-            <p:txBody>
-              <a:bodyPr/>
-              <a:lstStyle/>
-              <a:p>
-                <a:endParaRPr lang="es-CO"/>
-              </a:p>
-            </p:txBody>
-          </p:sp>
-          <p:sp>
-            <p:nvSpPr>
-              <p:cNvPr id="11" name="TextBox 11">
-                <a:extLst>
-                  <a:ext uri="{FF2B5EF4-FFF2-40B4-BE49-F238E27FC236}">
-                    <a16:creationId xmlns:a16="http://schemas.microsoft.com/office/drawing/2014/main" id="{27578B53-3142-A744-FED6-B5A8AF9A0B24}"/>
-                  </a:ext>
-                </a:extLst>
-              </p:cNvPr>
-              <p:cNvSpPr txBox="1"/>
-              <p:nvPr/>
-            </p:nvSpPr>
-            <p:spPr>
-              <a:xfrm>
-                <a:off x="0" y="-38100"/>
-                <a:ext cx="1355149" cy="347089"/>
-              </a:xfrm>
-              <a:prstGeom prst="rect">
-                <a:avLst/>
-              </a:prstGeom>
-            </p:spPr>
-            <p:txBody>
-              <a:bodyPr lIns="50800" tIns="50800" rIns="50800" bIns="50800" rtlCol="0" anchor="ctr"/>
-              <a:lstStyle/>
-              <a:p>
-                <a:pPr algn="ctr">
-                  <a:lnSpc>
-                    <a:spcPts val="2659"/>
-                  </a:lnSpc>
-                </a:pPr>
-                <a:endParaRPr/>
-              </a:p>
-            </p:txBody>
-          </p:sp>
-        </p:grpSp>
-      </p:grpSp>
-      <p:sp>
-        <p:nvSpPr>
-          <p:cNvPr id="14" name="CuadroTexto 13">
-            <a:extLst>
-              <a:ext uri="{FF2B5EF4-FFF2-40B4-BE49-F238E27FC236}">
-                <a16:creationId xmlns:a16="http://schemas.microsoft.com/office/drawing/2014/main" id="{D00DC911-3CE3-067B-1826-0882AB709803}"/>
-              </a:ext>
-            </a:extLst>
-          </p:cNvPr>
-          <p:cNvSpPr txBox="1"/>
-          <p:nvPr/>
-        </p:nvSpPr>
-        <p:spPr>
-          <a:xfrm>
-            <a:off x="2631439" y="1866900"/>
-            <a:ext cx="14554200" cy="7478970"/>
-          </a:xfrm>
-          <a:prstGeom prst="rect">
-            <a:avLst/>
-          </a:prstGeom>
-          <a:noFill/>
-        </p:spPr>
-        <p:txBody>
-          <a:bodyPr wrap="square">
-            <a:spAutoFit/>
-          </a:bodyPr>
-          <a:lstStyle/>
-          <a:p>
-            <a:r>
-              <a:rPr lang="es-ES" sz="3600" b="1" dirty="0">
-                <a:latin typeface="Poppins 1 Bold" panose="020B0604020202020204" charset="0"/>
-                <a:cs typeface="Poppins 1 Bold" panose="020B0604020202020204" charset="0"/>
-              </a:rPr>
-              <a:t>Agenda</a:t>
-            </a:r>
-          </a:p>
-          <a:p>
-            <a:endParaRPr lang="es-ES" sz="3600" b="1" dirty="0">
-              <a:latin typeface="Poppins 1 Bold" panose="020B0604020202020204" charset="0"/>
-              <a:cs typeface="Poppins 1 Bold" panose="020B0604020202020204" charset="0"/>
-            </a:endParaRPr>
-          </a:p>
-          <a:p>
-            <a:endParaRPr lang="es-ES" sz="3600" b="1" dirty="0">
-              <a:latin typeface="Poppins 1 Bold" panose="020B0604020202020204" charset="0"/>
-              <a:cs typeface="Poppins 1 Bold" panose="020B0604020202020204" charset="0"/>
-            </a:endParaRPr>
-          </a:p>
-          <a:p>
-            <a:r>
-              <a:rPr lang="es-ES" sz="3600" dirty="0">
-                <a:latin typeface="Poppins" panose="00000500000000000000" pitchFamily="2" charset="0"/>
-                <a:cs typeface="Poppins" panose="00000500000000000000" pitchFamily="2" charset="0"/>
-              </a:rPr>
-              <a:t>1. Presentación de integrantes</a:t>
-            </a:r>
-          </a:p>
-          <a:p>
-            <a:pPr lvl="0"/>
-            <a:r>
-              <a:rPr lang="es-MX" sz="3600" dirty="0">
-                <a:latin typeface="Poppins" panose="00000500000000000000" pitchFamily="2" charset="0"/>
-                <a:cs typeface="Poppins" panose="00000500000000000000" pitchFamily="2" charset="0"/>
-              </a:rPr>
-              <a:t>2. ¿Qué es la ingeniería de datos? </a:t>
-            </a:r>
-            <a:r>
-              <a:rPr lang="es-MX" sz="3600" b="1" i="1" dirty="0">
-                <a:latin typeface="Poppins" panose="00000500000000000000" pitchFamily="2" charset="0"/>
-                <a:cs typeface="Poppins" panose="00000500000000000000" pitchFamily="2" charset="0"/>
-              </a:rPr>
-              <a:t>1 iteración</a:t>
-            </a:r>
-          </a:p>
-          <a:p>
-            <a:r>
-              <a:rPr lang="es-MX" sz="3600" dirty="0">
-                <a:latin typeface="Poppins" panose="00000500000000000000" pitchFamily="2" charset="0"/>
-                <a:cs typeface="Poppins" panose="00000500000000000000" pitchFamily="2" charset="0"/>
-              </a:rPr>
-              <a:t>3. ¿Por qué es interesante la ingeniería de datos? </a:t>
-            </a:r>
-            <a:r>
-              <a:rPr lang="es-MX" sz="3600" b="1" i="1" dirty="0">
-                <a:latin typeface="Poppins" panose="00000500000000000000" pitchFamily="2" charset="0"/>
-                <a:cs typeface="Poppins" panose="00000500000000000000" pitchFamily="2" charset="0"/>
-              </a:rPr>
-              <a:t>1 iteración</a:t>
-            </a:r>
-          </a:p>
-          <a:p>
-            <a:r>
-              <a:rPr lang="es-MX" sz="3600" dirty="0">
-                <a:latin typeface="Poppins" panose="00000500000000000000" pitchFamily="2" charset="0"/>
-                <a:cs typeface="Poppins" panose="00000500000000000000" pitchFamily="2" charset="0"/>
-              </a:rPr>
-              <a:t>4. ¿Como formarnos en ingeniería de datos? </a:t>
-            </a:r>
-            <a:r>
-              <a:rPr lang="es-MX" sz="3600" b="1" i="1" dirty="0">
-                <a:latin typeface="Poppins" panose="00000500000000000000" pitchFamily="2" charset="0"/>
-                <a:cs typeface="Poppins" panose="00000500000000000000" pitchFamily="2" charset="0"/>
-              </a:rPr>
-              <a:t>1 iteración</a:t>
-            </a:r>
-          </a:p>
-          <a:p>
-            <a:r>
-              <a:rPr lang="es-MX" sz="3600" dirty="0">
-                <a:latin typeface="Poppins" panose="00000500000000000000" pitchFamily="2" charset="0"/>
-                <a:cs typeface="Poppins" panose="00000500000000000000" pitchFamily="2" charset="0"/>
-              </a:rPr>
-              <a:t>5 2-3 refinados por una </a:t>
-            </a:r>
-            <a:r>
-              <a:rPr lang="es-MX" sz="3600" b="1" dirty="0">
-                <a:latin typeface="Poppins" panose="00000500000000000000" pitchFamily="2" charset="0"/>
-                <a:cs typeface="Poppins" panose="00000500000000000000" pitchFamily="2" charset="0"/>
-              </a:rPr>
-              <a:t>segunda iteración</a:t>
-            </a:r>
-          </a:p>
-          <a:p>
-            <a:r>
-              <a:rPr lang="es-MX" sz="3600" dirty="0">
-                <a:latin typeface="Poppins" panose="00000500000000000000" pitchFamily="2" charset="0"/>
-                <a:cs typeface="Poppins" panose="00000500000000000000" pitchFamily="2" charset="0"/>
-              </a:rPr>
-              <a:t>6. Relación de ingeniero/a de datos con otros roles</a:t>
-            </a:r>
-          </a:p>
-          <a:p>
-            <a:r>
-              <a:rPr lang="es-MX" sz="3600" dirty="0">
-                <a:latin typeface="Poppins" panose="00000500000000000000" pitchFamily="2" charset="0"/>
-                <a:cs typeface="Poppins" panose="00000500000000000000" pitchFamily="2" charset="0"/>
-              </a:rPr>
-              <a:t>7. Mi forma de entender la educación</a:t>
-            </a:r>
-            <a:endParaRPr lang="es-CO" sz="3600" dirty="0">
-              <a:latin typeface="Poppins" panose="00000500000000000000" pitchFamily="2" charset="0"/>
-              <a:cs typeface="Poppins" panose="00000500000000000000" pitchFamily="2" charset="0"/>
-            </a:endParaRPr>
-          </a:p>
-          <a:p>
-            <a:endParaRPr lang="es-CO" sz="3600" dirty="0"/>
-          </a:p>
-          <a:p>
-            <a:pPr lvl="0"/>
-            <a:endParaRPr lang="es-CO" sz="3600" dirty="0"/>
-          </a:p>
-          <a:p>
-            <a:endParaRPr lang="es-ES" sz="2400" dirty="0"/>
-          </a:p>
-          <a:p>
-            <a:endParaRPr lang="es-ES" sz="2400" dirty="0"/>
-          </a:p>
-        </p:txBody>
-      </p:sp>
-    </p:spTree>
-    <p:extLst>
-      <p:ext uri="{BB962C8B-B14F-4D97-AF65-F5344CB8AC3E}">
-        <p14:creationId xmlns:p14="http://schemas.microsoft.com/office/powerpoint/2010/main" val="1614828400"/>
-      </p:ext>
-    </p:extLst>
-  </p:cSld>
-  <p:clrMapOvr>
-    <a:masterClrMapping/>
-  </p:clrMapOvr>
-</p:sld>
-</file>
-
-<file path=ppt/slides/slide20.xml><?xml version="1.0" encoding="utf-8"?>
+<file path=ppt/slides/slide18.xml><?xml version="1.0" encoding="utf-8"?>
 <p:sld xmlns:a="http://schemas.openxmlformats.org/drawingml/2006/main" xmlns:r="http://schemas.openxmlformats.org/officeDocument/2006/relationships" xmlns:p="http://schemas.openxmlformats.org/presentationml/2006/main">
   <p:cSld>
     <p:spTree>
@@ -16198,7 +13976,7 @@
 </p:sld>
 </file>
 
-<file path=ppt/slides/slide21.xml><?xml version="1.0" encoding="utf-8"?>
+<file path=ppt/slides/slide19.xml><?xml version="1.0" encoding="utf-8"?>
 <p:sld xmlns:a="http://schemas.openxmlformats.org/drawingml/2006/main" xmlns:r="http://schemas.openxmlformats.org/officeDocument/2006/relationships" xmlns:p="http://schemas.openxmlformats.org/presentationml/2006/main">
   <p:cSld>
     <p:spTree>
@@ -17089,7 +14867,652 @@
 </p:sld>
 </file>
 
-<file path=ppt/slides/slide22.xml><?xml version="1.0" encoding="utf-8"?>
+<file path=ppt/slides/slide2.xml><?xml version="1.0" encoding="utf-8"?>
+<p:sld xmlns:a="http://schemas.openxmlformats.org/drawingml/2006/main" xmlns:r="http://schemas.openxmlformats.org/officeDocument/2006/relationships" xmlns:p="http://schemas.openxmlformats.org/presentationml/2006/main">
+  <p:cSld>
+    <p:spTree>
+      <p:nvGrpSpPr>
+        <p:cNvPr id="1" name="">
+          <a:extLst>
+            <a:ext uri="{FF2B5EF4-FFF2-40B4-BE49-F238E27FC236}">
+              <a16:creationId xmlns:a16="http://schemas.microsoft.com/office/drawing/2014/main" id="{324F57EA-AB2A-D230-8269-26A12105E4DB}"/>
+            </a:ext>
+          </a:extLst>
+        </p:cNvPr>
+        <p:cNvGrpSpPr/>
+        <p:nvPr/>
+      </p:nvGrpSpPr>
+      <p:grpSpPr>
+        <a:xfrm>
+          <a:off x="0" y="0"/>
+          <a:ext cx="0" cy="0"/>
+          <a:chOff x="0" y="0"/>
+          <a:chExt cx="0" cy="0"/>
+        </a:xfrm>
+      </p:grpSpPr>
+      <p:grpSp>
+        <p:nvGrpSpPr>
+          <p:cNvPr id="3" name="Group 3">
+            <a:extLst>
+              <a:ext uri="{FF2B5EF4-FFF2-40B4-BE49-F238E27FC236}">
+                <a16:creationId xmlns:a16="http://schemas.microsoft.com/office/drawing/2014/main" id="{763BEABA-6A1E-0588-6E8E-B829C74E8AAA}"/>
+              </a:ext>
+            </a:extLst>
+          </p:cNvPr>
+          <p:cNvGrpSpPr/>
+          <p:nvPr/>
+        </p:nvGrpSpPr>
+        <p:grpSpPr>
+          <a:xfrm rot="-10800000">
+            <a:off x="10392303" y="0"/>
+            <a:ext cx="7895697" cy="10287000"/>
+            <a:chOff x="0" y="0"/>
+            <a:chExt cx="2079525" cy="2709333"/>
+          </a:xfrm>
+        </p:grpSpPr>
+        <p:sp>
+          <p:nvSpPr>
+            <p:cNvPr id="4" name="Freeform 4">
+              <a:extLst>
+                <a:ext uri="{FF2B5EF4-FFF2-40B4-BE49-F238E27FC236}">
+                  <a16:creationId xmlns:a16="http://schemas.microsoft.com/office/drawing/2014/main" id="{74725FA9-DB41-09A5-DF03-37153937910A}"/>
+                </a:ext>
+              </a:extLst>
+            </p:cNvPr>
+            <p:cNvSpPr/>
+            <p:nvPr/>
+          </p:nvSpPr>
+          <p:spPr>
+            <a:xfrm>
+              <a:off x="0" y="0"/>
+              <a:ext cx="2079525" cy="2709333"/>
+            </a:xfrm>
+            <a:custGeom>
+              <a:avLst/>
+              <a:gdLst/>
+              <a:ahLst/>
+              <a:cxnLst/>
+              <a:rect l="l" t="t" r="r" b="b"/>
+              <a:pathLst>
+                <a:path w="2079525" h="2709333">
+                  <a:moveTo>
+                    <a:pt x="0" y="0"/>
+                  </a:moveTo>
+                  <a:lnTo>
+                    <a:pt x="2079525" y="0"/>
+                  </a:lnTo>
+                  <a:lnTo>
+                    <a:pt x="2079525" y="2709333"/>
+                  </a:lnTo>
+                  <a:lnTo>
+                    <a:pt x="0" y="2709333"/>
+                  </a:lnTo>
+                  <a:close/>
+                </a:path>
+              </a:pathLst>
+            </a:custGeom>
+            <a:gradFill rotWithShape="1">
+              <a:gsLst>
+                <a:gs pos="0">
+                  <a:srgbClr val="6B1374">
+                    <a:alpha val="100000"/>
+                  </a:srgbClr>
+                </a:gs>
+                <a:gs pos="33333">
+                  <a:srgbClr val="700A89">
+                    <a:alpha val="100000"/>
+                  </a:srgbClr>
+                </a:gs>
+                <a:gs pos="66667">
+                  <a:srgbClr val="C20052">
+                    <a:alpha val="100000"/>
+                  </a:srgbClr>
+                </a:gs>
+                <a:gs pos="100000">
+                  <a:srgbClr val="FF0055">
+                    <a:alpha val="100000"/>
+                  </a:srgbClr>
+                </a:gs>
+              </a:gsLst>
+              <a:lin ang="5400000"/>
+            </a:gradFill>
+          </p:spPr>
+          <p:txBody>
+            <a:bodyPr/>
+            <a:lstStyle/>
+            <a:p>
+              <a:endParaRPr lang="es-CO"/>
+            </a:p>
+          </p:txBody>
+        </p:sp>
+        <p:sp>
+          <p:nvSpPr>
+            <p:cNvPr id="5" name="TextBox 5">
+              <a:extLst>
+                <a:ext uri="{FF2B5EF4-FFF2-40B4-BE49-F238E27FC236}">
+                  <a16:creationId xmlns:a16="http://schemas.microsoft.com/office/drawing/2014/main" id="{912FEF42-0636-3E17-8A6D-0E140C7E4274}"/>
+                </a:ext>
+              </a:extLst>
+            </p:cNvPr>
+            <p:cNvSpPr txBox="1"/>
+            <p:nvPr/>
+          </p:nvSpPr>
+          <p:spPr>
+            <a:xfrm>
+              <a:off x="0" y="-38100"/>
+              <a:ext cx="2079525" cy="2747433"/>
+            </a:xfrm>
+            <a:prstGeom prst="rect">
+              <a:avLst/>
+            </a:prstGeom>
+          </p:spPr>
+          <p:txBody>
+            <a:bodyPr lIns="50800" tIns="50800" rIns="50800" bIns="50800" rtlCol="0" anchor="ctr"/>
+            <a:lstStyle/>
+            <a:p>
+              <a:pPr algn="ctr">
+                <a:lnSpc>
+                  <a:spcPts val="2659"/>
+                </a:lnSpc>
+                <a:spcBef>
+                  <a:spcPct val="0"/>
+                </a:spcBef>
+              </a:pPr>
+              <a:endParaRPr/>
+            </a:p>
+          </p:txBody>
+        </p:sp>
+      </p:grpSp>
+      <p:sp>
+        <p:nvSpPr>
+          <p:cNvPr id="6" name="Freeform 6">
+            <a:extLst>
+              <a:ext uri="{FF2B5EF4-FFF2-40B4-BE49-F238E27FC236}">
+                <a16:creationId xmlns:a16="http://schemas.microsoft.com/office/drawing/2014/main" id="{70C63301-6F78-06FB-FAD1-BFAE730F4912}"/>
+              </a:ext>
+            </a:extLst>
+          </p:cNvPr>
+          <p:cNvSpPr/>
+          <p:nvPr/>
+        </p:nvSpPr>
+        <p:spPr>
+          <a:xfrm>
+            <a:off x="9562641" y="4953536"/>
+            <a:ext cx="4777510" cy="4687932"/>
+          </a:xfrm>
+          <a:custGeom>
+            <a:avLst/>
+            <a:gdLst/>
+            <a:ahLst/>
+            <a:cxnLst/>
+            <a:rect l="l" t="t" r="r" b="b"/>
+            <a:pathLst>
+              <a:path w="4777510" h="4687932">
+                <a:moveTo>
+                  <a:pt x="0" y="0"/>
+                </a:moveTo>
+                <a:lnTo>
+                  <a:pt x="4777511" y="0"/>
+                </a:lnTo>
+                <a:lnTo>
+                  <a:pt x="4777511" y="4687932"/>
+                </a:lnTo>
+                <a:lnTo>
+                  <a:pt x="0" y="4687932"/>
+                </a:lnTo>
+                <a:lnTo>
+                  <a:pt x="0" y="0"/>
+                </a:lnTo>
+                <a:close/>
+              </a:path>
+            </a:pathLst>
+          </a:custGeom>
+          <a:blipFill>
+            <a:blip r:embed="rId2">
+              <a:extLst>
+                <a:ext uri="{96DAC541-7B7A-43D3-8B79-37D633B846F1}">
+                  <asvg:svgBlip xmlns:asvg="http://schemas.microsoft.com/office/drawing/2016/SVG/main" r:embed="rId3"/>
+                </a:ext>
+              </a:extLst>
+            </a:blip>
+            <a:stretch>
+              <a:fillRect/>
+            </a:stretch>
+          </a:blipFill>
+        </p:spPr>
+        <p:txBody>
+          <a:bodyPr/>
+          <a:lstStyle/>
+          <a:p>
+            <a:endParaRPr lang="es-CO"/>
+          </a:p>
+        </p:txBody>
+      </p:sp>
+      <p:sp>
+        <p:nvSpPr>
+          <p:cNvPr id="7" name="Freeform 7">
+            <a:extLst>
+              <a:ext uri="{FF2B5EF4-FFF2-40B4-BE49-F238E27FC236}">
+                <a16:creationId xmlns:a16="http://schemas.microsoft.com/office/drawing/2014/main" id="{52FFCCEB-96B9-EDFB-AFD6-2797FA7C98E5}"/>
+              </a:ext>
+            </a:extLst>
+          </p:cNvPr>
+          <p:cNvSpPr/>
+          <p:nvPr/>
+        </p:nvSpPr>
+        <p:spPr>
+          <a:xfrm rot="-10800000">
+            <a:off x="14340152" y="455568"/>
+            <a:ext cx="4777510" cy="4687932"/>
+          </a:xfrm>
+          <a:custGeom>
+            <a:avLst/>
+            <a:gdLst/>
+            <a:ahLst/>
+            <a:cxnLst/>
+            <a:rect l="l" t="t" r="r" b="b"/>
+            <a:pathLst>
+              <a:path w="4777510" h="4687932">
+                <a:moveTo>
+                  <a:pt x="0" y="0"/>
+                </a:moveTo>
+                <a:lnTo>
+                  <a:pt x="4777510" y="0"/>
+                </a:lnTo>
+                <a:lnTo>
+                  <a:pt x="4777510" y="4687932"/>
+                </a:lnTo>
+                <a:lnTo>
+                  <a:pt x="0" y="4687932"/>
+                </a:lnTo>
+                <a:lnTo>
+                  <a:pt x="0" y="0"/>
+                </a:lnTo>
+                <a:close/>
+              </a:path>
+            </a:pathLst>
+          </a:custGeom>
+          <a:blipFill>
+            <a:blip r:embed="rId2">
+              <a:extLst>
+                <a:ext uri="{96DAC541-7B7A-43D3-8B79-37D633B846F1}">
+                  <asvg:svgBlip xmlns:asvg="http://schemas.microsoft.com/office/drawing/2016/SVG/main" r:embed="rId3"/>
+                </a:ext>
+              </a:extLst>
+            </a:blip>
+            <a:stretch>
+              <a:fillRect/>
+            </a:stretch>
+          </a:blipFill>
+        </p:spPr>
+        <p:txBody>
+          <a:bodyPr/>
+          <a:lstStyle/>
+          <a:p>
+            <a:endParaRPr lang="es-CO"/>
+          </a:p>
+        </p:txBody>
+      </p:sp>
+      <p:grpSp>
+        <p:nvGrpSpPr>
+          <p:cNvPr id="8" name="Group 8">
+            <a:extLst>
+              <a:ext uri="{FF2B5EF4-FFF2-40B4-BE49-F238E27FC236}">
+                <a16:creationId xmlns:a16="http://schemas.microsoft.com/office/drawing/2014/main" id="{62AE8F99-2121-ACCC-DE87-9D8E38E2B656}"/>
+              </a:ext>
+            </a:extLst>
+          </p:cNvPr>
+          <p:cNvGrpSpPr/>
+          <p:nvPr/>
+        </p:nvGrpSpPr>
+        <p:grpSpPr>
+          <a:xfrm rot="1460314">
+            <a:off x="10661875" y="4518938"/>
+            <a:ext cx="7356554" cy="1249125"/>
+            <a:chOff x="0" y="0"/>
+            <a:chExt cx="1937529" cy="328988"/>
+          </a:xfrm>
+        </p:grpSpPr>
+        <p:sp>
+          <p:nvSpPr>
+            <p:cNvPr id="9" name="Freeform 9">
+              <a:extLst>
+                <a:ext uri="{FF2B5EF4-FFF2-40B4-BE49-F238E27FC236}">
+                  <a16:creationId xmlns:a16="http://schemas.microsoft.com/office/drawing/2014/main" id="{137C37D5-46E2-C18B-B79F-62EFE65E0F7C}"/>
+                </a:ext>
+              </a:extLst>
+            </p:cNvPr>
+            <p:cNvSpPr/>
+            <p:nvPr/>
+          </p:nvSpPr>
+          <p:spPr>
+            <a:xfrm>
+              <a:off x="0" y="0"/>
+              <a:ext cx="1937528" cy="328988"/>
+            </a:xfrm>
+            <a:custGeom>
+              <a:avLst/>
+              <a:gdLst/>
+              <a:ahLst/>
+              <a:cxnLst/>
+              <a:rect l="l" t="t" r="r" b="b"/>
+              <a:pathLst>
+                <a:path w="1937528" h="328988">
+                  <a:moveTo>
+                    <a:pt x="105238" y="0"/>
+                  </a:moveTo>
+                  <a:lnTo>
+                    <a:pt x="1832290" y="0"/>
+                  </a:lnTo>
+                  <a:cubicBezTo>
+                    <a:pt x="1860201" y="0"/>
+                    <a:pt x="1886969" y="11088"/>
+                    <a:pt x="1906705" y="30824"/>
+                  </a:cubicBezTo>
+                  <a:cubicBezTo>
+                    <a:pt x="1926441" y="50560"/>
+                    <a:pt x="1937528" y="77327"/>
+                    <a:pt x="1937528" y="105238"/>
+                  </a:cubicBezTo>
+                  <a:lnTo>
+                    <a:pt x="1937528" y="223749"/>
+                  </a:lnTo>
+                  <a:cubicBezTo>
+                    <a:pt x="1937528" y="281871"/>
+                    <a:pt x="1890412" y="328988"/>
+                    <a:pt x="1832290" y="328988"/>
+                  </a:cubicBezTo>
+                  <a:lnTo>
+                    <a:pt x="105238" y="328988"/>
+                  </a:lnTo>
+                  <a:cubicBezTo>
+                    <a:pt x="77327" y="328988"/>
+                    <a:pt x="50560" y="317900"/>
+                    <a:pt x="30824" y="298164"/>
+                  </a:cubicBezTo>
+                  <a:cubicBezTo>
+                    <a:pt x="11088" y="278428"/>
+                    <a:pt x="0" y="251660"/>
+                    <a:pt x="0" y="223749"/>
+                  </a:cubicBezTo>
+                  <a:lnTo>
+                    <a:pt x="0" y="105238"/>
+                  </a:lnTo>
+                  <a:cubicBezTo>
+                    <a:pt x="0" y="47117"/>
+                    <a:pt x="47117" y="0"/>
+                    <a:pt x="105238" y="0"/>
+                  </a:cubicBezTo>
+                  <a:close/>
+                </a:path>
+              </a:pathLst>
+            </a:custGeom>
+            <a:solidFill>
+              <a:srgbClr val="FFFFFF"/>
+            </a:solidFill>
+          </p:spPr>
+          <p:txBody>
+            <a:bodyPr/>
+            <a:lstStyle/>
+            <a:p>
+              <a:endParaRPr lang="es-CO"/>
+            </a:p>
+          </p:txBody>
+        </p:sp>
+        <p:sp>
+          <p:nvSpPr>
+            <p:cNvPr id="10" name="TextBox 10">
+              <a:extLst>
+                <a:ext uri="{FF2B5EF4-FFF2-40B4-BE49-F238E27FC236}">
+                  <a16:creationId xmlns:a16="http://schemas.microsoft.com/office/drawing/2014/main" id="{927D3582-B0C4-6E41-AA2D-FD73D127DDD6}"/>
+                </a:ext>
+              </a:extLst>
+            </p:cNvPr>
+            <p:cNvSpPr txBox="1"/>
+            <p:nvPr/>
+          </p:nvSpPr>
+          <p:spPr>
+            <a:xfrm>
+              <a:off x="0" y="-38100"/>
+              <a:ext cx="1937529" cy="367088"/>
+            </a:xfrm>
+            <a:prstGeom prst="rect">
+              <a:avLst/>
+            </a:prstGeom>
+          </p:spPr>
+          <p:txBody>
+            <a:bodyPr lIns="50800" tIns="50800" rIns="50800" bIns="50800" rtlCol="0" anchor="ctr"/>
+            <a:lstStyle/>
+            <a:p>
+              <a:pPr algn="ctr">
+                <a:lnSpc>
+                  <a:spcPts val="2659"/>
+                </a:lnSpc>
+              </a:pPr>
+              <a:endParaRPr/>
+            </a:p>
+          </p:txBody>
+        </p:sp>
+      </p:grpSp>
+      <p:grpSp>
+        <p:nvGrpSpPr>
+          <p:cNvPr id="11" name="Group 11">
+            <a:extLst>
+              <a:ext uri="{FF2B5EF4-FFF2-40B4-BE49-F238E27FC236}">
+                <a16:creationId xmlns:a16="http://schemas.microsoft.com/office/drawing/2014/main" id="{D7A6C202-C67A-41DC-7499-D28D188D03E6}"/>
+              </a:ext>
+            </a:extLst>
+          </p:cNvPr>
+          <p:cNvGrpSpPr/>
+          <p:nvPr/>
+        </p:nvGrpSpPr>
+        <p:grpSpPr>
+          <a:xfrm rot="-10800000">
+            <a:off x="-536257" y="9574006"/>
+            <a:ext cx="8704391" cy="134923"/>
+            <a:chOff x="0" y="0"/>
+            <a:chExt cx="2292514" cy="35535"/>
+          </a:xfrm>
+        </p:grpSpPr>
+        <p:sp>
+          <p:nvSpPr>
+            <p:cNvPr id="12" name="Freeform 12">
+              <a:extLst>
+                <a:ext uri="{FF2B5EF4-FFF2-40B4-BE49-F238E27FC236}">
+                  <a16:creationId xmlns:a16="http://schemas.microsoft.com/office/drawing/2014/main" id="{D0807688-3D2E-8BBD-9C7C-BB692B82F405}"/>
+                </a:ext>
+              </a:extLst>
+            </p:cNvPr>
+            <p:cNvSpPr/>
+            <p:nvPr/>
+          </p:nvSpPr>
+          <p:spPr>
+            <a:xfrm>
+              <a:off x="0" y="0"/>
+              <a:ext cx="2292515" cy="35535"/>
+            </a:xfrm>
+            <a:custGeom>
+              <a:avLst/>
+              <a:gdLst/>
+              <a:ahLst/>
+              <a:cxnLst/>
+              <a:rect l="l" t="t" r="r" b="b"/>
+              <a:pathLst>
+                <a:path w="2292515" h="35535">
+                  <a:moveTo>
+                    <a:pt x="17768" y="0"/>
+                  </a:moveTo>
+                  <a:lnTo>
+                    <a:pt x="2274747" y="0"/>
+                  </a:lnTo>
+                  <a:cubicBezTo>
+                    <a:pt x="2284560" y="0"/>
+                    <a:pt x="2292515" y="7955"/>
+                    <a:pt x="2292515" y="17768"/>
+                  </a:cubicBezTo>
+                  <a:lnTo>
+                    <a:pt x="2292515" y="17768"/>
+                  </a:lnTo>
+                  <a:cubicBezTo>
+                    <a:pt x="2292515" y="22480"/>
+                    <a:pt x="2290643" y="26999"/>
+                    <a:pt x="2287311" y="30331"/>
+                  </a:cubicBezTo>
+                  <a:cubicBezTo>
+                    <a:pt x="2283978" y="33663"/>
+                    <a:pt x="2279459" y="35535"/>
+                    <a:pt x="2274747" y="35535"/>
+                  </a:cubicBezTo>
+                  <a:lnTo>
+                    <a:pt x="17768" y="35535"/>
+                  </a:lnTo>
+                  <a:cubicBezTo>
+                    <a:pt x="13055" y="35535"/>
+                    <a:pt x="8536" y="33663"/>
+                    <a:pt x="5204" y="30331"/>
+                  </a:cubicBezTo>
+                  <a:cubicBezTo>
+                    <a:pt x="1872" y="26999"/>
+                    <a:pt x="0" y="22480"/>
+                    <a:pt x="0" y="17768"/>
+                  </a:cubicBezTo>
+                  <a:lnTo>
+                    <a:pt x="0" y="17768"/>
+                  </a:lnTo>
+                  <a:cubicBezTo>
+                    <a:pt x="0" y="13055"/>
+                    <a:pt x="1872" y="8536"/>
+                    <a:pt x="5204" y="5204"/>
+                  </a:cubicBezTo>
+                  <a:cubicBezTo>
+                    <a:pt x="8536" y="1872"/>
+                    <a:pt x="13055" y="0"/>
+                    <a:pt x="17768" y="0"/>
+                  </a:cubicBezTo>
+                  <a:close/>
+                </a:path>
+              </a:pathLst>
+            </a:custGeom>
+            <a:gradFill rotWithShape="1">
+              <a:gsLst>
+                <a:gs pos="0">
+                  <a:srgbClr val="6B1374">
+                    <a:alpha val="100000"/>
+                  </a:srgbClr>
+                </a:gs>
+                <a:gs pos="33333">
+                  <a:srgbClr val="700A89">
+                    <a:alpha val="100000"/>
+                  </a:srgbClr>
+                </a:gs>
+                <a:gs pos="66667">
+                  <a:srgbClr val="C20052">
+                    <a:alpha val="100000"/>
+                  </a:srgbClr>
+                </a:gs>
+                <a:gs pos="100000">
+                  <a:srgbClr val="FF0055">
+                    <a:alpha val="100000"/>
+                  </a:srgbClr>
+                </a:gs>
+              </a:gsLst>
+              <a:lin ang="0"/>
+            </a:gradFill>
+          </p:spPr>
+          <p:txBody>
+            <a:bodyPr/>
+            <a:lstStyle/>
+            <a:p>
+              <a:endParaRPr lang="es-CO"/>
+            </a:p>
+          </p:txBody>
+        </p:sp>
+        <p:sp>
+          <p:nvSpPr>
+            <p:cNvPr id="13" name="TextBox 13">
+              <a:extLst>
+                <a:ext uri="{FF2B5EF4-FFF2-40B4-BE49-F238E27FC236}">
+                  <a16:creationId xmlns:a16="http://schemas.microsoft.com/office/drawing/2014/main" id="{EDE14CBD-71F3-CE58-1900-5B5A694C35F2}"/>
+                </a:ext>
+              </a:extLst>
+            </p:cNvPr>
+            <p:cNvSpPr txBox="1"/>
+            <p:nvPr/>
+          </p:nvSpPr>
+          <p:spPr>
+            <a:xfrm>
+              <a:off x="0" y="-38100"/>
+              <a:ext cx="2292514" cy="73635"/>
+            </a:xfrm>
+            <a:prstGeom prst="rect">
+              <a:avLst/>
+            </a:prstGeom>
+          </p:spPr>
+          <p:txBody>
+            <a:bodyPr lIns="50800" tIns="50800" rIns="50800" bIns="50800" rtlCol="0" anchor="ctr"/>
+            <a:lstStyle/>
+            <a:p>
+              <a:pPr algn="ctr">
+                <a:lnSpc>
+                  <a:spcPts val="2659"/>
+                </a:lnSpc>
+              </a:pPr>
+              <a:endParaRPr/>
+            </a:p>
+          </p:txBody>
+        </p:sp>
+      </p:grpSp>
+      <p:sp>
+        <p:nvSpPr>
+          <p:cNvPr id="15" name="TextBox 15">
+            <a:extLst>
+              <a:ext uri="{FF2B5EF4-FFF2-40B4-BE49-F238E27FC236}">
+                <a16:creationId xmlns:a16="http://schemas.microsoft.com/office/drawing/2014/main" id="{53F83F89-F8AE-E23F-84E0-1F8B85266321}"/>
+              </a:ext>
+            </a:extLst>
+          </p:cNvPr>
+          <p:cNvSpPr txBox="1"/>
+          <p:nvPr/>
+        </p:nvSpPr>
+        <p:spPr>
+          <a:xfrm>
+            <a:off x="958498" y="4953536"/>
+            <a:ext cx="8321721" cy="677108"/>
+          </a:xfrm>
+          <a:prstGeom prst="rect">
+            <a:avLst/>
+          </a:prstGeom>
+        </p:spPr>
+        <p:txBody>
+          <a:bodyPr wrap="square" lIns="0" tIns="0" rIns="0" bIns="0" rtlCol="0" anchor="t">
+            <a:spAutoFit/>
+          </a:bodyPr>
+          <a:lstStyle/>
+          <a:p>
+            <a:pPr algn="ctr"/>
+            <a:r>
+              <a:rPr lang="es-ES" sz="4400" b="1" dirty="0">
+                <a:latin typeface="Inter"/>
+              </a:rPr>
+              <a:t>¿Qué es el Gobierno de Datos?</a:t>
+            </a:r>
+          </a:p>
+        </p:txBody>
+      </p:sp>
+    </p:spTree>
+    <p:extLst>
+      <p:ext uri="{BB962C8B-B14F-4D97-AF65-F5344CB8AC3E}">
+        <p14:creationId xmlns:p14="http://schemas.microsoft.com/office/powerpoint/2010/main" val="2938131828"/>
+      </p:ext>
+    </p:extLst>
+  </p:cSld>
+  <p:clrMapOvr>
+    <a:masterClrMapping/>
+  </p:clrMapOvr>
+</p:sld>
+</file>
+
+<file path=ppt/slides/slide20.xml><?xml version="1.0" encoding="utf-8"?>
 <p:sld xmlns:a="http://schemas.openxmlformats.org/drawingml/2006/main" xmlns:r="http://schemas.openxmlformats.org/officeDocument/2006/relationships" xmlns:p="http://schemas.openxmlformats.org/presentationml/2006/main">
   <p:cSld>
     <p:spTree>
@@ -18244,7 +16667,7 @@
 </p:sld>
 </file>
 
-<file path=ppt/slides/slide23.xml><?xml version="1.0" encoding="utf-8"?>
+<file path=ppt/slides/slide21.xml><?xml version="1.0" encoding="utf-8"?>
 <p:sld xmlns:a="http://schemas.openxmlformats.org/drawingml/2006/main" xmlns:r="http://schemas.openxmlformats.org/officeDocument/2006/relationships" xmlns:p="http://schemas.openxmlformats.org/presentationml/2006/main">
   <p:cSld>
     <p:spTree>
@@ -18969,7 +17392,7 @@
 </p:sld>
 </file>
 
-<file path=ppt/slides/slide24.xml><?xml version="1.0" encoding="utf-8"?>
+<file path=ppt/slides/slide22.xml><?xml version="1.0" encoding="utf-8"?>
 <p:sld xmlns:a="http://schemas.openxmlformats.org/drawingml/2006/main" xmlns:r="http://schemas.openxmlformats.org/officeDocument/2006/relationships" xmlns:p="http://schemas.openxmlformats.org/presentationml/2006/main">
   <p:cSld>
     <p:spTree>
@@ -19844,7 +18267,7 @@
 </p:sld>
 </file>
 
-<file path=ppt/slides/slide25.xml><?xml version="1.0" encoding="utf-8"?>
+<file path=ppt/slides/slide23.xml><?xml version="1.0" encoding="utf-8"?>
 <p:sld xmlns:a="http://schemas.openxmlformats.org/drawingml/2006/main" xmlns:r="http://schemas.openxmlformats.org/officeDocument/2006/relationships" xmlns:p="http://schemas.openxmlformats.org/presentationml/2006/main">
   <p:cSld>
     <p:spTree>
@@ -21118,7 +19541,7 @@
 </p:sld>
 </file>
 
-<file path=ppt/slides/slide26.xml><?xml version="1.0" encoding="utf-8"?>
+<file path=ppt/slides/slide24.xml><?xml version="1.0" encoding="utf-8"?>
 <p:sld xmlns:a="http://schemas.openxmlformats.org/drawingml/2006/main" xmlns:r="http://schemas.openxmlformats.org/officeDocument/2006/relationships" xmlns:p="http://schemas.openxmlformats.org/presentationml/2006/main">
   <p:cSld>
     <p:spTree>
@@ -21843,3066 +20266,7 @@
 </p:sld>
 </file>
 
-<file path=ppt/slides/slide27.xml><?xml version="1.0" encoding="utf-8"?>
-<p:sld xmlns:a="http://schemas.openxmlformats.org/drawingml/2006/main" xmlns:r="http://schemas.openxmlformats.org/officeDocument/2006/relationships" xmlns:p="http://schemas.openxmlformats.org/presentationml/2006/main">
-  <p:cSld>
-    <p:spTree>
-      <p:nvGrpSpPr>
-        <p:cNvPr id="1" name="">
-          <a:extLst>
-            <a:ext uri="{FF2B5EF4-FFF2-40B4-BE49-F238E27FC236}">
-              <a16:creationId xmlns:a16="http://schemas.microsoft.com/office/drawing/2014/main" id="{4372EE1B-71F6-8EA6-D6EC-B04A68DAB867}"/>
-            </a:ext>
-          </a:extLst>
-        </p:cNvPr>
-        <p:cNvGrpSpPr/>
-        <p:nvPr/>
-      </p:nvGrpSpPr>
-      <p:grpSpPr>
-        <a:xfrm>
-          <a:off x="0" y="0"/>
-          <a:ext cx="0" cy="0"/>
-          <a:chOff x="0" y="0"/>
-          <a:chExt cx="0" cy="0"/>
-        </a:xfrm>
-      </p:grpSpPr>
-      <p:sp>
-        <p:nvSpPr>
-          <p:cNvPr id="2" name="Freeform 2">
-            <a:extLst>
-              <a:ext uri="{FF2B5EF4-FFF2-40B4-BE49-F238E27FC236}">
-                <a16:creationId xmlns:a16="http://schemas.microsoft.com/office/drawing/2014/main" id="{2FF80995-4BF5-190E-0BF0-9CF4D9699F77}"/>
-              </a:ext>
-            </a:extLst>
-          </p:cNvPr>
-          <p:cNvSpPr/>
-          <p:nvPr/>
-        </p:nvSpPr>
-        <p:spPr>
-          <a:xfrm>
-            <a:off x="16240722" y="9245973"/>
-            <a:ext cx="1388509" cy="555404"/>
-          </a:xfrm>
-          <a:custGeom>
-            <a:avLst/>
-            <a:gdLst/>
-            <a:ahLst/>
-            <a:cxnLst/>
-            <a:rect l="l" t="t" r="r" b="b"/>
-            <a:pathLst>
-              <a:path w="1388509" h="555404">
-                <a:moveTo>
-                  <a:pt x="0" y="0"/>
-                </a:moveTo>
-                <a:lnTo>
-                  <a:pt x="1388510" y="0"/>
-                </a:lnTo>
-                <a:lnTo>
-                  <a:pt x="1388510" y="555404"/>
-                </a:lnTo>
-                <a:lnTo>
-                  <a:pt x="0" y="555404"/>
-                </a:lnTo>
-                <a:lnTo>
-                  <a:pt x="0" y="0"/>
-                </a:lnTo>
-                <a:close/>
-              </a:path>
-            </a:pathLst>
-          </a:custGeom>
-          <a:blipFill>
-            <a:blip r:embed="rId2"/>
-            <a:stretch>
-              <a:fillRect/>
-            </a:stretch>
-          </a:blipFill>
-        </p:spPr>
-        <p:txBody>
-          <a:bodyPr/>
-          <a:lstStyle/>
-          <a:p>
-            <a:endParaRPr lang="es-CO"/>
-          </a:p>
-        </p:txBody>
-      </p:sp>
-      <p:grpSp>
-        <p:nvGrpSpPr>
-          <p:cNvPr id="3" name="Group 3">
-            <a:extLst>
-              <a:ext uri="{FF2B5EF4-FFF2-40B4-BE49-F238E27FC236}">
-                <a16:creationId xmlns:a16="http://schemas.microsoft.com/office/drawing/2014/main" id="{B9822242-175D-7BFB-91F0-BC6DB41183ED}"/>
-              </a:ext>
-            </a:extLst>
-          </p:cNvPr>
-          <p:cNvGrpSpPr/>
-          <p:nvPr/>
-        </p:nvGrpSpPr>
-        <p:grpSpPr>
-          <a:xfrm flipV="1">
-            <a:off x="-762000" y="1516854"/>
-            <a:ext cx="8458200" cy="45719"/>
-            <a:chOff x="0" y="0"/>
-            <a:chExt cx="1495010" cy="20069"/>
-          </a:xfrm>
-        </p:grpSpPr>
-        <p:sp>
-          <p:nvSpPr>
-            <p:cNvPr id="4" name="Freeform 4">
-              <a:extLst>
-                <a:ext uri="{FF2B5EF4-FFF2-40B4-BE49-F238E27FC236}">
-                  <a16:creationId xmlns:a16="http://schemas.microsoft.com/office/drawing/2014/main" id="{41D02388-CF5F-5D11-7521-E0C9D7436163}"/>
-                </a:ext>
-              </a:extLst>
-            </p:cNvPr>
-            <p:cNvSpPr/>
-            <p:nvPr/>
-          </p:nvSpPr>
-          <p:spPr>
-            <a:xfrm>
-              <a:off x="0" y="0"/>
-              <a:ext cx="1495010" cy="20069"/>
-            </a:xfrm>
-            <a:custGeom>
-              <a:avLst/>
-              <a:gdLst/>
-              <a:ahLst/>
-              <a:cxnLst/>
-              <a:rect l="l" t="t" r="r" b="b"/>
-              <a:pathLst>
-                <a:path w="1495010" h="20069">
-                  <a:moveTo>
-                    <a:pt x="10035" y="0"/>
-                  </a:moveTo>
-                  <a:lnTo>
-                    <a:pt x="1484976" y="0"/>
-                  </a:lnTo>
-                  <a:cubicBezTo>
-                    <a:pt x="1487637" y="0"/>
-                    <a:pt x="1490189" y="1057"/>
-                    <a:pt x="1492071" y="2939"/>
-                  </a:cubicBezTo>
-                  <a:cubicBezTo>
-                    <a:pt x="1493953" y="4821"/>
-                    <a:pt x="1495010" y="7373"/>
-                    <a:pt x="1495010" y="10035"/>
-                  </a:cubicBezTo>
-                  <a:lnTo>
-                    <a:pt x="1495010" y="10035"/>
-                  </a:lnTo>
-                  <a:cubicBezTo>
-                    <a:pt x="1495010" y="12696"/>
-                    <a:pt x="1493953" y="15248"/>
-                    <a:pt x="1492071" y="17130"/>
-                  </a:cubicBezTo>
-                  <a:cubicBezTo>
-                    <a:pt x="1490189" y="19012"/>
-                    <a:pt x="1487637" y="20069"/>
-                    <a:pt x="1484976" y="20069"/>
-                  </a:cubicBezTo>
-                  <a:lnTo>
-                    <a:pt x="10035" y="20069"/>
-                  </a:lnTo>
-                  <a:cubicBezTo>
-                    <a:pt x="7373" y="20069"/>
-                    <a:pt x="4821" y="19012"/>
-                    <a:pt x="2939" y="17130"/>
-                  </a:cubicBezTo>
-                  <a:cubicBezTo>
-                    <a:pt x="1057" y="15248"/>
-                    <a:pt x="0" y="12696"/>
-                    <a:pt x="0" y="10035"/>
-                  </a:cubicBezTo>
-                  <a:lnTo>
-                    <a:pt x="0" y="10035"/>
-                  </a:lnTo>
-                  <a:cubicBezTo>
-                    <a:pt x="0" y="7373"/>
-                    <a:pt x="1057" y="4821"/>
-                    <a:pt x="2939" y="2939"/>
-                  </a:cubicBezTo>
-                  <a:cubicBezTo>
-                    <a:pt x="4821" y="1057"/>
-                    <a:pt x="7373" y="0"/>
-                    <a:pt x="10035" y="0"/>
-                  </a:cubicBezTo>
-                  <a:close/>
-                </a:path>
-              </a:pathLst>
-            </a:custGeom>
-            <a:gradFill rotWithShape="1">
-              <a:gsLst>
-                <a:gs pos="0">
-                  <a:srgbClr val="6B1374">
-                    <a:alpha val="100000"/>
-                  </a:srgbClr>
-                </a:gs>
-                <a:gs pos="33333">
-                  <a:srgbClr val="700A89">
-                    <a:alpha val="100000"/>
-                  </a:srgbClr>
-                </a:gs>
-                <a:gs pos="66667">
-                  <a:srgbClr val="C20052">
-                    <a:alpha val="100000"/>
-                  </a:srgbClr>
-                </a:gs>
-                <a:gs pos="100000">
-                  <a:srgbClr val="FF0055">
-                    <a:alpha val="100000"/>
-                  </a:srgbClr>
-                </a:gs>
-              </a:gsLst>
-              <a:lin ang="0"/>
-            </a:gradFill>
-          </p:spPr>
-          <p:txBody>
-            <a:bodyPr/>
-            <a:lstStyle/>
-            <a:p>
-              <a:endParaRPr lang="es-CO"/>
-            </a:p>
-          </p:txBody>
-        </p:sp>
-        <p:sp>
-          <p:nvSpPr>
-            <p:cNvPr id="5" name="TextBox 5">
-              <a:extLst>
-                <a:ext uri="{FF2B5EF4-FFF2-40B4-BE49-F238E27FC236}">
-                  <a16:creationId xmlns:a16="http://schemas.microsoft.com/office/drawing/2014/main" id="{DBAE81F5-1D47-583B-BD74-C2467FA61569}"/>
-                </a:ext>
-              </a:extLst>
-            </p:cNvPr>
-            <p:cNvSpPr txBox="1"/>
-            <p:nvPr/>
-          </p:nvSpPr>
-          <p:spPr>
-            <a:xfrm>
-              <a:off x="0" y="-38100"/>
-              <a:ext cx="1495010" cy="58169"/>
-            </a:xfrm>
-            <a:prstGeom prst="rect">
-              <a:avLst/>
-            </a:prstGeom>
-          </p:spPr>
-          <p:txBody>
-            <a:bodyPr lIns="50800" tIns="50800" rIns="50800" bIns="50800" rtlCol="0" anchor="ctr"/>
-            <a:lstStyle/>
-            <a:p>
-              <a:pPr algn="ctr">
-                <a:lnSpc>
-                  <a:spcPts val="2659"/>
-                </a:lnSpc>
-              </a:pPr>
-              <a:endParaRPr/>
-            </a:p>
-          </p:txBody>
-        </p:sp>
-      </p:grpSp>
-      <p:grpSp>
-        <p:nvGrpSpPr>
-          <p:cNvPr id="6" name="Group 6">
-            <a:extLst>
-              <a:ext uri="{FF2B5EF4-FFF2-40B4-BE49-F238E27FC236}">
-                <a16:creationId xmlns:a16="http://schemas.microsoft.com/office/drawing/2014/main" id="{041FF01E-2428-EA8C-7556-8F682746EC0E}"/>
-              </a:ext>
-            </a:extLst>
-          </p:cNvPr>
-          <p:cNvGrpSpPr/>
-          <p:nvPr/>
-        </p:nvGrpSpPr>
-        <p:grpSpPr>
-          <a:xfrm>
-            <a:off x="17896105" y="0"/>
-            <a:ext cx="449045" cy="10287000"/>
-            <a:chOff x="0" y="0"/>
-            <a:chExt cx="598727" cy="13716000"/>
-          </a:xfrm>
-        </p:grpSpPr>
-        <p:grpSp>
-          <p:nvGrpSpPr>
-            <p:cNvPr id="7" name="Group 7">
-              <a:extLst>
-                <a:ext uri="{FF2B5EF4-FFF2-40B4-BE49-F238E27FC236}">
-                  <a16:creationId xmlns:a16="http://schemas.microsoft.com/office/drawing/2014/main" id="{A9209E42-828D-F106-BE43-E1D93E6F87D3}"/>
-                </a:ext>
-              </a:extLst>
-            </p:cNvPr>
-            <p:cNvGrpSpPr/>
-            <p:nvPr/>
-          </p:nvGrpSpPr>
-          <p:grpSpPr>
-            <a:xfrm>
-              <a:off x="77114" y="0"/>
-              <a:ext cx="444500" cy="13716000"/>
-              <a:chOff x="0" y="0"/>
-              <a:chExt cx="87802" cy="2709333"/>
-            </a:xfrm>
-          </p:grpSpPr>
-          <p:sp>
-            <p:nvSpPr>
-              <p:cNvPr id="8" name="Freeform 8">
-                <a:extLst>
-                  <a:ext uri="{FF2B5EF4-FFF2-40B4-BE49-F238E27FC236}">
-                    <a16:creationId xmlns:a16="http://schemas.microsoft.com/office/drawing/2014/main" id="{ACDCCC9D-2BAA-E3E9-655A-33818B879621}"/>
-                  </a:ext>
-                </a:extLst>
-              </p:cNvPr>
-              <p:cNvSpPr/>
-              <p:nvPr/>
-            </p:nvSpPr>
-            <p:spPr>
-              <a:xfrm>
-                <a:off x="0" y="0"/>
-                <a:ext cx="87802" cy="2709333"/>
-              </a:xfrm>
-              <a:custGeom>
-                <a:avLst/>
-                <a:gdLst/>
-                <a:ahLst/>
-                <a:cxnLst/>
-                <a:rect l="l" t="t" r="r" b="b"/>
-                <a:pathLst>
-                  <a:path w="87802" h="2709333">
-                    <a:moveTo>
-                      <a:pt x="0" y="0"/>
-                    </a:moveTo>
-                    <a:lnTo>
-                      <a:pt x="87802" y="0"/>
-                    </a:lnTo>
-                    <a:lnTo>
-                      <a:pt x="87802" y="2709333"/>
-                    </a:lnTo>
-                    <a:lnTo>
-                      <a:pt x="0" y="2709333"/>
-                    </a:lnTo>
-                    <a:close/>
-                  </a:path>
-                </a:pathLst>
-              </a:custGeom>
-              <a:gradFill rotWithShape="1">
-                <a:gsLst>
-                  <a:gs pos="0">
-                    <a:srgbClr val="6B1374">
-                      <a:alpha val="100000"/>
-                    </a:srgbClr>
-                  </a:gs>
-                  <a:gs pos="33333">
-                    <a:srgbClr val="700A89">
-                      <a:alpha val="100000"/>
-                    </a:srgbClr>
-                  </a:gs>
-                  <a:gs pos="66667">
-                    <a:srgbClr val="C20052">
-                      <a:alpha val="100000"/>
-                    </a:srgbClr>
-                  </a:gs>
-                  <a:gs pos="100000">
-                    <a:srgbClr val="FF0055">
-                      <a:alpha val="100000"/>
-                    </a:srgbClr>
-                  </a:gs>
-                </a:gsLst>
-                <a:lin ang="5400000"/>
-              </a:gradFill>
-            </p:spPr>
-            <p:txBody>
-              <a:bodyPr/>
-              <a:lstStyle/>
-              <a:p>
-                <a:endParaRPr lang="es-CO"/>
-              </a:p>
-            </p:txBody>
-          </p:sp>
-          <p:sp>
-            <p:nvSpPr>
-              <p:cNvPr id="9" name="TextBox 9">
-                <a:extLst>
-                  <a:ext uri="{FF2B5EF4-FFF2-40B4-BE49-F238E27FC236}">
-                    <a16:creationId xmlns:a16="http://schemas.microsoft.com/office/drawing/2014/main" id="{29825524-9E01-A29B-459C-ED1F21C55F2C}"/>
-                  </a:ext>
-                </a:extLst>
-              </p:cNvPr>
-              <p:cNvSpPr txBox="1"/>
-              <p:nvPr/>
-            </p:nvSpPr>
-            <p:spPr>
-              <a:xfrm>
-                <a:off x="0" y="-38100"/>
-                <a:ext cx="87802" cy="2747433"/>
-              </a:xfrm>
-              <a:prstGeom prst="rect">
-                <a:avLst/>
-              </a:prstGeom>
-            </p:spPr>
-            <p:txBody>
-              <a:bodyPr lIns="50800" tIns="50800" rIns="50800" bIns="50800" rtlCol="0" anchor="ctr"/>
-              <a:lstStyle/>
-              <a:p>
-                <a:pPr algn="ctr">
-                  <a:lnSpc>
-                    <a:spcPts val="2659"/>
-                  </a:lnSpc>
-                </a:pPr>
-                <a:endParaRPr/>
-              </a:p>
-            </p:txBody>
-          </p:sp>
-        </p:grpSp>
-        <p:sp>
-          <p:nvSpPr>
-            <p:cNvPr id="10" name="Freeform 10">
-              <a:extLst>
-                <a:ext uri="{FF2B5EF4-FFF2-40B4-BE49-F238E27FC236}">
-                  <a16:creationId xmlns:a16="http://schemas.microsoft.com/office/drawing/2014/main" id="{371A9E9A-6EDC-3384-07AE-19A83BB875F9}"/>
-                </a:ext>
-              </a:extLst>
-            </p:cNvPr>
-            <p:cNvSpPr/>
-            <p:nvPr/>
-          </p:nvSpPr>
-          <p:spPr>
-            <a:xfrm>
-              <a:off x="22810" y="1020609"/>
-              <a:ext cx="553108" cy="542737"/>
-            </a:xfrm>
-            <a:custGeom>
-              <a:avLst/>
-              <a:gdLst/>
-              <a:ahLst/>
-              <a:cxnLst/>
-              <a:rect l="l" t="t" r="r" b="b"/>
-              <a:pathLst>
-                <a:path w="553108" h="542737">
-                  <a:moveTo>
-                    <a:pt x="0" y="0"/>
-                  </a:moveTo>
-                  <a:lnTo>
-                    <a:pt x="553108" y="0"/>
-                  </a:lnTo>
-                  <a:lnTo>
-                    <a:pt x="553108" y="542737"/>
-                  </a:lnTo>
-                  <a:lnTo>
-                    <a:pt x="0" y="542737"/>
-                  </a:lnTo>
-                  <a:lnTo>
-                    <a:pt x="0" y="0"/>
-                  </a:lnTo>
-                  <a:close/>
-                </a:path>
-              </a:pathLst>
-            </a:custGeom>
-            <a:blipFill>
-              <a:blip r:embed="rId3">
-                <a:extLst>
-                  <a:ext uri="{96DAC541-7B7A-43D3-8B79-37D633B846F1}">
-                    <asvg:svgBlip xmlns:asvg="http://schemas.microsoft.com/office/drawing/2016/SVG/main" r:embed="rId4"/>
-                  </a:ext>
-                </a:extLst>
-              </a:blip>
-              <a:stretch>
-                <a:fillRect/>
-              </a:stretch>
-            </a:blipFill>
-          </p:spPr>
-          <p:txBody>
-            <a:bodyPr/>
-            <a:lstStyle/>
-            <a:p>
-              <a:endParaRPr lang="es-CO"/>
-            </a:p>
-          </p:txBody>
-        </p:sp>
-        <p:sp>
-          <p:nvSpPr>
-            <p:cNvPr id="11" name="Freeform 11">
-              <a:extLst>
-                <a:ext uri="{FF2B5EF4-FFF2-40B4-BE49-F238E27FC236}">
-                  <a16:creationId xmlns:a16="http://schemas.microsoft.com/office/drawing/2014/main" id="{0ECBA0CE-7874-5E01-7FD0-FC83227B3022}"/>
-                </a:ext>
-              </a:extLst>
-            </p:cNvPr>
-            <p:cNvSpPr/>
-            <p:nvPr/>
-          </p:nvSpPr>
-          <p:spPr>
-            <a:xfrm rot="-10800000">
-              <a:off x="22810" y="102655"/>
-              <a:ext cx="553108" cy="542737"/>
-            </a:xfrm>
-            <a:custGeom>
-              <a:avLst/>
-              <a:gdLst/>
-              <a:ahLst/>
-              <a:cxnLst/>
-              <a:rect l="l" t="t" r="r" b="b"/>
-              <a:pathLst>
-                <a:path w="553108" h="542737">
-                  <a:moveTo>
-                    <a:pt x="0" y="0"/>
-                  </a:moveTo>
-                  <a:lnTo>
-                    <a:pt x="553108" y="0"/>
-                  </a:lnTo>
-                  <a:lnTo>
-                    <a:pt x="553108" y="542737"/>
-                  </a:lnTo>
-                  <a:lnTo>
-                    <a:pt x="0" y="542737"/>
-                  </a:lnTo>
-                  <a:lnTo>
-                    <a:pt x="0" y="0"/>
-                  </a:lnTo>
-                  <a:close/>
-                </a:path>
-              </a:pathLst>
-            </a:custGeom>
-            <a:blipFill>
-              <a:blip r:embed="rId3">
-                <a:extLst>
-                  <a:ext uri="{96DAC541-7B7A-43D3-8B79-37D633B846F1}">
-                    <asvg:svgBlip xmlns:asvg="http://schemas.microsoft.com/office/drawing/2016/SVG/main" r:embed="rId4"/>
-                  </a:ext>
-                </a:extLst>
-              </a:blip>
-              <a:stretch>
-                <a:fillRect/>
-              </a:stretch>
-            </a:blipFill>
-          </p:spPr>
-          <p:txBody>
-            <a:bodyPr/>
-            <a:lstStyle/>
-            <a:p>
-              <a:endParaRPr lang="es-CO"/>
-            </a:p>
-          </p:txBody>
-        </p:sp>
-        <p:grpSp>
-          <p:nvGrpSpPr>
-            <p:cNvPr id="12" name="Group 12">
-              <a:extLst>
-                <a:ext uri="{FF2B5EF4-FFF2-40B4-BE49-F238E27FC236}">
-                  <a16:creationId xmlns:a16="http://schemas.microsoft.com/office/drawing/2014/main" id="{866925B8-1027-9009-1001-0B460B8F20C9}"/>
-                </a:ext>
-              </a:extLst>
-            </p:cNvPr>
-            <p:cNvGrpSpPr/>
-            <p:nvPr/>
-          </p:nvGrpSpPr>
-          <p:grpSpPr>
-            <a:xfrm rot="1460314">
-              <a:off x="1518" y="765089"/>
-              <a:ext cx="595692" cy="135824"/>
-              <a:chOff x="0" y="0"/>
-              <a:chExt cx="1355149" cy="308989"/>
-            </a:xfrm>
-          </p:grpSpPr>
-          <p:sp>
-            <p:nvSpPr>
-              <p:cNvPr id="13" name="Freeform 13">
-                <a:extLst>
-                  <a:ext uri="{FF2B5EF4-FFF2-40B4-BE49-F238E27FC236}">
-                    <a16:creationId xmlns:a16="http://schemas.microsoft.com/office/drawing/2014/main" id="{282E713C-9D5E-B092-CD80-5D02F6CE31CE}"/>
-                  </a:ext>
-                </a:extLst>
-              </p:cNvPr>
-              <p:cNvSpPr/>
-              <p:nvPr/>
-            </p:nvSpPr>
-            <p:spPr>
-              <a:xfrm>
-                <a:off x="0" y="0"/>
-                <a:ext cx="1355149" cy="308989"/>
-              </a:xfrm>
-              <a:custGeom>
-                <a:avLst/>
-                <a:gdLst/>
-                <a:ahLst/>
-                <a:cxnLst/>
-                <a:rect l="l" t="t" r="r" b="b"/>
-                <a:pathLst>
-                  <a:path w="1355149" h="308989">
-                    <a:moveTo>
-                      <a:pt x="154494" y="0"/>
-                    </a:moveTo>
-                    <a:lnTo>
-                      <a:pt x="1200655" y="0"/>
-                    </a:lnTo>
-                    <a:cubicBezTo>
-                      <a:pt x="1241629" y="0"/>
-                      <a:pt x="1280926" y="16277"/>
-                      <a:pt x="1309899" y="45250"/>
-                    </a:cubicBezTo>
-                    <a:cubicBezTo>
-                      <a:pt x="1338872" y="74224"/>
-                      <a:pt x="1355149" y="113520"/>
-                      <a:pt x="1355149" y="154494"/>
-                    </a:cubicBezTo>
-                    <a:lnTo>
-                      <a:pt x="1355149" y="154494"/>
-                    </a:lnTo>
-                    <a:cubicBezTo>
-                      <a:pt x="1355149" y="239819"/>
-                      <a:pt x="1285980" y="308989"/>
-                      <a:pt x="1200655" y="308989"/>
-                    </a:cubicBezTo>
-                    <a:lnTo>
-                      <a:pt x="154494" y="308989"/>
-                    </a:lnTo>
-                    <a:cubicBezTo>
-                      <a:pt x="113520" y="308989"/>
-                      <a:pt x="74224" y="292712"/>
-                      <a:pt x="45250" y="263738"/>
-                    </a:cubicBezTo>
-                    <a:cubicBezTo>
-                      <a:pt x="16277" y="234765"/>
-                      <a:pt x="0" y="195469"/>
-                      <a:pt x="0" y="154494"/>
-                    </a:cubicBezTo>
-                    <a:lnTo>
-                      <a:pt x="0" y="154494"/>
-                    </a:lnTo>
-                    <a:cubicBezTo>
-                      <a:pt x="0" y="113520"/>
-                      <a:pt x="16277" y="74224"/>
-                      <a:pt x="45250" y="45250"/>
-                    </a:cubicBezTo>
-                    <a:cubicBezTo>
-                      <a:pt x="74224" y="16277"/>
-                      <a:pt x="113520" y="0"/>
-                      <a:pt x="154494" y="0"/>
-                    </a:cubicBezTo>
-                    <a:close/>
-                  </a:path>
-                </a:pathLst>
-              </a:custGeom>
-              <a:solidFill>
-                <a:srgbClr val="FFFFFF"/>
-              </a:solidFill>
-            </p:spPr>
-            <p:txBody>
-              <a:bodyPr/>
-              <a:lstStyle/>
-              <a:p>
-                <a:endParaRPr lang="es-CO"/>
-              </a:p>
-            </p:txBody>
-          </p:sp>
-          <p:sp>
-            <p:nvSpPr>
-              <p:cNvPr id="14" name="TextBox 14">
-                <a:extLst>
-                  <a:ext uri="{FF2B5EF4-FFF2-40B4-BE49-F238E27FC236}">
-                    <a16:creationId xmlns:a16="http://schemas.microsoft.com/office/drawing/2014/main" id="{08239A2F-F4D7-D48D-AFC3-326C15A8FA48}"/>
-                  </a:ext>
-                </a:extLst>
-              </p:cNvPr>
-              <p:cNvSpPr txBox="1"/>
-              <p:nvPr/>
-            </p:nvSpPr>
-            <p:spPr>
-              <a:xfrm>
-                <a:off x="0" y="-38100"/>
-                <a:ext cx="1355149" cy="347089"/>
-              </a:xfrm>
-              <a:prstGeom prst="rect">
-                <a:avLst/>
-              </a:prstGeom>
-            </p:spPr>
-            <p:txBody>
-              <a:bodyPr lIns="50800" tIns="50800" rIns="50800" bIns="50800" rtlCol="0" anchor="ctr"/>
-              <a:lstStyle/>
-              <a:p>
-                <a:pPr algn="ctr">
-                  <a:lnSpc>
-                    <a:spcPts val="2659"/>
-                  </a:lnSpc>
-                </a:pPr>
-                <a:endParaRPr/>
-              </a:p>
-            </p:txBody>
-          </p:sp>
-        </p:grpSp>
-      </p:grpSp>
-    </p:spTree>
-    <p:extLst>
-      <p:ext uri="{BB962C8B-B14F-4D97-AF65-F5344CB8AC3E}">
-        <p14:creationId xmlns:p14="http://schemas.microsoft.com/office/powerpoint/2010/main" val="1959817434"/>
-      </p:ext>
-    </p:extLst>
-  </p:cSld>
-  <p:clrMapOvr>
-    <a:masterClrMapping/>
-  </p:clrMapOvr>
-</p:sld>
-</file>
-
-<file path=ppt/slides/slide28.xml><?xml version="1.0" encoding="utf-8"?>
-<p:sld xmlns:a="http://schemas.openxmlformats.org/drawingml/2006/main" xmlns:r="http://schemas.openxmlformats.org/officeDocument/2006/relationships" xmlns:p="http://schemas.openxmlformats.org/presentationml/2006/main">
-  <p:cSld>
-    <p:spTree>
-      <p:nvGrpSpPr>
-        <p:cNvPr id="1" name="">
-          <a:extLst>
-            <a:ext uri="{FF2B5EF4-FFF2-40B4-BE49-F238E27FC236}">
-              <a16:creationId xmlns:a16="http://schemas.microsoft.com/office/drawing/2014/main" id="{BAE4733E-560D-D380-4BC8-0081D984C91B}"/>
-            </a:ext>
-          </a:extLst>
-        </p:cNvPr>
-        <p:cNvGrpSpPr/>
-        <p:nvPr/>
-      </p:nvGrpSpPr>
-      <p:grpSpPr>
-        <a:xfrm>
-          <a:off x="0" y="0"/>
-          <a:ext cx="0" cy="0"/>
-          <a:chOff x="0" y="0"/>
-          <a:chExt cx="0" cy="0"/>
-        </a:xfrm>
-      </p:grpSpPr>
-      <p:sp>
-        <p:nvSpPr>
-          <p:cNvPr id="2" name="Freeform 2">
-            <a:extLst>
-              <a:ext uri="{FF2B5EF4-FFF2-40B4-BE49-F238E27FC236}">
-                <a16:creationId xmlns:a16="http://schemas.microsoft.com/office/drawing/2014/main" id="{B4983F65-DBF1-9571-3802-96AE3FA98CCA}"/>
-              </a:ext>
-            </a:extLst>
-          </p:cNvPr>
-          <p:cNvSpPr/>
-          <p:nvPr/>
-        </p:nvSpPr>
-        <p:spPr>
-          <a:xfrm>
-            <a:off x="16240722" y="9245973"/>
-            <a:ext cx="1388509" cy="555404"/>
-          </a:xfrm>
-          <a:custGeom>
-            <a:avLst/>
-            <a:gdLst/>
-            <a:ahLst/>
-            <a:cxnLst/>
-            <a:rect l="l" t="t" r="r" b="b"/>
-            <a:pathLst>
-              <a:path w="1388509" h="555404">
-                <a:moveTo>
-                  <a:pt x="0" y="0"/>
-                </a:moveTo>
-                <a:lnTo>
-                  <a:pt x="1388510" y="0"/>
-                </a:lnTo>
-                <a:lnTo>
-                  <a:pt x="1388510" y="555404"/>
-                </a:lnTo>
-                <a:lnTo>
-                  <a:pt x="0" y="555404"/>
-                </a:lnTo>
-                <a:lnTo>
-                  <a:pt x="0" y="0"/>
-                </a:lnTo>
-                <a:close/>
-              </a:path>
-            </a:pathLst>
-          </a:custGeom>
-          <a:blipFill>
-            <a:blip r:embed="rId2"/>
-            <a:stretch>
-              <a:fillRect/>
-            </a:stretch>
-          </a:blipFill>
-        </p:spPr>
-        <p:txBody>
-          <a:bodyPr/>
-          <a:lstStyle/>
-          <a:p>
-            <a:endParaRPr lang="es-CO"/>
-          </a:p>
-        </p:txBody>
-      </p:sp>
-      <p:grpSp>
-        <p:nvGrpSpPr>
-          <p:cNvPr id="3" name="Group 3">
-            <a:extLst>
-              <a:ext uri="{FF2B5EF4-FFF2-40B4-BE49-F238E27FC236}">
-                <a16:creationId xmlns:a16="http://schemas.microsoft.com/office/drawing/2014/main" id="{1183C6A0-B7F5-648A-547C-8B274F3AFCC5}"/>
-              </a:ext>
-            </a:extLst>
-          </p:cNvPr>
-          <p:cNvGrpSpPr/>
-          <p:nvPr/>
-        </p:nvGrpSpPr>
-        <p:grpSpPr>
-          <a:xfrm flipV="1">
-            <a:off x="-762000" y="1516854"/>
-            <a:ext cx="8458200" cy="45719"/>
-            <a:chOff x="0" y="0"/>
-            <a:chExt cx="1495010" cy="20069"/>
-          </a:xfrm>
-        </p:grpSpPr>
-        <p:sp>
-          <p:nvSpPr>
-            <p:cNvPr id="4" name="Freeform 4">
-              <a:extLst>
-                <a:ext uri="{FF2B5EF4-FFF2-40B4-BE49-F238E27FC236}">
-                  <a16:creationId xmlns:a16="http://schemas.microsoft.com/office/drawing/2014/main" id="{128254DE-DE1C-0A63-445A-FC3AB0AFC59D}"/>
-                </a:ext>
-              </a:extLst>
-            </p:cNvPr>
-            <p:cNvSpPr/>
-            <p:nvPr/>
-          </p:nvSpPr>
-          <p:spPr>
-            <a:xfrm>
-              <a:off x="0" y="0"/>
-              <a:ext cx="1495010" cy="20069"/>
-            </a:xfrm>
-            <a:custGeom>
-              <a:avLst/>
-              <a:gdLst/>
-              <a:ahLst/>
-              <a:cxnLst/>
-              <a:rect l="l" t="t" r="r" b="b"/>
-              <a:pathLst>
-                <a:path w="1495010" h="20069">
-                  <a:moveTo>
-                    <a:pt x="10035" y="0"/>
-                  </a:moveTo>
-                  <a:lnTo>
-                    <a:pt x="1484976" y="0"/>
-                  </a:lnTo>
-                  <a:cubicBezTo>
-                    <a:pt x="1487637" y="0"/>
-                    <a:pt x="1490189" y="1057"/>
-                    <a:pt x="1492071" y="2939"/>
-                  </a:cubicBezTo>
-                  <a:cubicBezTo>
-                    <a:pt x="1493953" y="4821"/>
-                    <a:pt x="1495010" y="7373"/>
-                    <a:pt x="1495010" y="10035"/>
-                  </a:cubicBezTo>
-                  <a:lnTo>
-                    <a:pt x="1495010" y="10035"/>
-                  </a:lnTo>
-                  <a:cubicBezTo>
-                    <a:pt x="1495010" y="12696"/>
-                    <a:pt x="1493953" y="15248"/>
-                    <a:pt x="1492071" y="17130"/>
-                  </a:cubicBezTo>
-                  <a:cubicBezTo>
-                    <a:pt x="1490189" y="19012"/>
-                    <a:pt x="1487637" y="20069"/>
-                    <a:pt x="1484976" y="20069"/>
-                  </a:cubicBezTo>
-                  <a:lnTo>
-                    <a:pt x="10035" y="20069"/>
-                  </a:lnTo>
-                  <a:cubicBezTo>
-                    <a:pt x="7373" y="20069"/>
-                    <a:pt x="4821" y="19012"/>
-                    <a:pt x="2939" y="17130"/>
-                  </a:cubicBezTo>
-                  <a:cubicBezTo>
-                    <a:pt x="1057" y="15248"/>
-                    <a:pt x="0" y="12696"/>
-                    <a:pt x="0" y="10035"/>
-                  </a:cubicBezTo>
-                  <a:lnTo>
-                    <a:pt x="0" y="10035"/>
-                  </a:lnTo>
-                  <a:cubicBezTo>
-                    <a:pt x="0" y="7373"/>
-                    <a:pt x="1057" y="4821"/>
-                    <a:pt x="2939" y="2939"/>
-                  </a:cubicBezTo>
-                  <a:cubicBezTo>
-                    <a:pt x="4821" y="1057"/>
-                    <a:pt x="7373" y="0"/>
-                    <a:pt x="10035" y="0"/>
-                  </a:cubicBezTo>
-                  <a:close/>
-                </a:path>
-              </a:pathLst>
-            </a:custGeom>
-            <a:gradFill rotWithShape="1">
-              <a:gsLst>
-                <a:gs pos="0">
-                  <a:srgbClr val="6B1374">
-                    <a:alpha val="100000"/>
-                  </a:srgbClr>
-                </a:gs>
-                <a:gs pos="33333">
-                  <a:srgbClr val="700A89">
-                    <a:alpha val="100000"/>
-                  </a:srgbClr>
-                </a:gs>
-                <a:gs pos="66667">
-                  <a:srgbClr val="C20052">
-                    <a:alpha val="100000"/>
-                  </a:srgbClr>
-                </a:gs>
-                <a:gs pos="100000">
-                  <a:srgbClr val="FF0055">
-                    <a:alpha val="100000"/>
-                  </a:srgbClr>
-                </a:gs>
-              </a:gsLst>
-              <a:lin ang="0"/>
-            </a:gradFill>
-          </p:spPr>
-          <p:txBody>
-            <a:bodyPr/>
-            <a:lstStyle/>
-            <a:p>
-              <a:endParaRPr lang="es-CO"/>
-            </a:p>
-          </p:txBody>
-        </p:sp>
-        <p:sp>
-          <p:nvSpPr>
-            <p:cNvPr id="5" name="TextBox 5">
-              <a:extLst>
-                <a:ext uri="{FF2B5EF4-FFF2-40B4-BE49-F238E27FC236}">
-                  <a16:creationId xmlns:a16="http://schemas.microsoft.com/office/drawing/2014/main" id="{23B1033E-CF5B-9E8C-DF00-E48D0F83EDA3}"/>
-                </a:ext>
-              </a:extLst>
-            </p:cNvPr>
-            <p:cNvSpPr txBox="1"/>
-            <p:nvPr/>
-          </p:nvSpPr>
-          <p:spPr>
-            <a:xfrm>
-              <a:off x="0" y="-38100"/>
-              <a:ext cx="1495010" cy="58169"/>
-            </a:xfrm>
-            <a:prstGeom prst="rect">
-              <a:avLst/>
-            </a:prstGeom>
-          </p:spPr>
-          <p:txBody>
-            <a:bodyPr lIns="50800" tIns="50800" rIns="50800" bIns="50800" rtlCol="0" anchor="ctr"/>
-            <a:lstStyle/>
-            <a:p>
-              <a:pPr algn="ctr">
-                <a:lnSpc>
-                  <a:spcPts val="2659"/>
-                </a:lnSpc>
-              </a:pPr>
-              <a:endParaRPr/>
-            </a:p>
-          </p:txBody>
-        </p:sp>
-      </p:grpSp>
-      <p:grpSp>
-        <p:nvGrpSpPr>
-          <p:cNvPr id="6" name="Group 6">
-            <a:extLst>
-              <a:ext uri="{FF2B5EF4-FFF2-40B4-BE49-F238E27FC236}">
-                <a16:creationId xmlns:a16="http://schemas.microsoft.com/office/drawing/2014/main" id="{5D038398-CCEA-A60C-619F-22F0E5BBAB6F}"/>
-              </a:ext>
-            </a:extLst>
-          </p:cNvPr>
-          <p:cNvGrpSpPr/>
-          <p:nvPr/>
-        </p:nvGrpSpPr>
-        <p:grpSpPr>
-          <a:xfrm>
-            <a:off x="17896105" y="0"/>
-            <a:ext cx="449045" cy="10287000"/>
-            <a:chOff x="0" y="0"/>
-            <a:chExt cx="598727" cy="13716000"/>
-          </a:xfrm>
-        </p:grpSpPr>
-        <p:grpSp>
-          <p:nvGrpSpPr>
-            <p:cNvPr id="7" name="Group 7">
-              <a:extLst>
-                <a:ext uri="{FF2B5EF4-FFF2-40B4-BE49-F238E27FC236}">
-                  <a16:creationId xmlns:a16="http://schemas.microsoft.com/office/drawing/2014/main" id="{B81D75D5-9AEF-452E-AC32-83EE02901882}"/>
-                </a:ext>
-              </a:extLst>
-            </p:cNvPr>
-            <p:cNvGrpSpPr/>
-            <p:nvPr/>
-          </p:nvGrpSpPr>
-          <p:grpSpPr>
-            <a:xfrm>
-              <a:off x="77114" y="0"/>
-              <a:ext cx="444500" cy="13716000"/>
-              <a:chOff x="0" y="0"/>
-              <a:chExt cx="87802" cy="2709333"/>
-            </a:xfrm>
-          </p:grpSpPr>
-          <p:sp>
-            <p:nvSpPr>
-              <p:cNvPr id="8" name="Freeform 8">
-                <a:extLst>
-                  <a:ext uri="{FF2B5EF4-FFF2-40B4-BE49-F238E27FC236}">
-                    <a16:creationId xmlns:a16="http://schemas.microsoft.com/office/drawing/2014/main" id="{50E2B077-A2BF-FAB0-B1B2-CCB2618E1F2D}"/>
-                  </a:ext>
-                </a:extLst>
-              </p:cNvPr>
-              <p:cNvSpPr/>
-              <p:nvPr/>
-            </p:nvSpPr>
-            <p:spPr>
-              <a:xfrm>
-                <a:off x="0" y="0"/>
-                <a:ext cx="87802" cy="2709333"/>
-              </a:xfrm>
-              <a:custGeom>
-                <a:avLst/>
-                <a:gdLst/>
-                <a:ahLst/>
-                <a:cxnLst/>
-                <a:rect l="l" t="t" r="r" b="b"/>
-                <a:pathLst>
-                  <a:path w="87802" h="2709333">
-                    <a:moveTo>
-                      <a:pt x="0" y="0"/>
-                    </a:moveTo>
-                    <a:lnTo>
-                      <a:pt x="87802" y="0"/>
-                    </a:lnTo>
-                    <a:lnTo>
-                      <a:pt x="87802" y="2709333"/>
-                    </a:lnTo>
-                    <a:lnTo>
-                      <a:pt x="0" y="2709333"/>
-                    </a:lnTo>
-                    <a:close/>
-                  </a:path>
-                </a:pathLst>
-              </a:custGeom>
-              <a:gradFill rotWithShape="1">
-                <a:gsLst>
-                  <a:gs pos="0">
-                    <a:srgbClr val="6B1374">
-                      <a:alpha val="100000"/>
-                    </a:srgbClr>
-                  </a:gs>
-                  <a:gs pos="33333">
-                    <a:srgbClr val="700A89">
-                      <a:alpha val="100000"/>
-                    </a:srgbClr>
-                  </a:gs>
-                  <a:gs pos="66667">
-                    <a:srgbClr val="C20052">
-                      <a:alpha val="100000"/>
-                    </a:srgbClr>
-                  </a:gs>
-                  <a:gs pos="100000">
-                    <a:srgbClr val="FF0055">
-                      <a:alpha val="100000"/>
-                    </a:srgbClr>
-                  </a:gs>
-                </a:gsLst>
-                <a:lin ang="5400000"/>
-              </a:gradFill>
-            </p:spPr>
-            <p:txBody>
-              <a:bodyPr/>
-              <a:lstStyle/>
-              <a:p>
-                <a:endParaRPr lang="es-CO"/>
-              </a:p>
-            </p:txBody>
-          </p:sp>
-          <p:sp>
-            <p:nvSpPr>
-              <p:cNvPr id="9" name="TextBox 9">
-                <a:extLst>
-                  <a:ext uri="{FF2B5EF4-FFF2-40B4-BE49-F238E27FC236}">
-                    <a16:creationId xmlns:a16="http://schemas.microsoft.com/office/drawing/2014/main" id="{E4682A4F-F140-D5EA-2DDD-C67AE65FC43F}"/>
-                  </a:ext>
-                </a:extLst>
-              </p:cNvPr>
-              <p:cNvSpPr txBox="1"/>
-              <p:nvPr/>
-            </p:nvSpPr>
-            <p:spPr>
-              <a:xfrm>
-                <a:off x="0" y="-38100"/>
-                <a:ext cx="87802" cy="2747433"/>
-              </a:xfrm>
-              <a:prstGeom prst="rect">
-                <a:avLst/>
-              </a:prstGeom>
-            </p:spPr>
-            <p:txBody>
-              <a:bodyPr lIns="50800" tIns="50800" rIns="50800" bIns="50800" rtlCol="0" anchor="ctr"/>
-              <a:lstStyle/>
-              <a:p>
-                <a:pPr algn="ctr">
-                  <a:lnSpc>
-                    <a:spcPts val="2659"/>
-                  </a:lnSpc>
-                </a:pPr>
-                <a:endParaRPr/>
-              </a:p>
-            </p:txBody>
-          </p:sp>
-        </p:grpSp>
-        <p:sp>
-          <p:nvSpPr>
-            <p:cNvPr id="10" name="Freeform 10">
-              <a:extLst>
-                <a:ext uri="{FF2B5EF4-FFF2-40B4-BE49-F238E27FC236}">
-                  <a16:creationId xmlns:a16="http://schemas.microsoft.com/office/drawing/2014/main" id="{A17B42BE-2F15-26D8-7E5B-F675F25B596C}"/>
-                </a:ext>
-              </a:extLst>
-            </p:cNvPr>
-            <p:cNvSpPr/>
-            <p:nvPr/>
-          </p:nvSpPr>
-          <p:spPr>
-            <a:xfrm>
-              <a:off x="22810" y="1020609"/>
-              <a:ext cx="553108" cy="542737"/>
-            </a:xfrm>
-            <a:custGeom>
-              <a:avLst/>
-              <a:gdLst/>
-              <a:ahLst/>
-              <a:cxnLst/>
-              <a:rect l="l" t="t" r="r" b="b"/>
-              <a:pathLst>
-                <a:path w="553108" h="542737">
-                  <a:moveTo>
-                    <a:pt x="0" y="0"/>
-                  </a:moveTo>
-                  <a:lnTo>
-                    <a:pt x="553108" y="0"/>
-                  </a:lnTo>
-                  <a:lnTo>
-                    <a:pt x="553108" y="542737"/>
-                  </a:lnTo>
-                  <a:lnTo>
-                    <a:pt x="0" y="542737"/>
-                  </a:lnTo>
-                  <a:lnTo>
-                    <a:pt x="0" y="0"/>
-                  </a:lnTo>
-                  <a:close/>
-                </a:path>
-              </a:pathLst>
-            </a:custGeom>
-            <a:blipFill>
-              <a:blip r:embed="rId3">
-                <a:extLst>
-                  <a:ext uri="{96DAC541-7B7A-43D3-8B79-37D633B846F1}">
-                    <asvg:svgBlip xmlns:asvg="http://schemas.microsoft.com/office/drawing/2016/SVG/main" r:embed="rId4"/>
-                  </a:ext>
-                </a:extLst>
-              </a:blip>
-              <a:stretch>
-                <a:fillRect/>
-              </a:stretch>
-            </a:blipFill>
-          </p:spPr>
-          <p:txBody>
-            <a:bodyPr/>
-            <a:lstStyle/>
-            <a:p>
-              <a:endParaRPr lang="es-CO"/>
-            </a:p>
-          </p:txBody>
-        </p:sp>
-        <p:sp>
-          <p:nvSpPr>
-            <p:cNvPr id="11" name="Freeform 11">
-              <a:extLst>
-                <a:ext uri="{FF2B5EF4-FFF2-40B4-BE49-F238E27FC236}">
-                  <a16:creationId xmlns:a16="http://schemas.microsoft.com/office/drawing/2014/main" id="{2AC95182-6F0E-D5B9-4325-67D16690F351}"/>
-                </a:ext>
-              </a:extLst>
-            </p:cNvPr>
-            <p:cNvSpPr/>
-            <p:nvPr/>
-          </p:nvSpPr>
-          <p:spPr>
-            <a:xfrm rot="-10800000">
-              <a:off x="22810" y="102655"/>
-              <a:ext cx="553108" cy="542737"/>
-            </a:xfrm>
-            <a:custGeom>
-              <a:avLst/>
-              <a:gdLst/>
-              <a:ahLst/>
-              <a:cxnLst/>
-              <a:rect l="l" t="t" r="r" b="b"/>
-              <a:pathLst>
-                <a:path w="553108" h="542737">
-                  <a:moveTo>
-                    <a:pt x="0" y="0"/>
-                  </a:moveTo>
-                  <a:lnTo>
-                    <a:pt x="553108" y="0"/>
-                  </a:lnTo>
-                  <a:lnTo>
-                    <a:pt x="553108" y="542737"/>
-                  </a:lnTo>
-                  <a:lnTo>
-                    <a:pt x="0" y="542737"/>
-                  </a:lnTo>
-                  <a:lnTo>
-                    <a:pt x="0" y="0"/>
-                  </a:lnTo>
-                  <a:close/>
-                </a:path>
-              </a:pathLst>
-            </a:custGeom>
-            <a:blipFill>
-              <a:blip r:embed="rId3">
-                <a:extLst>
-                  <a:ext uri="{96DAC541-7B7A-43D3-8B79-37D633B846F1}">
-                    <asvg:svgBlip xmlns:asvg="http://schemas.microsoft.com/office/drawing/2016/SVG/main" r:embed="rId4"/>
-                  </a:ext>
-                </a:extLst>
-              </a:blip>
-              <a:stretch>
-                <a:fillRect/>
-              </a:stretch>
-            </a:blipFill>
-          </p:spPr>
-          <p:txBody>
-            <a:bodyPr/>
-            <a:lstStyle/>
-            <a:p>
-              <a:endParaRPr lang="es-CO"/>
-            </a:p>
-          </p:txBody>
-        </p:sp>
-        <p:grpSp>
-          <p:nvGrpSpPr>
-            <p:cNvPr id="12" name="Group 12">
-              <a:extLst>
-                <a:ext uri="{FF2B5EF4-FFF2-40B4-BE49-F238E27FC236}">
-                  <a16:creationId xmlns:a16="http://schemas.microsoft.com/office/drawing/2014/main" id="{ECAC86C8-0D7E-3DC7-EB3B-B7C62D082D58}"/>
-                </a:ext>
-              </a:extLst>
-            </p:cNvPr>
-            <p:cNvGrpSpPr/>
-            <p:nvPr/>
-          </p:nvGrpSpPr>
-          <p:grpSpPr>
-            <a:xfrm rot="1460314">
-              <a:off x="1518" y="765089"/>
-              <a:ext cx="595692" cy="135824"/>
-              <a:chOff x="0" y="0"/>
-              <a:chExt cx="1355149" cy="308989"/>
-            </a:xfrm>
-          </p:grpSpPr>
-          <p:sp>
-            <p:nvSpPr>
-              <p:cNvPr id="13" name="Freeform 13">
-                <a:extLst>
-                  <a:ext uri="{FF2B5EF4-FFF2-40B4-BE49-F238E27FC236}">
-                    <a16:creationId xmlns:a16="http://schemas.microsoft.com/office/drawing/2014/main" id="{D5873FA1-197F-5F0A-CC98-241D89B63736}"/>
-                  </a:ext>
-                </a:extLst>
-              </p:cNvPr>
-              <p:cNvSpPr/>
-              <p:nvPr/>
-            </p:nvSpPr>
-            <p:spPr>
-              <a:xfrm>
-                <a:off x="0" y="0"/>
-                <a:ext cx="1355149" cy="308989"/>
-              </a:xfrm>
-              <a:custGeom>
-                <a:avLst/>
-                <a:gdLst/>
-                <a:ahLst/>
-                <a:cxnLst/>
-                <a:rect l="l" t="t" r="r" b="b"/>
-                <a:pathLst>
-                  <a:path w="1355149" h="308989">
-                    <a:moveTo>
-                      <a:pt x="154494" y="0"/>
-                    </a:moveTo>
-                    <a:lnTo>
-                      <a:pt x="1200655" y="0"/>
-                    </a:lnTo>
-                    <a:cubicBezTo>
-                      <a:pt x="1241629" y="0"/>
-                      <a:pt x="1280926" y="16277"/>
-                      <a:pt x="1309899" y="45250"/>
-                    </a:cubicBezTo>
-                    <a:cubicBezTo>
-                      <a:pt x="1338872" y="74224"/>
-                      <a:pt x="1355149" y="113520"/>
-                      <a:pt x="1355149" y="154494"/>
-                    </a:cubicBezTo>
-                    <a:lnTo>
-                      <a:pt x="1355149" y="154494"/>
-                    </a:lnTo>
-                    <a:cubicBezTo>
-                      <a:pt x="1355149" y="239819"/>
-                      <a:pt x="1285980" y="308989"/>
-                      <a:pt x="1200655" y="308989"/>
-                    </a:cubicBezTo>
-                    <a:lnTo>
-                      <a:pt x="154494" y="308989"/>
-                    </a:lnTo>
-                    <a:cubicBezTo>
-                      <a:pt x="113520" y="308989"/>
-                      <a:pt x="74224" y="292712"/>
-                      <a:pt x="45250" y="263738"/>
-                    </a:cubicBezTo>
-                    <a:cubicBezTo>
-                      <a:pt x="16277" y="234765"/>
-                      <a:pt x="0" y="195469"/>
-                      <a:pt x="0" y="154494"/>
-                    </a:cubicBezTo>
-                    <a:lnTo>
-                      <a:pt x="0" y="154494"/>
-                    </a:lnTo>
-                    <a:cubicBezTo>
-                      <a:pt x="0" y="113520"/>
-                      <a:pt x="16277" y="74224"/>
-                      <a:pt x="45250" y="45250"/>
-                    </a:cubicBezTo>
-                    <a:cubicBezTo>
-                      <a:pt x="74224" y="16277"/>
-                      <a:pt x="113520" y="0"/>
-                      <a:pt x="154494" y="0"/>
-                    </a:cubicBezTo>
-                    <a:close/>
-                  </a:path>
-                </a:pathLst>
-              </a:custGeom>
-              <a:solidFill>
-                <a:srgbClr val="FFFFFF"/>
-              </a:solidFill>
-            </p:spPr>
-            <p:txBody>
-              <a:bodyPr/>
-              <a:lstStyle/>
-              <a:p>
-                <a:endParaRPr lang="es-CO"/>
-              </a:p>
-            </p:txBody>
-          </p:sp>
-          <p:sp>
-            <p:nvSpPr>
-              <p:cNvPr id="14" name="TextBox 14">
-                <a:extLst>
-                  <a:ext uri="{FF2B5EF4-FFF2-40B4-BE49-F238E27FC236}">
-                    <a16:creationId xmlns:a16="http://schemas.microsoft.com/office/drawing/2014/main" id="{8FF30897-6A49-DD6C-5453-40131C003674}"/>
-                  </a:ext>
-                </a:extLst>
-              </p:cNvPr>
-              <p:cNvSpPr txBox="1"/>
-              <p:nvPr/>
-            </p:nvSpPr>
-            <p:spPr>
-              <a:xfrm>
-                <a:off x="0" y="-38100"/>
-                <a:ext cx="1355149" cy="347089"/>
-              </a:xfrm>
-              <a:prstGeom prst="rect">
-                <a:avLst/>
-              </a:prstGeom>
-            </p:spPr>
-            <p:txBody>
-              <a:bodyPr lIns="50800" tIns="50800" rIns="50800" bIns="50800" rtlCol="0" anchor="ctr"/>
-              <a:lstStyle/>
-              <a:p>
-                <a:pPr algn="ctr">
-                  <a:lnSpc>
-                    <a:spcPts val="2659"/>
-                  </a:lnSpc>
-                </a:pPr>
-                <a:endParaRPr/>
-              </a:p>
-            </p:txBody>
-          </p:sp>
-        </p:grpSp>
-      </p:grpSp>
-    </p:spTree>
-    <p:extLst>
-      <p:ext uri="{BB962C8B-B14F-4D97-AF65-F5344CB8AC3E}">
-        <p14:creationId xmlns:p14="http://schemas.microsoft.com/office/powerpoint/2010/main" val="3057774750"/>
-      </p:ext>
-    </p:extLst>
-  </p:cSld>
-  <p:clrMapOvr>
-    <a:masterClrMapping/>
-  </p:clrMapOvr>
-</p:sld>
-</file>
-
-<file path=ppt/slides/slide29.xml><?xml version="1.0" encoding="utf-8"?>
-<p:sld xmlns:a="http://schemas.openxmlformats.org/drawingml/2006/main" xmlns:r="http://schemas.openxmlformats.org/officeDocument/2006/relationships" xmlns:p="http://schemas.openxmlformats.org/presentationml/2006/main">
-  <p:cSld>
-    <p:spTree>
-      <p:nvGrpSpPr>
-        <p:cNvPr id="1" name="">
-          <a:extLst>
-            <a:ext uri="{FF2B5EF4-FFF2-40B4-BE49-F238E27FC236}">
-              <a16:creationId xmlns:a16="http://schemas.microsoft.com/office/drawing/2014/main" id="{8523280F-4A68-F4EF-02EC-531BFCB4914B}"/>
-            </a:ext>
-          </a:extLst>
-        </p:cNvPr>
-        <p:cNvGrpSpPr/>
-        <p:nvPr/>
-      </p:nvGrpSpPr>
-      <p:grpSpPr>
-        <a:xfrm>
-          <a:off x="0" y="0"/>
-          <a:ext cx="0" cy="0"/>
-          <a:chOff x="0" y="0"/>
-          <a:chExt cx="0" cy="0"/>
-        </a:xfrm>
-      </p:grpSpPr>
-      <p:sp>
-        <p:nvSpPr>
-          <p:cNvPr id="2" name="Freeform 2">
-            <a:extLst>
-              <a:ext uri="{FF2B5EF4-FFF2-40B4-BE49-F238E27FC236}">
-                <a16:creationId xmlns:a16="http://schemas.microsoft.com/office/drawing/2014/main" id="{DCA9036F-C852-EFB3-A91E-641DDB14D036}"/>
-              </a:ext>
-            </a:extLst>
-          </p:cNvPr>
-          <p:cNvSpPr/>
-          <p:nvPr/>
-        </p:nvSpPr>
-        <p:spPr>
-          <a:xfrm>
-            <a:off x="16240722" y="9245973"/>
-            <a:ext cx="1388509" cy="555404"/>
-          </a:xfrm>
-          <a:custGeom>
-            <a:avLst/>
-            <a:gdLst/>
-            <a:ahLst/>
-            <a:cxnLst/>
-            <a:rect l="l" t="t" r="r" b="b"/>
-            <a:pathLst>
-              <a:path w="1388509" h="555404">
-                <a:moveTo>
-                  <a:pt x="0" y="0"/>
-                </a:moveTo>
-                <a:lnTo>
-                  <a:pt x="1388510" y="0"/>
-                </a:lnTo>
-                <a:lnTo>
-                  <a:pt x="1388510" y="555404"/>
-                </a:lnTo>
-                <a:lnTo>
-                  <a:pt x="0" y="555404"/>
-                </a:lnTo>
-                <a:lnTo>
-                  <a:pt x="0" y="0"/>
-                </a:lnTo>
-                <a:close/>
-              </a:path>
-            </a:pathLst>
-          </a:custGeom>
-          <a:blipFill>
-            <a:blip r:embed="rId2"/>
-            <a:stretch>
-              <a:fillRect/>
-            </a:stretch>
-          </a:blipFill>
-        </p:spPr>
-        <p:txBody>
-          <a:bodyPr/>
-          <a:lstStyle/>
-          <a:p>
-            <a:endParaRPr lang="es-CO"/>
-          </a:p>
-        </p:txBody>
-      </p:sp>
-      <p:grpSp>
-        <p:nvGrpSpPr>
-          <p:cNvPr id="3" name="Group 3">
-            <a:extLst>
-              <a:ext uri="{FF2B5EF4-FFF2-40B4-BE49-F238E27FC236}">
-                <a16:creationId xmlns:a16="http://schemas.microsoft.com/office/drawing/2014/main" id="{137A1A17-36E3-196A-C515-0FB083419B6B}"/>
-              </a:ext>
-            </a:extLst>
-          </p:cNvPr>
-          <p:cNvGrpSpPr/>
-          <p:nvPr/>
-        </p:nvGrpSpPr>
-        <p:grpSpPr>
-          <a:xfrm flipV="1">
-            <a:off x="-762000" y="1516854"/>
-            <a:ext cx="8458200" cy="45719"/>
-            <a:chOff x="0" y="0"/>
-            <a:chExt cx="1495010" cy="20069"/>
-          </a:xfrm>
-        </p:grpSpPr>
-        <p:sp>
-          <p:nvSpPr>
-            <p:cNvPr id="4" name="Freeform 4">
-              <a:extLst>
-                <a:ext uri="{FF2B5EF4-FFF2-40B4-BE49-F238E27FC236}">
-                  <a16:creationId xmlns:a16="http://schemas.microsoft.com/office/drawing/2014/main" id="{F72AD009-6712-7B08-6563-B9C9C19B6691}"/>
-                </a:ext>
-              </a:extLst>
-            </p:cNvPr>
-            <p:cNvSpPr/>
-            <p:nvPr/>
-          </p:nvSpPr>
-          <p:spPr>
-            <a:xfrm>
-              <a:off x="0" y="0"/>
-              <a:ext cx="1495010" cy="20069"/>
-            </a:xfrm>
-            <a:custGeom>
-              <a:avLst/>
-              <a:gdLst/>
-              <a:ahLst/>
-              <a:cxnLst/>
-              <a:rect l="l" t="t" r="r" b="b"/>
-              <a:pathLst>
-                <a:path w="1495010" h="20069">
-                  <a:moveTo>
-                    <a:pt x="10035" y="0"/>
-                  </a:moveTo>
-                  <a:lnTo>
-                    <a:pt x="1484976" y="0"/>
-                  </a:lnTo>
-                  <a:cubicBezTo>
-                    <a:pt x="1487637" y="0"/>
-                    <a:pt x="1490189" y="1057"/>
-                    <a:pt x="1492071" y="2939"/>
-                  </a:cubicBezTo>
-                  <a:cubicBezTo>
-                    <a:pt x="1493953" y="4821"/>
-                    <a:pt x="1495010" y="7373"/>
-                    <a:pt x="1495010" y="10035"/>
-                  </a:cubicBezTo>
-                  <a:lnTo>
-                    <a:pt x="1495010" y="10035"/>
-                  </a:lnTo>
-                  <a:cubicBezTo>
-                    <a:pt x="1495010" y="12696"/>
-                    <a:pt x="1493953" y="15248"/>
-                    <a:pt x="1492071" y="17130"/>
-                  </a:cubicBezTo>
-                  <a:cubicBezTo>
-                    <a:pt x="1490189" y="19012"/>
-                    <a:pt x="1487637" y="20069"/>
-                    <a:pt x="1484976" y="20069"/>
-                  </a:cubicBezTo>
-                  <a:lnTo>
-                    <a:pt x="10035" y="20069"/>
-                  </a:lnTo>
-                  <a:cubicBezTo>
-                    <a:pt x="7373" y="20069"/>
-                    <a:pt x="4821" y="19012"/>
-                    <a:pt x="2939" y="17130"/>
-                  </a:cubicBezTo>
-                  <a:cubicBezTo>
-                    <a:pt x="1057" y="15248"/>
-                    <a:pt x="0" y="12696"/>
-                    <a:pt x="0" y="10035"/>
-                  </a:cubicBezTo>
-                  <a:lnTo>
-                    <a:pt x="0" y="10035"/>
-                  </a:lnTo>
-                  <a:cubicBezTo>
-                    <a:pt x="0" y="7373"/>
-                    <a:pt x="1057" y="4821"/>
-                    <a:pt x="2939" y="2939"/>
-                  </a:cubicBezTo>
-                  <a:cubicBezTo>
-                    <a:pt x="4821" y="1057"/>
-                    <a:pt x="7373" y="0"/>
-                    <a:pt x="10035" y="0"/>
-                  </a:cubicBezTo>
-                  <a:close/>
-                </a:path>
-              </a:pathLst>
-            </a:custGeom>
-            <a:gradFill rotWithShape="1">
-              <a:gsLst>
-                <a:gs pos="0">
-                  <a:srgbClr val="6B1374">
-                    <a:alpha val="100000"/>
-                  </a:srgbClr>
-                </a:gs>
-                <a:gs pos="33333">
-                  <a:srgbClr val="700A89">
-                    <a:alpha val="100000"/>
-                  </a:srgbClr>
-                </a:gs>
-                <a:gs pos="66667">
-                  <a:srgbClr val="C20052">
-                    <a:alpha val="100000"/>
-                  </a:srgbClr>
-                </a:gs>
-                <a:gs pos="100000">
-                  <a:srgbClr val="FF0055">
-                    <a:alpha val="100000"/>
-                  </a:srgbClr>
-                </a:gs>
-              </a:gsLst>
-              <a:lin ang="0"/>
-            </a:gradFill>
-          </p:spPr>
-          <p:txBody>
-            <a:bodyPr/>
-            <a:lstStyle/>
-            <a:p>
-              <a:endParaRPr lang="es-CO"/>
-            </a:p>
-          </p:txBody>
-        </p:sp>
-        <p:sp>
-          <p:nvSpPr>
-            <p:cNvPr id="5" name="TextBox 5">
-              <a:extLst>
-                <a:ext uri="{FF2B5EF4-FFF2-40B4-BE49-F238E27FC236}">
-                  <a16:creationId xmlns:a16="http://schemas.microsoft.com/office/drawing/2014/main" id="{99B29224-0C8F-902F-9E8A-205DF27B0E82}"/>
-                </a:ext>
-              </a:extLst>
-            </p:cNvPr>
-            <p:cNvSpPr txBox="1"/>
-            <p:nvPr/>
-          </p:nvSpPr>
-          <p:spPr>
-            <a:xfrm>
-              <a:off x="0" y="-38100"/>
-              <a:ext cx="1495010" cy="58169"/>
-            </a:xfrm>
-            <a:prstGeom prst="rect">
-              <a:avLst/>
-            </a:prstGeom>
-          </p:spPr>
-          <p:txBody>
-            <a:bodyPr lIns="50800" tIns="50800" rIns="50800" bIns="50800" rtlCol="0" anchor="ctr"/>
-            <a:lstStyle/>
-            <a:p>
-              <a:pPr algn="ctr">
-                <a:lnSpc>
-                  <a:spcPts val="2659"/>
-                </a:lnSpc>
-              </a:pPr>
-              <a:endParaRPr/>
-            </a:p>
-          </p:txBody>
-        </p:sp>
-      </p:grpSp>
-      <p:grpSp>
-        <p:nvGrpSpPr>
-          <p:cNvPr id="6" name="Group 6">
-            <a:extLst>
-              <a:ext uri="{FF2B5EF4-FFF2-40B4-BE49-F238E27FC236}">
-                <a16:creationId xmlns:a16="http://schemas.microsoft.com/office/drawing/2014/main" id="{DE28528D-BB9B-FF0B-EC31-D2BBA7341CFF}"/>
-              </a:ext>
-            </a:extLst>
-          </p:cNvPr>
-          <p:cNvGrpSpPr/>
-          <p:nvPr/>
-        </p:nvGrpSpPr>
-        <p:grpSpPr>
-          <a:xfrm>
-            <a:off x="17896105" y="0"/>
-            <a:ext cx="449045" cy="10287000"/>
-            <a:chOff x="0" y="0"/>
-            <a:chExt cx="598727" cy="13716000"/>
-          </a:xfrm>
-        </p:grpSpPr>
-        <p:grpSp>
-          <p:nvGrpSpPr>
-            <p:cNvPr id="7" name="Group 7">
-              <a:extLst>
-                <a:ext uri="{FF2B5EF4-FFF2-40B4-BE49-F238E27FC236}">
-                  <a16:creationId xmlns:a16="http://schemas.microsoft.com/office/drawing/2014/main" id="{CFFE4F85-E8CC-9E65-3F67-022D6557A36C}"/>
-                </a:ext>
-              </a:extLst>
-            </p:cNvPr>
-            <p:cNvGrpSpPr/>
-            <p:nvPr/>
-          </p:nvGrpSpPr>
-          <p:grpSpPr>
-            <a:xfrm>
-              <a:off x="77114" y="0"/>
-              <a:ext cx="444500" cy="13716000"/>
-              <a:chOff x="0" y="0"/>
-              <a:chExt cx="87802" cy="2709333"/>
-            </a:xfrm>
-          </p:grpSpPr>
-          <p:sp>
-            <p:nvSpPr>
-              <p:cNvPr id="8" name="Freeform 8">
-                <a:extLst>
-                  <a:ext uri="{FF2B5EF4-FFF2-40B4-BE49-F238E27FC236}">
-                    <a16:creationId xmlns:a16="http://schemas.microsoft.com/office/drawing/2014/main" id="{DE25595F-0903-B5BC-EBCF-663910EA8AA0}"/>
-                  </a:ext>
-                </a:extLst>
-              </p:cNvPr>
-              <p:cNvSpPr/>
-              <p:nvPr/>
-            </p:nvSpPr>
-            <p:spPr>
-              <a:xfrm>
-                <a:off x="0" y="0"/>
-                <a:ext cx="87802" cy="2709333"/>
-              </a:xfrm>
-              <a:custGeom>
-                <a:avLst/>
-                <a:gdLst/>
-                <a:ahLst/>
-                <a:cxnLst/>
-                <a:rect l="l" t="t" r="r" b="b"/>
-                <a:pathLst>
-                  <a:path w="87802" h="2709333">
-                    <a:moveTo>
-                      <a:pt x="0" y="0"/>
-                    </a:moveTo>
-                    <a:lnTo>
-                      <a:pt x="87802" y="0"/>
-                    </a:lnTo>
-                    <a:lnTo>
-                      <a:pt x="87802" y="2709333"/>
-                    </a:lnTo>
-                    <a:lnTo>
-                      <a:pt x="0" y="2709333"/>
-                    </a:lnTo>
-                    <a:close/>
-                  </a:path>
-                </a:pathLst>
-              </a:custGeom>
-              <a:gradFill rotWithShape="1">
-                <a:gsLst>
-                  <a:gs pos="0">
-                    <a:srgbClr val="6B1374">
-                      <a:alpha val="100000"/>
-                    </a:srgbClr>
-                  </a:gs>
-                  <a:gs pos="33333">
-                    <a:srgbClr val="700A89">
-                      <a:alpha val="100000"/>
-                    </a:srgbClr>
-                  </a:gs>
-                  <a:gs pos="66667">
-                    <a:srgbClr val="C20052">
-                      <a:alpha val="100000"/>
-                    </a:srgbClr>
-                  </a:gs>
-                  <a:gs pos="100000">
-                    <a:srgbClr val="FF0055">
-                      <a:alpha val="100000"/>
-                    </a:srgbClr>
-                  </a:gs>
-                </a:gsLst>
-                <a:lin ang="5400000"/>
-              </a:gradFill>
-            </p:spPr>
-            <p:txBody>
-              <a:bodyPr/>
-              <a:lstStyle/>
-              <a:p>
-                <a:endParaRPr lang="es-CO"/>
-              </a:p>
-            </p:txBody>
-          </p:sp>
-          <p:sp>
-            <p:nvSpPr>
-              <p:cNvPr id="9" name="TextBox 9">
-                <a:extLst>
-                  <a:ext uri="{FF2B5EF4-FFF2-40B4-BE49-F238E27FC236}">
-                    <a16:creationId xmlns:a16="http://schemas.microsoft.com/office/drawing/2014/main" id="{47AC3159-FEB7-4674-00E4-411C08E00BDE}"/>
-                  </a:ext>
-                </a:extLst>
-              </p:cNvPr>
-              <p:cNvSpPr txBox="1"/>
-              <p:nvPr/>
-            </p:nvSpPr>
-            <p:spPr>
-              <a:xfrm>
-                <a:off x="0" y="-38100"/>
-                <a:ext cx="87802" cy="2747433"/>
-              </a:xfrm>
-              <a:prstGeom prst="rect">
-                <a:avLst/>
-              </a:prstGeom>
-            </p:spPr>
-            <p:txBody>
-              <a:bodyPr lIns="50800" tIns="50800" rIns="50800" bIns="50800" rtlCol="0" anchor="ctr"/>
-              <a:lstStyle/>
-              <a:p>
-                <a:pPr algn="ctr">
-                  <a:lnSpc>
-                    <a:spcPts val="2659"/>
-                  </a:lnSpc>
-                </a:pPr>
-                <a:endParaRPr/>
-              </a:p>
-            </p:txBody>
-          </p:sp>
-        </p:grpSp>
-        <p:sp>
-          <p:nvSpPr>
-            <p:cNvPr id="10" name="Freeform 10">
-              <a:extLst>
-                <a:ext uri="{FF2B5EF4-FFF2-40B4-BE49-F238E27FC236}">
-                  <a16:creationId xmlns:a16="http://schemas.microsoft.com/office/drawing/2014/main" id="{B091EB33-2B6A-E05B-24B5-F34DAE516C0A}"/>
-                </a:ext>
-              </a:extLst>
-            </p:cNvPr>
-            <p:cNvSpPr/>
-            <p:nvPr/>
-          </p:nvSpPr>
-          <p:spPr>
-            <a:xfrm>
-              <a:off x="22810" y="1020609"/>
-              <a:ext cx="553108" cy="542737"/>
-            </a:xfrm>
-            <a:custGeom>
-              <a:avLst/>
-              <a:gdLst/>
-              <a:ahLst/>
-              <a:cxnLst/>
-              <a:rect l="l" t="t" r="r" b="b"/>
-              <a:pathLst>
-                <a:path w="553108" h="542737">
-                  <a:moveTo>
-                    <a:pt x="0" y="0"/>
-                  </a:moveTo>
-                  <a:lnTo>
-                    <a:pt x="553108" y="0"/>
-                  </a:lnTo>
-                  <a:lnTo>
-                    <a:pt x="553108" y="542737"/>
-                  </a:lnTo>
-                  <a:lnTo>
-                    <a:pt x="0" y="542737"/>
-                  </a:lnTo>
-                  <a:lnTo>
-                    <a:pt x="0" y="0"/>
-                  </a:lnTo>
-                  <a:close/>
-                </a:path>
-              </a:pathLst>
-            </a:custGeom>
-            <a:blipFill>
-              <a:blip r:embed="rId3">
-                <a:extLst>
-                  <a:ext uri="{96DAC541-7B7A-43D3-8B79-37D633B846F1}">
-                    <asvg:svgBlip xmlns:asvg="http://schemas.microsoft.com/office/drawing/2016/SVG/main" r:embed="rId4"/>
-                  </a:ext>
-                </a:extLst>
-              </a:blip>
-              <a:stretch>
-                <a:fillRect/>
-              </a:stretch>
-            </a:blipFill>
-          </p:spPr>
-          <p:txBody>
-            <a:bodyPr/>
-            <a:lstStyle/>
-            <a:p>
-              <a:endParaRPr lang="es-CO"/>
-            </a:p>
-          </p:txBody>
-        </p:sp>
-        <p:sp>
-          <p:nvSpPr>
-            <p:cNvPr id="11" name="Freeform 11">
-              <a:extLst>
-                <a:ext uri="{FF2B5EF4-FFF2-40B4-BE49-F238E27FC236}">
-                  <a16:creationId xmlns:a16="http://schemas.microsoft.com/office/drawing/2014/main" id="{21722A66-D005-F4D0-0A02-8E6D589D8DD6}"/>
-                </a:ext>
-              </a:extLst>
-            </p:cNvPr>
-            <p:cNvSpPr/>
-            <p:nvPr/>
-          </p:nvSpPr>
-          <p:spPr>
-            <a:xfrm rot="-10800000">
-              <a:off x="22810" y="102655"/>
-              <a:ext cx="553108" cy="542737"/>
-            </a:xfrm>
-            <a:custGeom>
-              <a:avLst/>
-              <a:gdLst/>
-              <a:ahLst/>
-              <a:cxnLst/>
-              <a:rect l="l" t="t" r="r" b="b"/>
-              <a:pathLst>
-                <a:path w="553108" h="542737">
-                  <a:moveTo>
-                    <a:pt x="0" y="0"/>
-                  </a:moveTo>
-                  <a:lnTo>
-                    <a:pt x="553108" y="0"/>
-                  </a:lnTo>
-                  <a:lnTo>
-                    <a:pt x="553108" y="542737"/>
-                  </a:lnTo>
-                  <a:lnTo>
-                    <a:pt x="0" y="542737"/>
-                  </a:lnTo>
-                  <a:lnTo>
-                    <a:pt x="0" y="0"/>
-                  </a:lnTo>
-                  <a:close/>
-                </a:path>
-              </a:pathLst>
-            </a:custGeom>
-            <a:blipFill>
-              <a:blip r:embed="rId3">
-                <a:extLst>
-                  <a:ext uri="{96DAC541-7B7A-43D3-8B79-37D633B846F1}">
-                    <asvg:svgBlip xmlns:asvg="http://schemas.microsoft.com/office/drawing/2016/SVG/main" r:embed="rId4"/>
-                  </a:ext>
-                </a:extLst>
-              </a:blip>
-              <a:stretch>
-                <a:fillRect/>
-              </a:stretch>
-            </a:blipFill>
-          </p:spPr>
-          <p:txBody>
-            <a:bodyPr/>
-            <a:lstStyle/>
-            <a:p>
-              <a:endParaRPr lang="es-CO"/>
-            </a:p>
-          </p:txBody>
-        </p:sp>
-        <p:grpSp>
-          <p:nvGrpSpPr>
-            <p:cNvPr id="12" name="Group 12">
-              <a:extLst>
-                <a:ext uri="{FF2B5EF4-FFF2-40B4-BE49-F238E27FC236}">
-                  <a16:creationId xmlns:a16="http://schemas.microsoft.com/office/drawing/2014/main" id="{0E272BAF-6A69-7F5F-48EF-EA0BCE027063}"/>
-                </a:ext>
-              </a:extLst>
-            </p:cNvPr>
-            <p:cNvGrpSpPr/>
-            <p:nvPr/>
-          </p:nvGrpSpPr>
-          <p:grpSpPr>
-            <a:xfrm rot="1460314">
-              <a:off x="1518" y="765089"/>
-              <a:ext cx="595692" cy="135824"/>
-              <a:chOff x="0" y="0"/>
-              <a:chExt cx="1355149" cy="308989"/>
-            </a:xfrm>
-          </p:grpSpPr>
-          <p:sp>
-            <p:nvSpPr>
-              <p:cNvPr id="13" name="Freeform 13">
-                <a:extLst>
-                  <a:ext uri="{FF2B5EF4-FFF2-40B4-BE49-F238E27FC236}">
-                    <a16:creationId xmlns:a16="http://schemas.microsoft.com/office/drawing/2014/main" id="{D9C892C9-E8A3-D9BE-C615-6CBFF8F73084}"/>
-                  </a:ext>
-                </a:extLst>
-              </p:cNvPr>
-              <p:cNvSpPr/>
-              <p:nvPr/>
-            </p:nvSpPr>
-            <p:spPr>
-              <a:xfrm>
-                <a:off x="0" y="0"/>
-                <a:ext cx="1355149" cy="308989"/>
-              </a:xfrm>
-              <a:custGeom>
-                <a:avLst/>
-                <a:gdLst/>
-                <a:ahLst/>
-                <a:cxnLst/>
-                <a:rect l="l" t="t" r="r" b="b"/>
-                <a:pathLst>
-                  <a:path w="1355149" h="308989">
-                    <a:moveTo>
-                      <a:pt x="154494" y="0"/>
-                    </a:moveTo>
-                    <a:lnTo>
-                      <a:pt x="1200655" y="0"/>
-                    </a:lnTo>
-                    <a:cubicBezTo>
-                      <a:pt x="1241629" y="0"/>
-                      <a:pt x="1280926" y="16277"/>
-                      <a:pt x="1309899" y="45250"/>
-                    </a:cubicBezTo>
-                    <a:cubicBezTo>
-                      <a:pt x="1338872" y="74224"/>
-                      <a:pt x="1355149" y="113520"/>
-                      <a:pt x="1355149" y="154494"/>
-                    </a:cubicBezTo>
-                    <a:lnTo>
-                      <a:pt x="1355149" y="154494"/>
-                    </a:lnTo>
-                    <a:cubicBezTo>
-                      <a:pt x="1355149" y="239819"/>
-                      <a:pt x="1285980" y="308989"/>
-                      <a:pt x="1200655" y="308989"/>
-                    </a:cubicBezTo>
-                    <a:lnTo>
-                      <a:pt x="154494" y="308989"/>
-                    </a:lnTo>
-                    <a:cubicBezTo>
-                      <a:pt x="113520" y="308989"/>
-                      <a:pt x="74224" y="292712"/>
-                      <a:pt x="45250" y="263738"/>
-                    </a:cubicBezTo>
-                    <a:cubicBezTo>
-                      <a:pt x="16277" y="234765"/>
-                      <a:pt x="0" y="195469"/>
-                      <a:pt x="0" y="154494"/>
-                    </a:cubicBezTo>
-                    <a:lnTo>
-                      <a:pt x="0" y="154494"/>
-                    </a:lnTo>
-                    <a:cubicBezTo>
-                      <a:pt x="0" y="113520"/>
-                      <a:pt x="16277" y="74224"/>
-                      <a:pt x="45250" y="45250"/>
-                    </a:cubicBezTo>
-                    <a:cubicBezTo>
-                      <a:pt x="74224" y="16277"/>
-                      <a:pt x="113520" y="0"/>
-                      <a:pt x="154494" y="0"/>
-                    </a:cubicBezTo>
-                    <a:close/>
-                  </a:path>
-                </a:pathLst>
-              </a:custGeom>
-              <a:solidFill>
-                <a:srgbClr val="FFFFFF"/>
-              </a:solidFill>
-            </p:spPr>
-            <p:txBody>
-              <a:bodyPr/>
-              <a:lstStyle/>
-              <a:p>
-                <a:endParaRPr lang="es-CO"/>
-              </a:p>
-            </p:txBody>
-          </p:sp>
-          <p:sp>
-            <p:nvSpPr>
-              <p:cNvPr id="14" name="TextBox 14">
-                <a:extLst>
-                  <a:ext uri="{FF2B5EF4-FFF2-40B4-BE49-F238E27FC236}">
-                    <a16:creationId xmlns:a16="http://schemas.microsoft.com/office/drawing/2014/main" id="{FB175B11-A2AF-DF04-94CE-533EB7453A89}"/>
-                  </a:ext>
-                </a:extLst>
-              </p:cNvPr>
-              <p:cNvSpPr txBox="1"/>
-              <p:nvPr/>
-            </p:nvSpPr>
-            <p:spPr>
-              <a:xfrm>
-                <a:off x="0" y="-38100"/>
-                <a:ext cx="1355149" cy="347089"/>
-              </a:xfrm>
-              <a:prstGeom prst="rect">
-                <a:avLst/>
-              </a:prstGeom>
-            </p:spPr>
-            <p:txBody>
-              <a:bodyPr lIns="50800" tIns="50800" rIns="50800" bIns="50800" rtlCol="0" anchor="ctr"/>
-              <a:lstStyle/>
-              <a:p>
-                <a:pPr algn="ctr">
-                  <a:lnSpc>
-                    <a:spcPts val="2659"/>
-                  </a:lnSpc>
-                </a:pPr>
-                <a:endParaRPr/>
-              </a:p>
-            </p:txBody>
-          </p:sp>
-        </p:grpSp>
-      </p:grpSp>
-    </p:spTree>
-    <p:extLst>
-      <p:ext uri="{BB962C8B-B14F-4D97-AF65-F5344CB8AC3E}">
-        <p14:creationId xmlns:p14="http://schemas.microsoft.com/office/powerpoint/2010/main" val="3573794187"/>
-      </p:ext>
-    </p:extLst>
-  </p:cSld>
-  <p:clrMapOvr>
-    <a:masterClrMapping/>
-  </p:clrMapOvr>
-</p:sld>
-</file>
-
-<file path=ppt/slides/slide3.xml><?xml version="1.0" encoding="utf-8"?>
-<p:sld xmlns:a="http://schemas.openxmlformats.org/drawingml/2006/main" xmlns:r="http://schemas.openxmlformats.org/officeDocument/2006/relationships" xmlns:p="http://schemas.openxmlformats.org/presentationml/2006/main">
-  <p:cSld>
-    <p:spTree>
-      <p:nvGrpSpPr>
-        <p:cNvPr id="1" name="">
-          <a:extLst>
-            <a:ext uri="{FF2B5EF4-FFF2-40B4-BE49-F238E27FC236}">
-              <a16:creationId xmlns:a16="http://schemas.microsoft.com/office/drawing/2014/main" id="{687629EE-1985-2225-31E2-050DC896E635}"/>
-            </a:ext>
-          </a:extLst>
-        </p:cNvPr>
-        <p:cNvGrpSpPr/>
-        <p:nvPr/>
-      </p:nvGrpSpPr>
-      <p:grpSpPr>
-        <a:xfrm>
-          <a:off x="0" y="0"/>
-          <a:ext cx="0" cy="0"/>
-          <a:chOff x="0" y="0"/>
-          <a:chExt cx="0" cy="0"/>
-        </a:xfrm>
-      </p:grpSpPr>
-      <p:sp>
-        <p:nvSpPr>
-          <p:cNvPr id="2" name="Freeform 2">
-            <a:extLst>
-              <a:ext uri="{FF2B5EF4-FFF2-40B4-BE49-F238E27FC236}">
-                <a16:creationId xmlns:a16="http://schemas.microsoft.com/office/drawing/2014/main" id="{B8E846FC-1099-F5A4-7D4D-94754DDF4519}"/>
-              </a:ext>
-            </a:extLst>
-          </p:cNvPr>
-          <p:cNvSpPr/>
-          <p:nvPr/>
-        </p:nvSpPr>
-        <p:spPr>
-          <a:xfrm>
-            <a:off x="-437361" y="8801100"/>
-            <a:ext cx="1656562" cy="1607056"/>
-          </a:xfrm>
-          <a:custGeom>
-            <a:avLst/>
-            <a:gdLst/>
-            <a:ahLst/>
-            <a:cxnLst/>
-            <a:rect l="l" t="t" r="r" b="b"/>
-            <a:pathLst>
-              <a:path w="2052835" h="2064911">
-                <a:moveTo>
-                  <a:pt x="0" y="0"/>
-                </a:moveTo>
-                <a:lnTo>
-                  <a:pt x="2052835" y="0"/>
-                </a:lnTo>
-                <a:lnTo>
-                  <a:pt x="2052835" y="2064910"/>
-                </a:lnTo>
-                <a:lnTo>
-                  <a:pt x="0" y="2064910"/>
-                </a:lnTo>
-                <a:lnTo>
-                  <a:pt x="0" y="0"/>
-                </a:lnTo>
-                <a:close/>
-              </a:path>
-            </a:pathLst>
-          </a:custGeom>
-          <a:blipFill>
-            <a:blip r:embed="rId2"/>
-            <a:stretch>
-              <a:fillRect l="-34848" t="-49459" r="-26429" b="-59444"/>
-            </a:stretch>
-          </a:blipFill>
-        </p:spPr>
-        <p:txBody>
-          <a:bodyPr/>
-          <a:lstStyle/>
-          <a:p>
-            <a:endParaRPr lang="es-CO"/>
-          </a:p>
-        </p:txBody>
-      </p:sp>
-      <p:sp>
-        <p:nvSpPr>
-          <p:cNvPr id="3" name="Freeform 3">
-            <a:extLst>
-              <a:ext uri="{FF2B5EF4-FFF2-40B4-BE49-F238E27FC236}">
-                <a16:creationId xmlns:a16="http://schemas.microsoft.com/office/drawing/2014/main" id="{B433B88B-431D-F520-8A64-604BAC5A4F71}"/>
-              </a:ext>
-            </a:extLst>
-          </p:cNvPr>
-          <p:cNvSpPr/>
-          <p:nvPr/>
-        </p:nvSpPr>
-        <p:spPr>
-          <a:xfrm rot="-10800000">
-            <a:off x="16136495" y="-695866"/>
-            <a:ext cx="1607799" cy="1648365"/>
-          </a:xfrm>
-          <a:custGeom>
-            <a:avLst/>
-            <a:gdLst/>
-            <a:ahLst/>
-            <a:cxnLst/>
-            <a:rect l="l" t="t" r="r" b="b"/>
-            <a:pathLst>
-              <a:path w="1607799" h="1648365">
-                <a:moveTo>
-                  <a:pt x="0" y="0"/>
-                </a:moveTo>
-                <a:lnTo>
-                  <a:pt x="1607799" y="0"/>
-                </a:lnTo>
-                <a:lnTo>
-                  <a:pt x="1607799" y="1648364"/>
-                </a:lnTo>
-                <a:lnTo>
-                  <a:pt x="0" y="1648364"/>
-                </a:lnTo>
-                <a:lnTo>
-                  <a:pt x="0" y="0"/>
-                </a:lnTo>
-                <a:close/>
-              </a:path>
-            </a:pathLst>
-          </a:custGeom>
-          <a:blipFill>
-            <a:blip r:embed="rId3"/>
-            <a:stretch>
-              <a:fillRect l="-36892" t="-49695" r="-28270" b="-60205"/>
-            </a:stretch>
-          </a:blipFill>
-        </p:spPr>
-        <p:txBody>
-          <a:bodyPr/>
-          <a:lstStyle/>
-          <a:p>
-            <a:endParaRPr lang="es-CO"/>
-          </a:p>
-        </p:txBody>
-      </p:sp>
-      <p:sp>
-        <p:nvSpPr>
-          <p:cNvPr id="9" name="Freeform 21">
-            <a:extLst>
-              <a:ext uri="{FF2B5EF4-FFF2-40B4-BE49-F238E27FC236}">
-                <a16:creationId xmlns:a16="http://schemas.microsoft.com/office/drawing/2014/main" id="{1D05F255-F2E3-68A0-D911-D29FFBA02339}"/>
-              </a:ext>
-            </a:extLst>
-          </p:cNvPr>
-          <p:cNvSpPr/>
-          <p:nvPr/>
-        </p:nvSpPr>
-        <p:spPr>
-          <a:xfrm>
-            <a:off x="14954160" y="7813562"/>
-            <a:ext cx="2743200" cy="2438400"/>
-          </a:xfrm>
-          <a:custGeom>
-            <a:avLst/>
-            <a:gdLst/>
-            <a:ahLst/>
-            <a:cxnLst/>
-            <a:rect l="l" t="t" r="r" b="b"/>
-            <a:pathLst>
-              <a:path w="5397947" h="4972858">
-                <a:moveTo>
-                  <a:pt x="0" y="0"/>
-                </a:moveTo>
-                <a:lnTo>
-                  <a:pt x="5397947" y="0"/>
-                </a:lnTo>
-                <a:lnTo>
-                  <a:pt x="5397947" y="4972859"/>
-                </a:lnTo>
-                <a:lnTo>
-                  <a:pt x="0" y="4972859"/>
-                </a:lnTo>
-                <a:lnTo>
-                  <a:pt x="0" y="0"/>
-                </a:lnTo>
-                <a:close/>
-              </a:path>
-            </a:pathLst>
-          </a:custGeom>
-          <a:blipFill>
-            <a:blip r:embed="rId4"/>
-            <a:stretch>
-              <a:fillRect/>
-            </a:stretch>
-          </a:blipFill>
-        </p:spPr>
-        <p:txBody>
-          <a:bodyPr/>
-          <a:lstStyle/>
-          <a:p>
-            <a:endParaRPr lang="es-CO"/>
-          </a:p>
-        </p:txBody>
-      </p:sp>
-      <p:sp>
-        <p:nvSpPr>
-          <p:cNvPr id="8" name="CuadroTexto 7">
-            <a:extLst>
-              <a:ext uri="{FF2B5EF4-FFF2-40B4-BE49-F238E27FC236}">
-                <a16:creationId xmlns:a16="http://schemas.microsoft.com/office/drawing/2014/main" id="{096DCFA7-361F-02A9-70F0-6BC7CADA3C28}"/>
-              </a:ext>
-            </a:extLst>
-          </p:cNvPr>
-          <p:cNvSpPr txBox="1"/>
-          <p:nvPr/>
-        </p:nvSpPr>
-        <p:spPr>
-          <a:xfrm>
-            <a:off x="2133600" y="2552700"/>
-            <a:ext cx="13674710" cy="3416320"/>
-          </a:xfrm>
-          <a:prstGeom prst="rect">
-            <a:avLst/>
-          </a:prstGeom>
-          <a:noFill/>
-        </p:spPr>
-        <p:txBody>
-          <a:bodyPr wrap="square">
-            <a:spAutoFit/>
-          </a:bodyPr>
-          <a:lstStyle/>
-          <a:p>
-            <a:r>
-              <a:rPr lang="es-MX" sz="2800" b="1" dirty="0">
-                <a:latin typeface="Poppins" panose="00000500000000000000" pitchFamily="2" charset="0"/>
-                <a:cs typeface="Poppins" panose="00000500000000000000" pitchFamily="2" charset="0"/>
-              </a:rPr>
-              <a:t>Objetivo para hoy</a:t>
-            </a:r>
-          </a:p>
-          <a:p>
-            <a:endParaRPr lang="es-MX" sz="2800" b="1" dirty="0">
-              <a:latin typeface="Poppins" panose="00000500000000000000" pitchFamily="2" charset="0"/>
-              <a:cs typeface="Poppins" panose="00000500000000000000" pitchFamily="2" charset="0"/>
-            </a:endParaRPr>
-          </a:p>
-          <a:p>
-            <a:endParaRPr lang="es-MX" sz="2800" b="1" dirty="0">
-              <a:latin typeface="Poppins" panose="00000500000000000000" pitchFamily="2" charset="0"/>
-              <a:cs typeface="Poppins" panose="00000500000000000000" pitchFamily="2" charset="0"/>
-            </a:endParaRPr>
-          </a:p>
-          <a:p>
-            <a:pPr algn="just"/>
-            <a:r>
-              <a:rPr lang="es-CO" sz="3600" noProof="0" dirty="0">
-                <a:latin typeface="Poppins" panose="00000500000000000000" pitchFamily="2" charset="0"/>
-                <a:cs typeface="Poppins" panose="00000500000000000000" pitchFamily="2" charset="0"/>
-              </a:rPr>
-              <a:t>Estudiar la ingeniería de datos como sistema complejo adaptativo y así definirla, entender su importancia y plantear como abordaremos el estudio de esta.</a:t>
-            </a:r>
-          </a:p>
-          <a:p>
-            <a:endParaRPr lang="es-MX" sz="2400" b="1" dirty="0">
-              <a:latin typeface="Poppins" panose="00000500000000000000" pitchFamily="2" charset="0"/>
-              <a:cs typeface="Poppins" panose="00000500000000000000" pitchFamily="2" charset="0"/>
-            </a:endParaRPr>
-          </a:p>
-        </p:txBody>
-      </p:sp>
-    </p:spTree>
-    <p:extLst>
-      <p:ext uri="{BB962C8B-B14F-4D97-AF65-F5344CB8AC3E}">
-        <p14:creationId xmlns:p14="http://schemas.microsoft.com/office/powerpoint/2010/main" val="1004461675"/>
-      </p:ext>
-    </p:extLst>
-  </p:cSld>
-  <p:clrMapOvr>
-    <a:masterClrMapping/>
-  </p:clrMapOvr>
-</p:sld>
-</file>
-
-<file path=ppt/slides/slide30.xml><?xml version="1.0" encoding="utf-8"?>
-<p:sld xmlns:a="http://schemas.openxmlformats.org/drawingml/2006/main" xmlns:r="http://schemas.openxmlformats.org/officeDocument/2006/relationships" xmlns:p="http://schemas.openxmlformats.org/presentationml/2006/main">
-  <p:cSld>
-    <p:spTree>
-      <p:nvGrpSpPr>
-        <p:cNvPr id="1" name="">
-          <a:extLst>
-            <a:ext uri="{FF2B5EF4-FFF2-40B4-BE49-F238E27FC236}">
-              <a16:creationId xmlns:a16="http://schemas.microsoft.com/office/drawing/2014/main" id="{C1F8FB3B-95D0-A0C2-C40D-9BAB0C219ECE}"/>
-            </a:ext>
-          </a:extLst>
-        </p:cNvPr>
-        <p:cNvGrpSpPr/>
-        <p:nvPr/>
-      </p:nvGrpSpPr>
-      <p:grpSpPr>
-        <a:xfrm>
-          <a:off x="0" y="0"/>
-          <a:ext cx="0" cy="0"/>
-          <a:chOff x="0" y="0"/>
-          <a:chExt cx="0" cy="0"/>
-        </a:xfrm>
-      </p:grpSpPr>
-      <p:sp>
-        <p:nvSpPr>
-          <p:cNvPr id="2" name="Freeform 2">
-            <a:extLst>
-              <a:ext uri="{FF2B5EF4-FFF2-40B4-BE49-F238E27FC236}">
-                <a16:creationId xmlns:a16="http://schemas.microsoft.com/office/drawing/2014/main" id="{103B4F4A-EDFF-0B90-E647-25EB8E7B8BEF}"/>
-              </a:ext>
-            </a:extLst>
-          </p:cNvPr>
-          <p:cNvSpPr/>
-          <p:nvPr/>
-        </p:nvSpPr>
-        <p:spPr>
-          <a:xfrm>
-            <a:off x="16240722" y="9245973"/>
-            <a:ext cx="1388509" cy="555404"/>
-          </a:xfrm>
-          <a:custGeom>
-            <a:avLst/>
-            <a:gdLst/>
-            <a:ahLst/>
-            <a:cxnLst/>
-            <a:rect l="l" t="t" r="r" b="b"/>
-            <a:pathLst>
-              <a:path w="1388509" h="555404">
-                <a:moveTo>
-                  <a:pt x="0" y="0"/>
-                </a:moveTo>
-                <a:lnTo>
-                  <a:pt x="1388510" y="0"/>
-                </a:lnTo>
-                <a:lnTo>
-                  <a:pt x="1388510" y="555404"/>
-                </a:lnTo>
-                <a:lnTo>
-                  <a:pt x="0" y="555404"/>
-                </a:lnTo>
-                <a:lnTo>
-                  <a:pt x="0" y="0"/>
-                </a:lnTo>
-                <a:close/>
-              </a:path>
-            </a:pathLst>
-          </a:custGeom>
-          <a:blipFill>
-            <a:blip r:embed="rId2"/>
-            <a:stretch>
-              <a:fillRect/>
-            </a:stretch>
-          </a:blipFill>
-        </p:spPr>
-        <p:txBody>
-          <a:bodyPr/>
-          <a:lstStyle/>
-          <a:p>
-            <a:endParaRPr lang="es-CO"/>
-          </a:p>
-        </p:txBody>
-      </p:sp>
-      <p:grpSp>
-        <p:nvGrpSpPr>
-          <p:cNvPr id="3" name="Group 3">
-            <a:extLst>
-              <a:ext uri="{FF2B5EF4-FFF2-40B4-BE49-F238E27FC236}">
-                <a16:creationId xmlns:a16="http://schemas.microsoft.com/office/drawing/2014/main" id="{688888A3-5F19-2CDC-7B42-8C724D988813}"/>
-              </a:ext>
-            </a:extLst>
-          </p:cNvPr>
-          <p:cNvGrpSpPr/>
-          <p:nvPr/>
-        </p:nvGrpSpPr>
-        <p:grpSpPr>
-          <a:xfrm flipV="1">
-            <a:off x="-762000" y="1516854"/>
-            <a:ext cx="8458200" cy="45719"/>
-            <a:chOff x="0" y="0"/>
-            <a:chExt cx="1495010" cy="20069"/>
-          </a:xfrm>
-        </p:grpSpPr>
-        <p:sp>
-          <p:nvSpPr>
-            <p:cNvPr id="4" name="Freeform 4">
-              <a:extLst>
-                <a:ext uri="{FF2B5EF4-FFF2-40B4-BE49-F238E27FC236}">
-                  <a16:creationId xmlns:a16="http://schemas.microsoft.com/office/drawing/2014/main" id="{5EBE2720-CB0E-5ECA-799C-4E203F21B3BA}"/>
-                </a:ext>
-              </a:extLst>
-            </p:cNvPr>
-            <p:cNvSpPr/>
-            <p:nvPr/>
-          </p:nvSpPr>
-          <p:spPr>
-            <a:xfrm>
-              <a:off x="0" y="0"/>
-              <a:ext cx="1495010" cy="20069"/>
-            </a:xfrm>
-            <a:custGeom>
-              <a:avLst/>
-              <a:gdLst/>
-              <a:ahLst/>
-              <a:cxnLst/>
-              <a:rect l="l" t="t" r="r" b="b"/>
-              <a:pathLst>
-                <a:path w="1495010" h="20069">
-                  <a:moveTo>
-                    <a:pt x="10035" y="0"/>
-                  </a:moveTo>
-                  <a:lnTo>
-                    <a:pt x="1484976" y="0"/>
-                  </a:lnTo>
-                  <a:cubicBezTo>
-                    <a:pt x="1487637" y="0"/>
-                    <a:pt x="1490189" y="1057"/>
-                    <a:pt x="1492071" y="2939"/>
-                  </a:cubicBezTo>
-                  <a:cubicBezTo>
-                    <a:pt x="1493953" y="4821"/>
-                    <a:pt x="1495010" y="7373"/>
-                    <a:pt x="1495010" y="10035"/>
-                  </a:cubicBezTo>
-                  <a:lnTo>
-                    <a:pt x="1495010" y="10035"/>
-                  </a:lnTo>
-                  <a:cubicBezTo>
-                    <a:pt x="1495010" y="12696"/>
-                    <a:pt x="1493953" y="15248"/>
-                    <a:pt x="1492071" y="17130"/>
-                  </a:cubicBezTo>
-                  <a:cubicBezTo>
-                    <a:pt x="1490189" y="19012"/>
-                    <a:pt x="1487637" y="20069"/>
-                    <a:pt x="1484976" y="20069"/>
-                  </a:cubicBezTo>
-                  <a:lnTo>
-                    <a:pt x="10035" y="20069"/>
-                  </a:lnTo>
-                  <a:cubicBezTo>
-                    <a:pt x="7373" y="20069"/>
-                    <a:pt x="4821" y="19012"/>
-                    <a:pt x="2939" y="17130"/>
-                  </a:cubicBezTo>
-                  <a:cubicBezTo>
-                    <a:pt x="1057" y="15248"/>
-                    <a:pt x="0" y="12696"/>
-                    <a:pt x="0" y="10035"/>
-                  </a:cubicBezTo>
-                  <a:lnTo>
-                    <a:pt x="0" y="10035"/>
-                  </a:lnTo>
-                  <a:cubicBezTo>
-                    <a:pt x="0" y="7373"/>
-                    <a:pt x="1057" y="4821"/>
-                    <a:pt x="2939" y="2939"/>
-                  </a:cubicBezTo>
-                  <a:cubicBezTo>
-                    <a:pt x="4821" y="1057"/>
-                    <a:pt x="7373" y="0"/>
-                    <a:pt x="10035" y="0"/>
-                  </a:cubicBezTo>
-                  <a:close/>
-                </a:path>
-              </a:pathLst>
-            </a:custGeom>
-            <a:gradFill rotWithShape="1">
-              <a:gsLst>
-                <a:gs pos="0">
-                  <a:srgbClr val="6B1374">
-                    <a:alpha val="100000"/>
-                  </a:srgbClr>
-                </a:gs>
-                <a:gs pos="33333">
-                  <a:srgbClr val="700A89">
-                    <a:alpha val="100000"/>
-                  </a:srgbClr>
-                </a:gs>
-                <a:gs pos="66667">
-                  <a:srgbClr val="C20052">
-                    <a:alpha val="100000"/>
-                  </a:srgbClr>
-                </a:gs>
-                <a:gs pos="100000">
-                  <a:srgbClr val="FF0055">
-                    <a:alpha val="100000"/>
-                  </a:srgbClr>
-                </a:gs>
-              </a:gsLst>
-              <a:lin ang="0"/>
-            </a:gradFill>
-          </p:spPr>
-          <p:txBody>
-            <a:bodyPr/>
-            <a:lstStyle/>
-            <a:p>
-              <a:endParaRPr lang="es-CO"/>
-            </a:p>
-          </p:txBody>
-        </p:sp>
-        <p:sp>
-          <p:nvSpPr>
-            <p:cNvPr id="5" name="TextBox 5">
-              <a:extLst>
-                <a:ext uri="{FF2B5EF4-FFF2-40B4-BE49-F238E27FC236}">
-                  <a16:creationId xmlns:a16="http://schemas.microsoft.com/office/drawing/2014/main" id="{4BCB53E8-5351-93C7-AD16-79648EE2598C}"/>
-                </a:ext>
-              </a:extLst>
-            </p:cNvPr>
-            <p:cNvSpPr txBox="1"/>
-            <p:nvPr/>
-          </p:nvSpPr>
-          <p:spPr>
-            <a:xfrm>
-              <a:off x="0" y="-38100"/>
-              <a:ext cx="1495010" cy="58169"/>
-            </a:xfrm>
-            <a:prstGeom prst="rect">
-              <a:avLst/>
-            </a:prstGeom>
-          </p:spPr>
-          <p:txBody>
-            <a:bodyPr lIns="50800" tIns="50800" rIns="50800" bIns="50800" rtlCol="0" anchor="ctr"/>
-            <a:lstStyle/>
-            <a:p>
-              <a:pPr algn="ctr">
-                <a:lnSpc>
-                  <a:spcPts val="2659"/>
-                </a:lnSpc>
-              </a:pPr>
-              <a:endParaRPr/>
-            </a:p>
-          </p:txBody>
-        </p:sp>
-      </p:grpSp>
-      <p:grpSp>
-        <p:nvGrpSpPr>
-          <p:cNvPr id="6" name="Group 6">
-            <a:extLst>
-              <a:ext uri="{FF2B5EF4-FFF2-40B4-BE49-F238E27FC236}">
-                <a16:creationId xmlns:a16="http://schemas.microsoft.com/office/drawing/2014/main" id="{28053F00-112F-B734-18A0-55F4360A121C}"/>
-              </a:ext>
-            </a:extLst>
-          </p:cNvPr>
-          <p:cNvGrpSpPr/>
-          <p:nvPr/>
-        </p:nvGrpSpPr>
-        <p:grpSpPr>
-          <a:xfrm>
-            <a:off x="17896105" y="0"/>
-            <a:ext cx="449045" cy="10287000"/>
-            <a:chOff x="0" y="0"/>
-            <a:chExt cx="598727" cy="13716000"/>
-          </a:xfrm>
-        </p:grpSpPr>
-        <p:grpSp>
-          <p:nvGrpSpPr>
-            <p:cNvPr id="7" name="Group 7">
-              <a:extLst>
-                <a:ext uri="{FF2B5EF4-FFF2-40B4-BE49-F238E27FC236}">
-                  <a16:creationId xmlns:a16="http://schemas.microsoft.com/office/drawing/2014/main" id="{10A196E1-4B5F-6974-70EA-83D3BEE2E590}"/>
-                </a:ext>
-              </a:extLst>
-            </p:cNvPr>
-            <p:cNvGrpSpPr/>
-            <p:nvPr/>
-          </p:nvGrpSpPr>
-          <p:grpSpPr>
-            <a:xfrm>
-              <a:off x="77114" y="0"/>
-              <a:ext cx="444500" cy="13716000"/>
-              <a:chOff x="0" y="0"/>
-              <a:chExt cx="87802" cy="2709333"/>
-            </a:xfrm>
-          </p:grpSpPr>
-          <p:sp>
-            <p:nvSpPr>
-              <p:cNvPr id="8" name="Freeform 8">
-                <a:extLst>
-                  <a:ext uri="{FF2B5EF4-FFF2-40B4-BE49-F238E27FC236}">
-                    <a16:creationId xmlns:a16="http://schemas.microsoft.com/office/drawing/2014/main" id="{C9050EF9-03B1-B8D1-5B27-C4BB58A00F7F}"/>
-                  </a:ext>
-                </a:extLst>
-              </p:cNvPr>
-              <p:cNvSpPr/>
-              <p:nvPr/>
-            </p:nvSpPr>
-            <p:spPr>
-              <a:xfrm>
-                <a:off x="0" y="0"/>
-                <a:ext cx="87802" cy="2709333"/>
-              </a:xfrm>
-              <a:custGeom>
-                <a:avLst/>
-                <a:gdLst/>
-                <a:ahLst/>
-                <a:cxnLst/>
-                <a:rect l="l" t="t" r="r" b="b"/>
-                <a:pathLst>
-                  <a:path w="87802" h="2709333">
-                    <a:moveTo>
-                      <a:pt x="0" y="0"/>
-                    </a:moveTo>
-                    <a:lnTo>
-                      <a:pt x="87802" y="0"/>
-                    </a:lnTo>
-                    <a:lnTo>
-                      <a:pt x="87802" y="2709333"/>
-                    </a:lnTo>
-                    <a:lnTo>
-                      <a:pt x="0" y="2709333"/>
-                    </a:lnTo>
-                    <a:close/>
-                  </a:path>
-                </a:pathLst>
-              </a:custGeom>
-              <a:gradFill rotWithShape="1">
-                <a:gsLst>
-                  <a:gs pos="0">
-                    <a:srgbClr val="6B1374">
-                      <a:alpha val="100000"/>
-                    </a:srgbClr>
-                  </a:gs>
-                  <a:gs pos="33333">
-                    <a:srgbClr val="700A89">
-                      <a:alpha val="100000"/>
-                    </a:srgbClr>
-                  </a:gs>
-                  <a:gs pos="66667">
-                    <a:srgbClr val="C20052">
-                      <a:alpha val="100000"/>
-                    </a:srgbClr>
-                  </a:gs>
-                  <a:gs pos="100000">
-                    <a:srgbClr val="FF0055">
-                      <a:alpha val="100000"/>
-                    </a:srgbClr>
-                  </a:gs>
-                </a:gsLst>
-                <a:lin ang="5400000"/>
-              </a:gradFill>
-            </p:spPr>
-            <p:txBody>
-              <a:bodyPr/>
-              <a:lstStyle/>
-              <a:p>
-                <a:endParaRPr lang="es-CO"/>
-              </a:p>
-            </p:txBody>
-          </p:sp>
-          <p:sp>
-            <p:nvSpPr>
-              <p:cNvPr id="9" name="TextBox 9">
-                <a:extLst>
-                  <a:ext uri="{FF2B5EF4-FFF2-40B4-BE49-F238E27FC236}">
-                    <a16:creationId xmlns:a16="http://schemas.microsoft.com/office/drawing/2014/main" id="{4809C166-F0F1-D151-409A-F90BF0D906E2}"/>
-                  </a:ext>
-                </a:extLst>
-              </p:cNvPr>
-              <p:cNvSpPr txBox="1"/>
-              <p:nvPr/>
-            </p:nvSpPr>
-            <p:spPr>
-              <a:xfrm>
-                <a:off x="0" y="-38100"/>
-                <a:ext cx="87802" cy="2747433"/>
-              </a:xfrm>
-              <a:prstGeom prst="rect">
-                <a:avLst/>
-              </a:prstGeom>
-            </p:spPr>
-            <p:txBody>
-              <a:bodyPr lIns="50800" tIns="50800" rIns="50800" bIns="50800" rtlCol="0" anchor="ctr"/>
-              <a:lstStyle/>
-              <a:p>
-                <a:pPr algn="ctr">
-                  <a:lnSpc>
-                    <a:spcPts val="2659"/>
-                  </a:lnSpc>
-                </a:pPr>
-                <a:endParaRPr/>
-              </a:p>
-            </p:txBody>
-          </p:sp>
-        </p:grpSp>
-        <p:sp>
-          <p:nvSpPr>
-            <p:cNvPr id="10" name="Freeform 10">
-              <a:extLst>
-                <a:ext uri="{FF2B5EF4-FFF2-40B4-BE49-F238E27FC236}">
-                  <a16:creationId xmlns:a16="http://schemas.microsoft.com/office/drawing/2014/main" id="{31387179-1319-4ABC-DEB3-62A0A5ED2A98}"/>
-                </a:ext>
-              </a:extLst>
-            </p:cNvPr>
-            <p:cNvSpPr/>
-            <p:nvPr/>
-          </p:nvSpPr>
-          <p:spPr>
-            <a:xfrm>
-              <a:off x="22810" y="1020609"/>
-              <a:ext cx="553108" cy="542737"/>
-            </a:xfrm>
-            <a:custGeom>
-              <a:avLst/>
-              <a:gdLst/>
-              <a:ahLst/>
-              <a:cxnLst/>
-              <a:rect l="l" t="t" r="r" b="b"/>
-              <a:pathLst>
-                <a:path w="553108" h="542737">
-                  <a:moveTo>
-                    <a:pt x="0" y="0"/>
-                  </a:moveTo>
-                  <a:lnTo>
-                    <a:pt x="553108" y="0"/>
-                  </a:lnTo>
-                  <a:lnTo>
-                    <a:pt x="553108" y="542737"/>
-                  </a:lnTo>
-                  <a:lnTo>
-                    <a:pt x="0" y="542737"/>
-                  </a:lnTo>
-                  <a:lnTo>
-                    <a:pt x="0" y="0"/>
-                  </a:lnTo>
-                  <a:close/>
-                </a:path>
-              </a:pathLst>
-            </a:custGeom>
-            <a:blipFill>
-              <a:blip r:embed="rId3">
-                <a:extLst>
-                  <a:ext uri="{96DAC541-7B7A-43D3-8B79-37D633B846F1}">
-                    <asvg:svgBlip xmlns:asvg="http://schemas.microsoft.com/office/drawing/2016/SVG/main" r:embed="rId4"/>
-                  </a:ext>
-                </a:extLst>
-              </a:blip>
-              <a:stretch>
-                <a:fillRect/>
-              </a:stretch>
-            </a:blipFill>
-          </p:spPr>
-          <p:txBody>
-            <a:bodyPr/>
-            <a:lstStyle/>
-            <a:p>
-              <a:endParaRPr lang="es-CO"/>
-            </a:p>
-          </p:txBody>
-        </p:sp>
-        <p:sp>
-          <p:nvSpPr>
-            <p:cNvPr id="11" name="Freeform 11">
-              <a:extLst>
-                <a:ext uri="{FF2B5EF4-FFF2-40B4-BE49-F238E27FC236}">
-                  <a16:creationId xmlns:a16="http://schemas.microsoft.com/office/drawing/2014/main" id="{B4469292-5E33-6B6C-CBFC-33AA4BFA3690}"/>
-                </a:ext>
-              </a:extLst>
-            </p:cNvPr>
-            <p:cNvSpPr/>
-            <p:nvPr/>
-          </p:nvSpPr>
-          <p:spPr>
-            <a:xfrm rot="-10800000">
-              <a:off x="22810" y="102655"/>
-              <a:ext cx="553108" cy="542737"/>
-            </a:xfrm>
-            <a:custGeom>
-              <a:avLst/>
-              <a:gdLst/>
-              <a:ahLst/>
-              <a:cxnLst/>
-              <a:rect l="l" t="t" r="r" b="b"/>
-              <a:pathLst>
-                <a:path w="553108" h="542737">
-                  <a:moveTo>
-                    <a:pt x="0" y="0"/>
-                  </a:moveTo>
-                  <a:lnTo>
-                    <a:pt x="553108" y="0"/>
-                  </a:lnTo>
-                  <a:lnTo>
-                    <a:pt x="553108" y="542737"/>
-                  </a:lnTo>
-                  <a:lnTo>
-                    <a:pt x="0" y="542737"/>
-                  </a:lnTo>
-                  <a:lnTo>
-                    <a:pt x="0" y="0"/>
-                  </a:lnTo>
-                  <a:close/>
-                </a:path>
-              </a:pathLst>
-            </a:custGeom>
-            <a:blipFill>
-              <a:blip r:embed="rId3">
-                <a:extLst>
-                  <a:ext uri="{96DAC541-7B7A-43D3-8B79-37D633B846F1}">
-                    <asvg:svgBlip xmlns:asvg="http://schemas.microsoft.com/office/drawing/2016/SVG/main" r:embed="rId4"/>
-                  </a:ext>
-                </a:extLst>
-              </a:blip>
-              <a:stretch>
-                <a:fillRect/>
-              </a:stretch>
-            </a:blipFill>
-          </p:spPr>
-          <p:txBody>
-            <a:bodyPr/>
-            <a:lstStyle/>
-            <a:p>
-              <a:endParaRPr lang="es-CO"/>
-            </a:p>
-          </p:txBody>
-        </p:sp>
-        <p:grpSp>
-          <p:nvGrpSpPr>
-            <p:cNvPr id="12" name="Group 12">
-              <a:extLst>
-                <a:ext uri="{FF2B5EF4-FFF2-40B4-BE49-F238E27FC236}">
-                  <a16:creationId xmlns:a16="http://schemas.microsoft.com/office/drawing/2014/main" id="{560E4F73-7C45-8DB2-4FD0-A469EC714CF7}"/>
-                </a:ext>
-              </a:extLst>
-            </p:cNvPr>
-            <p:cNvGrpSpPr/>
-            <p:nvPr/>
-          </p:nvGrpSpPr>
-          <p:grpSpPr>
-            <a:xfrm rot="1460314">
-              <a:off x="1518" y="765089"/>
-              <a:ext cx="595692" cy="135824"/>
-              <a:chOff x="0" y="0"/>
-              <a:chExt cx="1355149" cy="308989"/>
-            </a:xfrm>
-          </p:grpSpPr>
-          <p:sp>
-            <p:nvSpPr>
-              <p:cNvPr id="13" name="Freeform 13">
-                <a:extLst>
-                  <a:ext uri="{FF2B5EF4-FFF2-40B4-BE49-F238E27FC236}">
-                    <a16:creationId xmlns:a16="http://schemas.microsoft.com/office/drawing/2014/main" id="{31811B8D-5329-DDC9-2940-6B960DD7AB42}"/>
-                  </a:ext>
-                </a:extLst>
-              </p:cNvPr>
-              <p:cNvSpPr/>
-              <p:nvPr/>
-            </p:nvSpPr>
-            <p:spPr>
-              <a:xfrm>
-                <a:off x="0" y="0"/>
-                <a:ext cx="1355149" cy="308989"/>
-              </a:xfrm>
-              <a:custGeom>
-                <a:avLst/>
-                <a:gdLst/>
-                <a:ahLst/>
-                <a:cxnLst/>
-                <a:rect l="l" t="t" r="r" b="b"/>
-                <a:pathLst>
-                  <a:path w="1355149" h="308989">
-                    <a:moveTo>
-                      <a:pt x="154494" y="0"/>
-                    </a:moveTo>
-                    <a:lnTo>
-                      <a:pt x="1200655" y="0"/>
-                    </a:lnTo>
-                    <a:cubicBezTo>
-                      <a:pt x="1241629" y="0"/>
-                      <a:pt x="1280926" y="16277"/>
-                      <a:pt x="1309899" y="45250"/>
-                    </a:cubicBezTo>
-                    <a:cubicBezTo>
-                      <a:pt x="1338872" y="74224"/>
-                      <a:pt x="1355149" y="113520"/>
-                      <a:pt x="1355149" y="154494"/>
-                    </a:cubicBezTo>
-                    <a:lnTo>
-                      <a:pt x="1355149" y="154494"/>
-                    </a:lnTo>
-                    <a:cubicBezTo>
-                      <a:pt x="1355149" y="239819"/>
-                      <a:pt x="1285980" y="308989"/>
-                      <a:pt x="1200655" y="308989"/>
-                    </a:cubicBezTo>
-                    <a:lnTo>
-                      <a:pt x="154494" y="308989"/>
-                    </a:lnTo>
-                    <a:cubicBezTo>
-                      <a:pt x="113520" y="308989"/>
-                      <a:pt x="74224" y="292712"/>
-                      <a:pt x="45250" y="263738"/>
-                    </a:cubicBezTo>
-                    <a:cubicBezTo>
-                      <a:pt x="16277" y="234765"/>
-                      <a:pt x="0" y="195469"/>
-                      <a:pt x="0" y="154494"/>
-                    </a:cubicBezTo>
-                    <a:lnTo>
-                      <a:pt x="0" y="154494"/>
-                    </a:lnTo>
-                    <a:cubicBezTo>
-                      <a:pt x="0" y="113520"/>
-                      <a:pt x="16277" y="74224"/>
-                      <a:pt x="45250" y="45250"/>
-                    </a:cubicBezTo>
-                    <a:cubicBezTo>
-                      <a:pt x="74224" y="16277"/>
-                      <a:pt x="113520" y="0"/>
-                      <a:pt x="154494" y="0"/>
-                    </a:cubicBezTo>
-                    <a:close/>
-                  </a:path>
-                </a:pathLst>
-              </a:custGeom>
-              <a:solidFill>
-                <a:srgbClr val="FFFFFF"/>
-              </a:solidFill>
-            </p:spPr>
-            <p:txBody>
-              <a:bodyPr/>
-              <a:lstStyle/>
-              <a:p>
-                <a:endParaRPr lang="es-CO"/>
-              </a:p>
-            </p:txBody>
-          </p:sp>
-          <p:sp>
-            <p:nvSpPr>
-              <p:cNvPr id="14" name="TextBox 14">
-                <a:extLst>
-                  <a:ext uri="{FF2B5EF4-FFF2-40B4-BE49-F238E27FC236}">
-                    <a16:creationId xmlns:a16="http://schemas.microsoft.com/office/drawing/2014/main" id="{CF85E6DB-8B2B-D04E-A38C-4B962FAE3FB0}"/>
-                  </a:ext>
-                </a:extLst>
-              </p:cNvPr>
-              <p:cNvSpPr txBox="1"/>
-              <p:nvPr/>
-            </p:nvSpPr>
-            <p:spPr>
-              <a:xfrm>
-                <a:off x="0" y="-38100"/>
-                <a:ext cx="1355149" cy="347089"/>
-              </a:xfrm>
-              <a:prstGeom prst="rect">
-                <a:avLst/>
-              </a:prstGeom>
-            </p:spPr>
-            <p:txBody>
-              <a:bodyPr lIns="50800" tIns="50800" rIns="50800" bIns="50800" rtlCol="0" anchor="ctr"/>
-              <a:lstStyle/>
-              <a:p>
-                <a:pPr algn="ctr">
-                  <a:lnSpc>
-                    <a:spcPts val="2659"/>
-                  </a:lnSpc>
-                </a:pPr>
-                <a:endParaRPr/>
-              </a:p>
-            </p:txBody>
-          </p:sp>
-        </p:grpSp>
-      </p:grpSp>
-    </p:spTree>
-    <p:extLst>
-      <p:ext uri="{BB962C8B-B14F-4D97-AF65-F5344CB8AC3E}">
-        <p14:creationId xmlns:p14="http://schemas.microsoft.com/office/powerpoint/2010/main" val="852940654"/>
-      </p:ext>
-    </p:extLst>
-  </p:cSld>
-  <p:clrMapOvr>
-    <a:masterClrMapping/>
-  </p:clrMapOvr>
-</p:sld>
-</file>
-
-<file path=ppt/slides/slide31.xml><?xml version="1.0" encoding="utf-8"?>
+<file path=ppt/slides/slide25.xml><?xml version="1.0" encoding="utf-8"?>
 <p:sld xmlns:a="http://schemas.openxmlformats.org/drawingml/2006/main" xmlns:r="http://schemas.openxmlformats.org/officeDocument/2006/relationships" xmlns:p="http://schemas.openxmlformats.org/presentationml/2006/main">
   <p:cSld>
     <p:spTree>
@@ -26337,7 +21701,7 @@
 </p:sld>
 </file>
 
-<file path=ppt/slides/slide32.xml><?xml version="1.0" encoding="utf-8"?>
+<file path=ppt/slides/slide26.xml><?xml version="1.0" encoding="utf-8"?>
 <p:sld xmlns:a="http://schemas.openxmlformats.org/drawingml/2006/main" xmlns:r="http://schemas.openxmlformats.org/officeDocument/2006/relationships" xmlns:p="http://schemas.openxmlformats.org/presentationml/2006/main" show="0">
   <p:cSld>
     <p:spTree>
@@ -26407,652 +21771,7 @@
 </p:sld>
 </file>
 
-<file path=ppt/slides/slide4.xml><?xml version="1.0" encoding="utf-8"?>
-<p:sld xmlns:a="http://schemas.openxmlformats.org/drawingml/2006/main" xmlns:r="http://schemas.openxmlformats.org/officeDocument/2006/relationships" xmlns:p="http://schemas.openxmlformats.org/presentationml/2006/main">
-  <p:cSld>
-    <p:spTree>
-      <p:nvGrpSpPr>
-        <p:cNvPr id="1" name="">
-          <a:extLst>
-            <a:ext uri="{FF2B5EF4-FFF2-40B4-BE49-F238E27FC236}">
-              <a16:creationId xmlns:a16="http://schemas.microsoft.com/office/drawing/2014/main" id="{324F57EA-AB2A-D230-8269-26A12105E4DB}"/>
-            </a:ext>
-          </a:extLst>
-        </p:cNvPr>
-        <p:cNvGrpSpPr/>
-        <p:nvPr/>
-      </p:nvGrpSpPr>
-      <p:grpSpPr>
-        <a:xfrm>
-          <a:off x="0" y="0"/>
-          <a:ext cx="0" cy="0"/>
-          <a:chOff x="0" y="0"/>
-          <a:chExt cx="0" cy="0"/>
-        </a:xfrm>
-      </p:grpSpPr>
-      <p:grpSp>
-        <p:nvGrpSpPr>
-          <p:cNvPr id="3" name="Group 3">
-            <a:extLst>
-              <a:ext uri="{FF2B5EF4-FFF2-40B4-BE49-F238E27FC236}">
-                <a16:creationId xmlns:a16="http://schemas.microsoft.com/office/drawing/2014/main" id="{763BEABA-6A1E-0588-6E8E-B829C74E8AAA}"/>
-              </a:ext>
-            </a:extLst>
-          </p:cNvPr>
-          <p:cNvGrpSpPr/>
-          <p:nvPr/>
-        </p:nvGrpSpPr>
-        <p:grpSpPr>
-          <a:xfrm rot="-10800000">
-            <a:off x="10392303" y="0"/>
-            <a:ext cx="7895697" cy="10287000"/>
-            <a:chOff x="0" y="0"/>
-            <a:chExt cx="2079525" cy="2709333"/>
-          </a:xfrm>
-        </p:grpSpPr>
-        <p:sp>
-          <p:nvSpPr>
-            <p:cNvPr id="4" name="Freeform 4">
-              <a:extLst>
-                <a:ext uri="{FF2B5EF4-FFF2-40B4-BE49-F238E27FC236}">
-                  <a16:creationId xmlns:a16="http://schemas.microsoft.com/office/drawing/2014/main" id="{74725FA9-DB41-09A5-DF03-37153937910A}"/>
-                </a:ext>
-              </a:extLst>
-            </p:cNvPr>
-            <p:cNvSpPr/>
-            <p:nvPr/>
-          </p:nvSpPr>
-          <p:spPr>
-            <a:xfrm>
-              <a:off x="0" y="0"/>
-              <a:ext cx="2079525" cy="2709333"/>
-            </a:xfrm>
-            <a:custGeom>
-              <a:avLst/>
-              <a:gdLst/>
-              <a:ahLst/>
-              <a:cxnLst/>
-              <a:rect l="l" t="t" r="r" b="b"/>
-              <a:pathLst>
-                <a:path w="2079525" h="2709333">
-                  <a:moveTo>
-                    <a:pt x="0" y="0"/>
-                  </a:moveTo>
-                  <a:lnTo>
-                    <a:pt x="2079525" y="0"/>
-                  </a:lnTo>
-                  <a:lnTo>
-                    <a:pt x="2079525" y="2709333"/>
-                  </a:lnTo>
-                  <a:lnTo>
-                    <a:pt x="0" y="2709333"/>
-                  </a:lnTo>
-                  <a:close/>
-                </a:path>
-              </a:pathLst>
-            </a:custGeom>
-            <a:gradFill rotWithShape="1">
-              <a:gsLst>
-                <a:gs pos="0">
-                  <a:srgbClr val="6B1374">
-                    <a:alpha val="100000"/>
-                  </a:srgbClr>
-                </a:gs>
-                <a:gs pos="33333">
-                  <a:srgbClr val="700A89">
-                    <a:alpha val="100000"/>
-                  </a:srgbClr>
-                </a:gs>
-                <a:gs pos="66667">
-                  <a:srgbClr val="C20052">
-                    <a:alpha val="100000"/>
-                  </a:srgbClr>
-                </a:gs>
-                <a:gs pos="100000">
-                  <a:srgbClr val="FF0055">
-                    <a:alpha val="100000"/>
-                  </a:srgbClr>
-                </a:gs>
-              </a:gsLst>
-              <a:lin ang="5400000"/>
-            </a:gradFill>
-          </p:spPr>
-          <p:txBody>
-            <a:bodyPr/>
-            <a:lstStyle/>
-            <a:p>
-              <a:endParaRPr lang="es-CO"/>
-            </a:p>
-          </p:txBody>
-        </p:sp>
-        <p:sp>
-          <p:nvSpPr>
-            <p:cNvPr id="5" name="TextBox 5">
-              <a:extLst>
-                <a:ext uri="{FF2B5EF4-FFF2-40B4-BE49-F238E27FC236}">
-                  <a16:creationId xmlns:a16="http://schemas.microsoft.com/office/drawing/2014/main" id="{912FEF42-0636-3E17-8A6D-0E140C7E4274}"/>
-                </a:ext>
-              </a:extLst>
-            </p:cNvPr>
-            <p:cNvSpPr txBox="1"/>
-            <p:nvPr/>
-          </p:nvSpPr>
-          <p:spPr>
-            <a:xfrm>
-              <a:off x="0" y="-38100"/>
-              <a:ext cx="2079525" cy="2747433"/>
-            </a:xfrm>
-            <a:prstGeom prst="rect">
-              <a:avLst/>
-            </a:prstGeom>
-          </p:spPr>
-          <p:txBody>
-            <a:bodyPr lIns="50800" tIns="50800" rIns="50800" bIns="50800" rtlCol="0" anchor="ctr"/>
-            <a:lstStyle/>
-            <a:p>
-              <a:pPr algn="ctr">
-                <a:lnSpc>
-                  <a:spcPts val="2659"/>
-                </a:lnSpc>
-                <a:spcBef>
-                  <a:spcPct val="0"/>
-                </a:spcBef>
-              </a:pPr>
-              <a:endParaRPr/>
-            </a:p>
-          </p:txBody>
-        </p:sp>
-      </p:grpSp>
-      <p:sp>
-        <p:nvSpPr>
-          <p:cNvPr id="6" name="Freeform 6">
-            <a:extLst>
-              <a:ext uri="{FF2B5EF4-FFF2-40B4-BE49-F238E27FC236}">
-                <a16:creationId xmlns:a16="http://schemas.microsoft.com/office/drawing/2014/main" id="{70C63301-6F78-06FB-FAD1-BFAE730F4912}"/>
-              </a:ext>
-            </a:extLst>
-          </p:cNvPr>
-          <p:cNvSpPr/>
-          <p:nvPr/>
-        </p:nvSpPr>
-        <p:spPr>
-          <a:xfrm>
-            <a:off x="9562641" y="4953536"/>
-            <a:ext cx="4777510" cy="4687932"/>
-          </a:xfrm>
-          <a:custGeom>
-            <a:avLst/>
-            <a:gdLst/>
-            <a:ahLst/>
-            <a:cxnLst/>
-            <a:rect l="l" t="t" r="r" b="b"/>
-            <a:pathLst>
-              <a:path w="4777510" h="4687932">
-                <a:moveTo>
-                  <a:pt x="0" y="0"/>
-                </a:moveTo>
-                <a:lnTo>
-                  <a:pt x="4777511" y="0"/>
-                </a:lnTo>
-                <a:lnTo>
-                  <a:pt x="4777511" y="4687932"/>
-                </a:lnTo>
-                <a:lnTo>
-                  <a:pt x="0" y="4687932"/>
-                </a:lnTo>
-                <a:lnTo>
-                  <a:pt x="0" y="0"/>
-                </a:lnTo>
-                <a:close/>
-              </a:path>
-            </a:pathLst>
-          </a:custGeom>
-          <a:blipFill>
-            <a:blip r:embed="rId2">
-              <a:extLst>
-                <a:ext uri="{96DAC541-7B7A-43D3-8B79-37D633B846F1}">
-                  <asvg:svgBlip xmlns:asvg="http://schemas.microsoft.com/office/drawing/2016/SVG/main" r:embed="rId3"/>
-                </a:ext>
-              </a:extLst>
-            </a:blip>
-            <a:stretch>
-              <a:fillRect/>
-            </a:stretch>
-          </a:blipFill>
-        </p:spPr>
-        <p:txBody>
-          <a:bodyPr/>
-          <a:lstStyle/>
-          <a:p>
-            <a:endParaRPr lang="es-CO"/>
-          </a:p>
-        </p:txBody>
-      </p:sp>
-      <p:sp>
-        <p:nvSpPr>
-          <p:cNvPr id="7" name="Freeform 7">
-            <a:extLst>
-              <a:ext uri="{FF2B5EF4-FFF2-40B4-BE49-F238E27FC236}">
-                <a16:creationId xmlns:a16="http://schemas.microsoft.com/office/drawing/2014/main" id="{52FFCCEB-96B9-EDFB-AFD6-2797FA7C98E5}"/>
-              </a:ext>
-            </a:extLst>
-          </p:cNvPr>
-          <p:cNvSpPr/>
-          <p:nvPr/>
-        </p:nvSpPr>
-        <p:spPr>
-          <a:xfrm rot="-10800000">
-            <a:off x="14340152" y="455568"/>
-            <a:ext cx="4777510" cy="4687932"/>
-          </a:xfrm>
-          <a:custGeom>
-            <a:avLst/>
-            <a:gdLst/>
-            <a:ahLst/>
-            <a:cxnLst/>
-            <a:rect l="l" t="t" r="r" b="b"/>
-            <a:pathLst>
-              <a:path w="4777510" h="4687932">
-                <a:moveTo>
-                  <a:pt x="0" y="0"/>
-                </a:moveTo>
-                <a:lnTo>
-                  <a:pt x="4777510" y="0"/>
-                </a:lnTo>
-                <a:lnTo>
-                  <a:pt x="4777510" y="4687932"/>
-                </a:lnTo>
-                <a:lnTo>
-                  <a:pt x="0" y="4687932"/>
-                </a:lnTo>
-                <a:lnTo>
-                  <a:pt x="0" y="0"/>
-                </a:lnTo>
-                <a:close/>
-              </a:path>
-            </a:pathLst>
-          </a:custGeom>
-          <a:blipFill>
-            <a:blip r:embed="rId2">
-              <a:extLst>
-                <a:ext uri="{96DAC541-7B7A-43D3-8B79-37D633B846F1}">
-                  <asvg:svgBlip xmlns:asvg="http://schemas.microsoft.com/office/drawing/2016/SVG/main" r:embed="rId3"/>
-                </a:ext>
-              </a:extLst>
-            </a:blip>
-            <a:stretch>
-              <a:fillRect/>
-            </a:stretch>
-          </a:blipFill>
-        </p:spPr>
-        <p:txBody>
-          <a:bodyPr/>
-          <a:lstStyle/>
-          <a:p>
-            <a:endParaRPr lang="es-CO"/>
-          </a:p>
-        </p:txBody>
-      </p:sp>
-      <p:grpSp>
-        <p:nvGrpSpPr>
-          <p:cNvPr id="8" name="Group 8">
-            <a:extLst>
-              <a:ext uri="{FF2B5EF4-FFF2-40B4-BE49-F238E27FC236}">
-                <a16:creationId xmlns:a16="http://schemas.microsoft.com/office/drawing/2014/main" id="{62AE8F99-2121-ACCC-DE87-9D8E38E2B656}"/>
-              </a:ext>
-            </a:extLst>
-          </p:cNvPr>
-          <p:cNvGrpSpPr/>
-          <p:nvPr/>
-        </p:nvGrpSpPr>
-        <p:grpSpPr>
-          <a:xfrm rot="1460314">
-            <a:off x="10661875" y="4518938"/>
-            <a:ext cx="7356554" cy="1249125"/>
-            <a:chOff x="0" y="0"/>
-            <a:chExt cx="1937529" cy="328988"/>
-          </a:xfrm>
-        </p:grpSpPr>
-        <p:sp>
-          <p:nvSpPr>
-            <p:cNvPr id="9" name="Freeform 9">
-              <a:extLst>
-                <a:ext uri="{FF2B5EF4-FFF2-40B4-BE49-F238E27FC236}">
-                  <a16:creationId xmlns:a16="http://schemas.microsoft.com/office/drawing/2014/main" id="{137C37D5-46E2-C18B-B79F-62EFE65E0F7C}"/>
-                </a:ext>
-              </a:extLst>
-            </p:cNvPr>
-            <p:cNvSpPr/>
-            <p:nvPr/>
-          </p:nvSpPr>
-          <p:spPr>
-            <a:xfrm>
-              <a:off x="0" y="0"/>
-              <a:ext cx="1937528" cy="328988"/>
-            </a:xfrm>
-            <a:custGeom>
-              <a:avLst/>
-              <a:gdLst/>
-              <a:ahLst/>
-              <a:cxnLst/>
-              <a:rect l="l" t="t" r="r" b="b"/>
-              <a:pathLst>
-                <a:path w="1937528" h="328988">
-                  <a:moveTo>
-                    <a:pt x="105238" y="0"/>
-                  </a:moveTo>
-                  <a:lnTo>
-                    <a:pt x="1832290" y="0"/>
-                  </a:lnTo>
-                  <a:cubicBezTo>
-                    <a:pt x="1860201" y="0"/>
-                    <a:pt x="1886969" y="11088"/>
-                    <a:pt x="1906705" y="30824"/>
-                  </a:cubicBezTo>
-                  <a:cubicBezTo>
-                    <a:pt x="1926441" y="50560"/>
-                    <a:pt x="1937528" y="77327"/>
-                    <a:pt x="1937528" y="105238"/>
-                  </a:cubicBezTo>
-                  <a:lnTo>
-                    <a:pt x="1937528" y="223749"/>
-                  </a:lnTo>
-                  <a:cubicBezTo>
-                    <a:pt x="1937528" y="281871"/>
-                    <a:pt x="1890412" y="328988"/>
-                    <a:pt x="1832290" y="328988"/>
-                  </a:cubicBezTo>
-                  <a:lnTo>
-                    <a:pt x="105238" y="328988"/>
-                  </a:lnTo>
-                  <a:cubicBezTo>
-                    <a:pt x="77327" y="328988"/>
-                    <a:pt x="50560" y="317900"/>
-                    <a:pt x="30824" y="298164"/>
-                  </a:cubicBezTo>
-                  <a:cubicBezTo>
-                    <a:pt x="11088" y="278428"/>
-                    <a:pt x="0" y="251660"/>
-                    <a:pt x="0" y="223749"/>
-                  </a:cubicBezTo>
-                  <a:lnTo>
-                    <a:pt x="0" y="105238"/>
-                  </a:lnTo>
-                  <a:cubicBezTo>
-                    <a:pt x="0" y="47117"/>
-                    <a:pt x="47117" y="0"/>
-                    <a:pt x="105238" y="0"/>
-                  </a:cubicBezTo>
-                  <a:close/>
-                </a:path>
-              </a:pathLst>
-            </a:custGeom>
-            <a:solidFill>
-              <a:srgbClr val="FFFFFF"/>
-            </a:solidFill>
-          </p:spPr>
-          <p:txBody>
-            <a:bodyPr/>
-            <a:lstStyle/>
-            <a:p>
-              <a:endParaRPr lang="es-CO"/>
-            </a:p>
-          </p:txBody>
-        </p:sp>
-        <p:sp>
-          <p:nvSpPr>
-            <p:cNvPr id="10" name="TextBox 10">
-              <a:extLst>
-                <a:ext uri="{FF2B5EF4-FFF2-40B4-BE49-F238E27FC236}">
-                  <a16:creationId xmlns:a16="http://schemas.microsoft.com/office/drawing/2014/main" id="{927D3582-B0C4-6E41-AA2D-FD73D127DDD6}"/>
-                </a:ext>
-              </a:extLst>
-            </p:cNvPr>
-            <p:cNvSpPr txBox="1"/>
-            <p:nvPr/>
-          </p:nvSpPr>
-          <p:spPr>
-            <a:xfrm>
-              <a:off x="0" y="-38100"/>
-              <a:ext cx="1937529" cy="367088"/>
-            </a:xfrm>
-            <a:prstGeom prst="rect">
-              <a:avLst/>
-            </a:prstGeom>
-          </p:spPr>
-          <p:txBody>
-            <a:bodyPr lIns="50800" tIns="50800" rIns="50800" bIns="50800" rtlCol="0" anchor="ctr"/>
-            <a:lstStyle/>
-            <a:p>
-              <a:pPr algn="ctr">
-                <a:lnSpc>
-                  <a:spcPts val="2659"/>
-                </a:lnSpc>
-              </a:pPr>
-              <a:endParaRPr/>
-            </a:p>
-          </p:txBody>
-        </p:sp>
-      </p:grpSp>
-      <p:grpSp>
-        <p:nvGrpSpPr>
-          <p:cNvPr id="11" name="Group 11">
-            <a:extLst>
-              <a:ext uri="{FF2B5EF4-FFF2-40B4-BE49-F238E27FC236}">
-                <a16:creationId xmlns:a16="http://schemas.microsoft.com/office/drawing/2014/main" id="{D7A6C202-C67A-41DC-7499-D28D188D03E6}"/>
-              </a:ext>
-            </a:extLst>
-          </p:cNvPr>
-          <p:cNvGrpSpPr/>
-          <p:nvPr/>
-        </p:nvGrpSpPr>
-        <p:grpSpPr>
-          <a:xfrm rot="-10800000">
-            <a:off x="-536257" y="9574006"/>
-            <a:ext cx="8704391" cy="134923"/>
-            <a:chOff x="0" y="0"/>
-            <a:chExt cx="2292514" cy="35535"/>
-          </a:xfrm>
-        </p:grpSpPr>
-        <p:sp>
-          <p:nvSpPr>
-            <p:cNvPr id="12" name="Freeform 12">
-              <a:extLst>
-                <a:ext uri="{FF2B5EF4-FFF2-40B4-BE49-F238E27FC236}">
-                  <a16:creationId xmlns:a16="http://schemas.microsoft.com/office/drawing/2014/main" id="{D0807688-3D2E-8BBD-9C7C-BB692B82F405}"/>
-                </a:ext>
-              </a:extLst>
-            </p:cNvPr>
-            <p:cNvSpPr/>
-            <p:nvPr/>
-          </p:nvSpPr>
-          <p:spPr>
-            <a:xfrm>
-              <a:off x="0" y="0"/>
-              <a:ext cx="2292515" cy="35535"/>
-            </a:xfrm>
-            <a:custGeom>
-              <a:avLst/>
-              <a:gdLst/>
-              <a:ahLst/>
-              <a:cxnLst/>
-              <a:rect l="l" t="t" r="r" b="b"/>
-              <a:pathLst>
-                <a:path w="2292515" h="35535">
-                  <a:moveTo>
-                    <a:pt x="17768" y="0"/>
-                  </a:moveTo>
-                  <a:lnTo>
-                    <a:pt x="2274747" y="0"/>
-                  </a:lnTo>
-                  <a:cubicBezTo>
-                    <a:pt x="2284560" y="0"/>
-                    <a:pt x="2292515" y="7955"/>
-                    <a:pt x="2292515" y="17768"/>
-                  </a:cubicBezTo>
-                  <a:lnTo>
-                    <a:pt x="2292515" y="17768"/>
-                  </a:lnTo>
-                  <a:cubicBezTo>
-                    <a:pt x="2292515" y="22480"/>
-                    <a:pt x="2290643" y="26999"/>
-                    <a:pt x="2287311" y="30331"/>
-                  </a:cubicBezTo>
-                  <a:cubicBezTo>
-                    <a:pt x="2283978" y="33663"/>
-                    <a:pt x="2279459" y="35535"/>
-                    <a:pt x="2274747" y="35535"/>
-                  </a:cubicBezTo>
-                  <a:lnTo>
-                    <a:pt x="17768" y="35535"/>
-                  </a:lnTo>
-                  <a:cubicBezTo>
-                    <a:pt x="13055" y="35535"/>
-                    <a:pt x="8536" y="33663"/>
-                    <a:pt x="5204" y="30331"/>
-                  </a:cubicBezTo>
-                  <a:cubicBezTo>
-                    <a:pt x="1872" y="26999"/>
-                    <a:pt x="0" y="22480"/>
-                    <a:pt x="0" y="17768"/>
-                  </a:cubicBezTo>
-                  <a:lnTo>
-                    <a:pt x="0" y="17768"/>
-                  </a:lnTo>
-                  <a:cubicBezTo>
-                    <a:pt x="0" y="13055"/>
-                    <a:pt x="1872" y="8536"/>
-                    <a:pt x="5204" y="5204"/>
-                  </a:cubicBezTo>
-                  <a:cubicBezTo>
-                    <a:pt x="8536" y="1872"/>
-                    <a:pt x="13055" y="0"/>
-                    <a:pt x="17768" y="0"/>
-                  </a:cubicBezTo>
-                  <a:close/>
-                </a:path>
-              </a:pathLst>
-            </a:custGeom>
-            <a:gradFill rotWithShape="1">
-              <a:gsLst>
-                <a:gs pos="0">
-                  <a:srgbClr val="6B1374">
-                    <a:alpha val="100000"/>
-                  </a:srgbClr>
-                </a:gs>
-                <a:gs pos="33333">
-                  <a:srgbClr val="700A89">
-                    <a:alpha val="100000"/>
-                  </a:srgbClr>
-                </a:gs>
-                <a:gs pos="66667">
-                  <a:srgbClr val="C20052">
-                    <a:alpha val="100000"/>
-                  </a:srgbClr>
-                </a:gs>
-                <a:gs pos="100000">
-                  <a:srgbClr val="FF0055">
-                    <a:alpha val="100000"/>
-                  </a:srgbClr>
-                </a:gs>
-              </a:gsLst>
-              <a:lin ang="0"/>
-            </a:gradFill>
-          </p:spPr>
-          <p:txBody>
-            <a:bodyPr/>
-            <a:lstStyle/>
-            <a:p>
-              <a:endParaRPr lang="es-CO"/>
-            </a:p>
-          </p:txBody>
-        </p:sp>
-        <p:sp>
-          <p:nvSpPr>
-            <p:cNvPr id="13" name="TextBox 13">
-              <a:extLst>
-                <a:ext uri="{FF2B5EF4-FFF2-40B4-BE49-F238E27FC236}">
-                  <a16:creationId xmlns:a16="http://schemas.microsoft.com/office/drawing/2014/main" id="{EDE14CBD-71F3-CE58-1900-5B5A694C35F2}"/>
-                </a:ext>
-              </a:extLst>
-            </p:cNvPr>
-            <p:cNvSpPr txBox="1"/>
-            <p:nvPr/>
-          </p:nvSpPr>
-          <p:spPr>
-            <a:xfrm>
-              <a:off x="0" y="-38100"/>
-              <a:ext cx="2292514" cy="73635"/>
-            </a:xfrm>
-            <a:prstGeom prst="rect">
-              <a:avLst/>
-            </a:prstGeom>
-          </p:spPr>
-          <p:txBody>
-            <a:bodyPr lIns="50800" tIns="50800" rIns="50800" bIns="50800" rtlCol="0" anchor="ctr"/>
-            <a:lstStyle/>
-            <a:p>
-              <a:pPr algn="ctr">
-                <a:lnSpc>
-                  <a:spcPts val="2659"/>
-                </a:lnSpc>
-              </a:pPr>
-              <a:endParaRPr/>
-            </a:p>
-          </p:txBody>
-        </p:sp>
-      </p:grpSp>
-      <p:sp>
-        <p:nvSpPr>
-          <p:cNvPr id="15" name="TextBox 15">
-            <a:extLst>
-              <a:ext uri="{FF2B5EF4-FFF2-40B4-BE49-F238E27FC236}">
-                <a16:creationId xmlns:a16="http://schemas.microsoft.com/office/drawing/2014/main" id="{53F83F89-F8AE-E23F-84E0-1F8B85266321}"/>
-              </a:ext>
-            </a:extLst>
-          </p:cNvPr>
-          <p:cNvSpPr txBox="1"/>
-          <p:nvPr/>
-        </p:nvSpPr>
-        <p:spPr>
-          <a:xfrm>
-            <a:off x="958498" y="4953536"/>
-            <a:ext cx="8321721" cy="677108"/>
-          </a:xfrm>
-          <a:prstGeom prst="rect">
-            <a:avLst/>
-          </a:prstGeom>
-        </p:spPr>
-        <p:txBody>
-          <a:bodyPr wrap="square" lIns="0" tIns="0" rIns="0" bIns="0" rtlCol="0" anchor="t">
-            <a:spAutoFit/>
-          </a:bodyPr>
-          <a:lstStyle/>
-          <a:p>
-            <a:pPr algn="ctr"/>
-            <a:r>
-              <a:rPr lang="es-ES" sz="4400" b="1" dirty="0">
-                <a:latin typeface="Inter"/>
-              </a:rPr>
-              <a:t>¿Qué es el Gobierno de Datos?</a:t>
-            </a:r>
-          </a:p>
-        </p:txBody>
-      </p:sp>
-    </p:spTree>
-    <p:extLst>
-      <p:ext uri="{BB962C8B-B14F-4D97-AF65-F5344CB8AC3E}">
-        <p14:creationId xmlns:p14="http://schemas.microsoft.com/office/powerpoint/2010/main" val="2938131828"/>
-      </p:ext>
-    </p:extLst>
-  </p:cSld>
-  <p:clrMapOvr>
-    <a:masterClrMapping/>
-  </p:clrMapOvr>
-</p:sld>
-</file>
-
-<file path=ppt/slides/slide5.xml><?xml version="1.0" encoding="utf-8"?>
+<file path=ppt/slides/slide3.xml><?xml version="1.0" encoding="utf-8"?>
 <p:sld xmlns:a="http://schemas.openxmlformats.org/drawingml/2006/main" xmlns:r="http://schemas.openxmlformats.org/officeDocument/2006/relationships" xmlns:p="http://schemas.openxmlformats.org/presentationml/2006/main">
   <p:cSld>
     <p:spTree>
@@ -27816,7 +22535,7 @@
 </p:sld>
 </file>
 
-<file path=ppt/slides/slide6.xml><?xml version="1.0" encoding="utf-8"?>
+<file path=ppt/slides/slide4.xml><?xml version="1.0" encoding="utf-8"?>
 <p:sld xmlns:a="http://schemas.openxmlformats.org/drawingml/2006/main" xmlns:r="http://schemas.openxmlformats.org/officeDocument/2006/relationships" xmlns:p="http://schemas.openxmlformats.org/presentationml/2006/main">
   <p:cSld>
     <p:spTree>
@@ -28673,7 +23392,7 @@
 </p:sld>
 </file>
 
-<file path=ppt/slides/slide7.xml><?xml version="1.0" encoding="utf-8"?>
+<file path=ppt/slides/slide5.xml><?xml version="1.0" encoding="utf-8"?>
 <p:sld xmlns:a="http://schemas.openxmlformats.org/drawingml/2006/main" xmlns:r="http://schemas.openxmlformats.org/officeDocument/2006/relationships" xmlns:p="http://schemas.openxmlformats.org/presentationml/2006/main">
   <p:cSld>
     <p:spTree>
@@ -29520,7 +24239,7 @@
 </p:sld>
 </file>
 
-<file path=ppt/slides/slide8.xml><?xml version="1.0" encoding="utf-8"?>
+<file path=ppt/slides/slide6.xml><?xml version="1.0" encoding="utf-8"?>
 <p:sld xmlns:a="http://schemas.openxmlformats.org/drawingml/2006/main" xmlns:r="http://schemas.openxmlformats.org/officeDocument/2006/relationships" xmlns:p="http://schemas.openxmlformats.org/presentationml/2006/main">
   <p:cSld>
     <p:spTree>
@@ -30383,7 +25102,7 @@
 </p:sld>
 </file>
 
-<file path=ppt/slides/slide9.xml><?xml version="1.0" encoding="utf-8"?>
+<file path=ppt/slides/slide7.xml><?xml version="1.0" encoding="utf-8"?>
 <p:sld xmlns:a="http://schemas.openxmlformats.org/drawingml/2006/main" xmlns:r="http://schemas.openxmlformats.org/officeDocument/2006/relationships" xmlns:p="http://schemas.openxmlformats.org/presentationml/2006/main">
   <p:cSld>
     <p:spTree>
@@ -31219,6 +25938,1541 @@
     <p:extLst>
       <p:ext uri="{BB962C8B-B14F-4D97-AF65-F5344CB8AC3E}">
         <p14:creationId xmlns:p14="http://schemas.microsoft.com/office/powerpoint/2010/main" val="3423987874"/>
+      </p:ext>
+    </p:extLst>
+  </p:cSld>
+  <p:clrMapOvr>
+    <a:masterClrMapping/>
+  </p:clrMapOvr>
+</p:sld>
+</file>
+
+<file path=ppt/slides/slide8.xml><?xml version="1.0" encoding="utf-8"?>
+<p:sld xmlns:a="http://schemas.openxmlformats.org/drawingml/2006/main" xmlns:r="http://schemas.openxmlformats.org/officeDocument/2006/relationships" xmlns:p="http://schemas.openxmlformats.org/presentationml/2006/main">
+  <p:cSld>
+    <p:spTree>
+      <p:nvGrpSpPr>
+        <p:cNvPr id="1" name="">
+          <a:extLst>
+            <a:ext uri="{FF2B5EF4-FFF2-40B4-BE49-F238E27FC236}">
+              <a16:creationId xmlns:a16="http://schemas.microsoft.com/office/drawing/2014/main" id="{B5D88ACE-0934-647C-8FCF-121E882F0308}"/>
+            </a:ext>
+          </a:extLst>
+        </p:cNvPr>
+        <p:cNvGrpSpPr/>
+        <p:nvPr/>
+      </p:nvGrpSpPr>
+      <p:grpSpPr>
+        <a:xfrm>
+          <a:off x="0" y="0"/>
+          <a:ext cx="0" cy="0"/>
+          <a:chOff x="0" y="0"/>
+          <a:chExt cx="0" cy="0"/>
+        </a:xfrm>
+      </p:grpSpPr>
+      <p:grpSp>
+        <p:nvGrpSpPr>
+          <p:cNvPr id="3" name="Group 3">
+            <a:extLst>
+              <a:ext uri="{FF2B5EF4-FFF2-40B4-BE49-F238E27FC236}">
+                <a16:creationId xmlns:a16="http://schemas.microsoft.com/office/drawing/2014/main" id="{BEF84AEF-807A-B5DE-42ED-1785323DE85C}"/>
+              </a:ext>
+            </a:extLst>
+          </p:cNvPr>
+          <p:cNvGrpSpPr/>
+          <p:nvPr/>
+        </p:nvGrpSpPr>
+        <p:grpSpPr>
+          <a:xfrm rot="-10800000">
+            <a:off x="10392303" y="0"/>
+            <a:ext cx="7895697" cy="10287000"/>
+            <a:chOff x="0" y="0"/>
+            <a:chExt cx="2079525" cy="2709333"/>
+          </a:xfrm>
+        </p:grpSpPr>
+        <p:sp>
+          <p:nvSpPr>
+            <p:cNvPr id="4" name="Freeform 4">
+              <a:extLst>
+                <a:ext uri="{FF2B5EF4-FFF2-40B4-BE49-F238E27FC236}">
+                  <a16:creationId xmlns:a16="http://schemas.microsoft.com/office/drawing/2014/main" id="{37CC4582-EB5A-35C4-227E-3E31C66AC0B0}"/>
+                </a:ext>
+              </a:extLst>
+            </p:cNvPr>
+            <p:cNvSpPr/>
+            <p:nvPr/>
+          </p:nvSpPr>
+          <p:spPr>
+            <a:xfrm>
+              <a:off x="0" y="0"/>
+              <a:ext cx="2079525" cy="2709333"/>
+            </a:xfrm>
+            <a:custGeom>
+              <a:avLst/>
+              <a:gdLst/>
+              <a:ahLst/>
+              <a:cxnLst/>
+              <a:rect l="l" t="t" r="r" b="b"/>
+              <a:pathLst>
+                <a:path w="2079525" h="2709333">
+                  <a:moveTo>
+                    <a:pt x="0" y="0"/>
+                  </a:moveTo>
+                  <a:lnTo>
+                    <a:pt x="2079525" y="0"/>
+                  </a:lnTo>
+                  <a:lnTo>
+                    <a:pt x="2079525" y="2709333"/>
+                  </a:lnTo>
+                  <a:lnTo>
+                    <a:pt x="0" y="2709333"/>
+                  </a:lnTo>
+                  <a:close/>
+                </a:path>
+              </a:pathLst>
+            </a:custGeom>
+            <a:gradFill rotWithShape="1">
+              <a:gsLst>
+                <a:gs pos="0">
+                  <a:srgbClr val="6B1374">
+                    <a:alpha val="100000"/>
+                  </a:srgbClr>
+                </a:gs>
+                <a:gs pos="33333">
+                  <a:srgbClr val="700A89">
+                    <a:alpha val="100000"/>
+                  </a:srgbClr>
+                </a:gs>
+                <a:gs pos="66667">
+                  <a:srgbClr val="C20052">
+                    <a:alpha val="100000"/>
+                  </a:srgbClr>
+                </a:gs>
+                <a:gs pos="100000">
+                  <a:srgbClr val="FF0055">
+                    <a:alpha val="100000"/>
+                  </a:srgbClr>
+                </a:gs>
+              </a:gsLst>
+              <a:lin ang="5400000"/>
+            </a:gradFill>
+          </p:spPr>
+          <p:txBody>
+            <a:bodyPr/>
+            <a:lstStyle/>
+            <a:p>
+              <a:endParaRPr lang="es-CO"/>
+            </a:p>
+          </p:txBody>
+        </p:sp>
+        <p:sp>
+          <p:nvSpPr>
+            <p:cNvPr id="5" name="TextBox 5">
+              <a:extLst>
+                <a:ext uri="{FF2B5EF4-FFF2-40B4-BE49-F238E27FC236}">
+                  <a16:creationId xmlns:a16="http://schemas.microsoft.com/office/drawing/2014/main" id="{76CEA01E-93D8-5B7C-8300-467FC9212128}"/>
+                </a:ext>
+              </a:extLst>
+            </p:cNvPr>
+            <p:cNvSpPr txBox="1"/>
+            <p:nvPr/>
+          </p:nvSpPr>
+          <p:spPr>
+            <a:xfrm>
+              <a:off x="0" y="-38100"/>
+              <a:ext cx="2079525" cy="2747433"/>
+            </a:xfrm>
+            <a:prstGeom prst="rect">
+              <a:avLst/>
+            </a:prstGeom>
+          </p:spPr>
+          <p:txBody>
+            <a:bodyPr lIns="50800" tIns="50800" rIns="50800" bIns="50800" rtlCol="0" anchor="ctr"/>
+            <a:lstStyle/>
+            <a:p>
+              <a:pPr algn="ctr">
+                <a:lnSpc>
+                  <a:spcPts val="2659"/>
+                </a:lnSpc>
+                <a:spcBef>
+                  <a:spcPct val="0"/>
+                </a:spcBef>
+              </a:pPr>
+              <a:endParaRPr/>
+            </a:p>
+          </p:txBody>
+        </p:sp>
+      </p:grpSp>
+      <p:sp>
+        <p:nvSpPr>
+          <p:cNvPr id="6" name="Freeform 6">
+            <a:extLst>
+              <a:ext uri="{FF2B5EF4-FFF2-40B4-BE49-F238E27FC236}">
+                <a16:creationId xmlns:a16="http://schemas.microsoft.com/office/drawing/2014/main" id="{B31202AB-6ABA-521E-EC5A-944AB28253B4}"/>
+              </a:ext>
+            </a:extLst>
+          </p:cNvPr>
+          <p:cNvSpPr/>
+          <p:nvPr/>
+        </p:nvSpPr>
+        <p:spPr>
+          <a:xfrm>
+            <a:off x="9562641" y="4953536"/>
+            <a:ext cx="4777510" cy="4687932"/>
+          </a:xfrm>
+          <a:custGeom>
+            <a:avLst/>
+            <a:gdLst/>
+            <a:ahLst/>
+            <a:cxnLst/>
+            <a:rect l="l" t="t" r="r" b="b"/>
+            <a:pathLst>
+              <a:path w="4777510" h="4687932">
+                <a:moveTo>
+                  <a:pt x="0" y="0"/>
+                </a:moveTo>
+                <a:lnTo>
+                  <a:pt x="4777511" y="0"/>
+                </a:lnTo>
+                <a:lnTo>
+                  <a:pt x="4777511" y="4687932"/>
+                </a:lnTo>
+                <a:lnTo>
+                  <a:pt x="0" y="4687932"/>
+                </a:lnTo>
+                <a:lnTo>
+                  <a:pt x="0" y="0"/>
+                </a:lnTo>
+                <a:close/>
+              </a:path>
+            </a:pathLst>
+          </a:custGeom>
+          <a:blipFill>
+            <a:blip r:embed="rId2">
+              <a:extLst>
+                <a:ext uri="{96DAC541-7B7A-43D3-8B79-37D633B846F1}">
+                  <asvg:svgBlip xmlns:asvg="http://schemas.microsoft.com/office/drawing/2016/SVG/main" r:embed="rId3"/>
+                </a:ext>
+              </a:extLst>
+            </a:blip>
+            <a:stretch>
+              <a:fillRect/>
+            </a:stretch>
+          </a:blipFill>
+        </p:spPr>
+        <p:txBody>
+          <a:bodyPr/>
+          <a:lstStyle/>
+          <a:p>
+            <a:endParaRPr lang="es-CO"/>
+          </a:p>
+        </p:txBody>
+      </p:sp>
+      <p:sp>
+        <p:nvSpPr>
+          <p:cNvPr id="7" name="Freeform 7">
+            <a:extLst>
+              <a:ext uri="{FF2B5EF4-FFF2-40B4-BE49-F238E27FC236}">
+                <a16:creationId xmlns:a16="http://schemas.microsoft.com/office/drawing/2014/main" id="{F432B313-B9A6-8BDB-8B78-FF15D5121508}"/>
+              </a:ext>
+            </a:extLst>
+          </p:cNvPr>
+          <p:cNvSpPr/>
+          <p:nvPr/>
+        </p:nvSpPr>
+        <p:spPr>
+          <a:xfrm rot="-10800000">
+            <a:off x="14340152" y="455568"/>
+            <a:ext cx="4777510" cy="4687932"/>
+          </a:xfrm>
+          <a:custGeom>
+            <a:avLst/>
+            <a:gdLst/>
+            <a:ahLst/>
+            <a:cxnLst/>
+            <a:rect l="l" t="t" r="r" b="b"/>
+            <a:pathLst>
+              <a:path w="4777510" h="4687932">
+                <a:moveTo>
+                  <a:pt x="0" y="0"/>
+                </a:moveTo>
+                <a:lnTo>
+                  <a:pt x="4777510" y="0"/>
+                </a:lnTo>
+                <a:lnTo>
+                  <a:pt x="4777510" y="4687932"/>
+                </a:lnTo>
+                <a:lnTo>
+                  <a:pt x="0" y="4687932"/>
+                </a:lnTo>
+                <a:lnTo>
+                  <a:pt x="0" y="0"/>
+                </a:lnTo>
+                <a:close/>
+              </a:path>
+            </a:pathLst>
+          </a:custGeom>
+          <a:blipFill>
+            <a:blip r:embed="rId2">
+              <a:extLst>
+                <a:ext uri="{96DAC541-7B7A-43D3-8B79-37D633B846F1}">
+                  <asvg:svgBlip xmlns:asvg="http://schemas.microsoft.com/office/drawing/2016/SVG/main" r:embed="rId3"/>
+                </a:ext>
+              </a:extLst>
+            </a:blip>
+            <a:stretch>
+              <a:fillRect/>
+            </a:stretch>
+          </a:blipFill>
+        </p:spPr>
+        <p:txBody>
+          <a:bodyPr/>
+          <a:lstStyle/>
+          <a:p>
+            <a:endParaRPr lang="es-CO"/>
+          </a:p>
+        </p:txBody>
+      </p:sp>
+      <p:grpSp>
+        <p:nvGrpSpPr>
+          <p:cNvPr id="8" name="Group 8">
+            <a:extLst>
+              <a:ext uri="{FF2B5EF4-FFF2-40B4-BE49-F238E27FC236}">
+                <a16:creationId xmlns:a16="http://schemas.microsoft.com/office/drawing/2014/main" id="{6F2461D1-DC62-F542-FFA3-22E8F0C3E806}"/>
+              </a:ext>
+            </a:extLst>
+          </p:cNvPr>
+          <p:cNvGrpSpPr/>
+          <p:nvPr/>
+        </p:nvGrpSpPr>
+        <p:grpSpPr>
+          <a:xfrm rot="1460314">
+            <a:off x="10661875" y="4518938"/>
+            <a:ext cx="7356554" cy="1249125"/>
+            <a:chOff x="0" y="0"/>
+            <a:chExt cx="1937529" cy="328988"/>
+          </a:xfrm>
+        </p:grpSpPr>
+        <p:sp>
+          <p:nvSpPr>
+            <p:cNvPr id="9" name="Freeform 9">
+              <a:extLst>
+                <a:ext uri="{FF2B5EF4-FFF2-40B4-BE49-F238E27FC236}">
+                  <a16:creationId xmlns:a16="http://schemas.microsoft.com/office/drawing/2014/main" id="{2D82D9F8-CBB4-CF7D-5984-E4588ECC4998}"/>
+                </a:ext>
+              </a:extLst>
+            </p:cNvPr>
+            <p:cNvSpPr/>
+            <p:nvPr/>
+          </p:nvSpPr>
+          <p:spPr>
+            <a:xfrm>
+              <a:off x="0" y="0"/>
+              <a:ext cx="1937528" cy="328988"/>
+            </a:xfrm>
+            <a:custGeom>
+              <a:avLst/>
+              <a:gdLst/>
+              <a:ahLst/>
+              <a:cxnLst/>
+              <a:rect l="l" t="t" r="r" b="b"/>
+              <a:pathLst>
+                <a:path w="1937528" h="328988">
+                  <a:moveTo>
+                    <a:pt x="105238" y="0"/>
+                  </a:moveTo>
+                  <a:lnTo>
+                    <a:pt x="1832290" y="0"/>
+                  </a:lnTo>
+                  <a:cubicBezTo>
+                    <a:pt x="1860201" y="0"/>
+                    <a:pt x="1886969" y="11088"/>
+                    <a:pt x="1906705" y="30824"/>
+                  </a:cubicBezTo>
+                  <a:cubicBezTo>
+                    <a:pt x="1926441" y="50560"/>
+                    <a:pt x="1937528" y="77327"/>
+                    <a:pt x="1937528" y="105238"/>
+                  </a:cubicBezTo>
+                  <a:lnTo>
+                    <a:pt x="1937528" y="223749"/>
+                  </a:lnTo>
+                  <a:cubicBezTo>
+                    <a:pt x="1937528" y="281871"/>
+                    <a:pt x="1890412" y="328988"/>
+                    <a:pt x="1832290" y="328988"/>
+                  </a:cubicBezTo>
+                  <a:lnTo>
+                    <a:pt x="105238" y="328988"/>
+                  </a:lnTo>
+                  <a:cubicBezTo>
+                    <a:pt x="77327" y="328988"/>
+                    <a:pt x="50560" y="317900"/>
+                    <a:pt x="30824" y="298164"/>
+                  </a:cubicBezTo>
+                  <a:cubicBezTo>
+                    <a:pt x="11088" y="278428"/>
+                    <a:pt x="0" y="251660"/>
+                    <a:pt x="0" y="223749"/>
+                  </a:cubicBezTo>
+                  <a:lnTo>
+                    <a:pt x="0" y="105238"/>
+                  </a:lnTo>
+                  <a:cubicBezTo>
+                    <a:pt x="0" y="47117"/>
+                    <a:pt x="47117" y="0"/>
+                    <a:pt x="105238" y="0"/>
+                  </a:cubicBezTo>
+                  <a:close/>
+                </a:path>
+              </a:pathLst>
+            </a:custGeom>
+            <a:solidFill>
+              <a:srgbClr val="FFFFFF"/>
+            </a:solidFill>
+          </p:spPr>
+          <p:txBody>
+            <a:bodyPr/>
+            <a:lstStyle/>
+            <a:p>
+              <a:endParaRPr lang="es-CO"/>
+            </a:p>
+          </p:txBody>
+        </p:sp>
+        <p:sp>
+          <p:nvSpPr>
+            <p:cNvPr id="10" name="TextBox 10">
+              <a:extLst>
+                <a:ext uri="{FF2B5EF4-FFF2-40B4-BE49-F238E27FC236}">
+                  <a16:creationId xmlns:a16="http://schemas.microsoft.com/office/drawing/2014/main" id="{8F7C098D-42FF-08DA-AF5B-B27E87EE6C14}"/>
+                </a:ext>
+              </a:extLst>
+            </p:cNvPr>
+            <p:cNvSpPr txBox="1"/>
+            <p:nvPr/>
+          </p:nvSpPr>
+          <p:spPr>
+            <a:xfrm>
+              <a:off x="0" y="-38100"/>
+              <a:ext cx="1937529" cy="367088"/>
+            </a:xfrm>
+            <a:prstGeom prst="rect">
+              <a:avLst/>
+            </a:prstGeom>
+          </p:spPr>
+          <p:txBody>
+            <a:bodyPr lIns="50800" tIns="50800" rIns="50800" bIns="50800" rtlCol="0" anchor="ctr"/>
+            <a:lstStyle/>
+            <a:p>
+              <a:pPr algn="ctr">
+                <a:lnSpc>
+                  <a:spcPts val="2659"/>
+                </a:lnSpc>
+              </a:pPr>
+              <a:endParaRPr/>
+            </a:p>
+          </p:txBody>
+        </p:sp>
+      </p:grpSp>
+      <p:grpSp>
+        <p:nvGrpSpPr>
+          <p:cNvPr id="11" name="Group 11">
+            <a:extLst>
+              <a:ext uri="{FF2B5EF4-FFF2-40B4-BE49-F238E27FC236}">
+                <a16:creationId xmlns:a16="http://schemas.microsoft.com/office/drawing/2014/main" id="{5D52CD3B-B1FB-5A39-7926-1783EA512620}"/>
+              </a:ext>
+            </a:extLst>
+          </p:cNvPr>
+          <p:cNvGrpSpPr/>
+          <p:nvPr/>
+        </p:nvGrpSpPr>
+        <p:grpSpPr>
+          <a:xfrm rot="-10800000">
+            <a:off x="-536257" y="9574006"/>
+            <a:ext cx="8704391" cy="134923"/>
+            <a:chOff x="0" y="0"/>
+            <a:chExt cx="2292514" cy="35535"/>
+          </a:xfrm>
+        </p:grpSpPr>
+        <p:sp>
+          <p:nvSpPr>
+            <p:cNvPr id="12" name="Freeform 12">
+              <a:extLst>
+                <a:ext uri="{FF2B5EF4-FFF2-40B4-BE49-F238E27FC236}">
+                  <a16:creationId xmlns:a16="http://schemas.microsoft.com/office/drawing/2014/main" id="{B3B82B96-B0B3-EDFD-EBE1-2B0CA9DA1981}"/>
+                </a:ext>
+              </a:extLst>
+            </p:cNvPr>
+            <p:cNvSpPr/>
+            <p:nvPr/>
+          </p:nvSpPr>
+          <p:spPr>
+            <a:xfrm>
+              <a:off x="0" y="0"/>
+              <a:ext cx="2292515" cy="35535"/>
+            </a:xfrm>
+            <a:custGeom>
+              <a:avLst/>
+              <a:gdLst/>
+              <a:ahLst/>
+              <a:cxnLst/>
+              <a:rect l="l" t="t" r="r" b="b"/>
+              <a:pathLst>
+                <a:path w="2292515" h="35535">
+                  <a:moveTo>
+                    <a:pt x="17768" y="0"/>
+                  </a:moveTo>
+                  <a:lnTo>
+                    <a:pt x="2274747" y="0"/>
+                  </a:lnTo>
+                  <a:cubicBezTo>
+                    <a:pt x="2284560" y="0"/>
+                    <a:pt x="2292515" y="7955"/>
+                    <a:pt x="2292515" y="17768"/>
+                  </a:cubicBezTo>
+                  <a:lnTo>
+                    <a:pt x="2292515" y="17768"/>
+                  </a:lnTo>
+                  <a:cubicBezTo>
+                    <a:pt x="2292515" y="22480"/>
+                    <a:pt x="2290643" y="26999"/>
+                    <a:pt x="2287311" y="30331"/>
+                  </a:cubicBezTo>
+                  <a:cubicBezTo>
+                    <a:pt x="2283978" y="33663"/>
+                    <a:pt x="2279459" y="35535"/>
+                    <a:pt x="2274747" y="35535"/>
+                  </a:cubicBezTo>
+                  <a:lnTo>
+                    <a:pt x="17768" y="35535"/>
+                  </a:lnTo>
+                  <a:cubicBezTo>
+                    <a:pt x="13055" y="35535"/>
+                    <a:pt x="8536" y="33663"/>
+                    <a:pt x="5204" y="30331"/>
+                  </a:cubicBezTo>
+                  <a:cubicBezTo>
+                    <a:pt x="1872" y="26999"/>
+                    <a:pt x="0" y="22480"/>
+                    <a:pt x="0" y="17768"/>
+                  </a:cubicBezTo>
+                  <a:lnTo>
+                    <a:pt x="0" y="17768"/>
+                  </a:lnTo>
+                  <a:cubicBezTo>
+                    <a:pt x="0" y="13055"/>
+                    <a:pt x="1872" y="8536"/>
+                    <a:pt x="5204" y="5204"/>
+                  </a:cubicBezTo>
+                  <a:cubicBezTo>
+                    <a:pt x="8536" y="1872"/>
+                    <a:pt x="13055" y="0"/>
+                    <a:pt x="17768" y="0"/>
+                  </a:cubicBezTo>
+                  <a:close/>
+                </a:path>
+              </a:pathLst>
+            </a:custGeom>
+            <a:gradFill rotWithShape="1">
+              <a:gsLst>
+                <a:gs pos="0">
+                  <a:srgbClr val="6B1374">
+                    <a:alpha val="100000"/>
+                  </a:srgbClr>
+                </a:gs>
+                <a:gs pos="33333">
+                  <a:srgbClr val="700A89">
+                    <a:alpha val="100000"/>
+                  </a:srgbClr>
+                </a:gs>
+                <a:gs pos="66667">
+                  <a:srgbClr val="C20052">
+                    <a:alpha val="100000"/>
+                  </a:srgbClr>
+                </a:gs>
+                <a:gs pos="100000">
+                  <a:srgbClr val="FF0055">
+                    <a:alpha val="100000"/>
+                  </a:srgbClr>
+                </a:gs>
+              </a:gsLst>
+              <a:lin ang="0"/>
+            </a:gradFill>
+          </p:spPr>
+          <p:txBody>
+            <a:bodyPr/>
+            <a:lstStyle/>
+            <a:p>
+              <a:endParaRPr lang="es-CO"/>
+            </a:p>
+          </p:txBody>
+        </p:sp>
+        <p:sp>
+          <p:nvSpPr>
+            <p:cNvPr id="13" name="TextBox 13">
+              <a:extLst>
+                <a:ext uri="{FF2B5EF4-FFF2-40B4-BE49-F238E27FC236}">
+                  <a16:creationId xmlns:a16="http://schemas.microsoft.com/office/drawing/2014/main" id="{BAD4412D-5693-E3AA-D106-377EBC613354}"/>
+                </a:ext>
+              </a:extLst>
+            </p:cNvPr>
+            <p:cNvSpPr txBox="1"/>
+            <p:nvPr/>
+          </p:nvSpPr>
+          <p:spPr>
+            <a:xfrm>
+              <a:off x="0" y="-38100"/>
+              <a:ext cx="2292514" cy="73635"/>
+            </a:xfrm>
+            <a:prstGeom prst="rect">
+              <a:avLst/>
+            </a:prstGeom>
+          </p:spPr>
+          <p:txBody>
+            <a:bodyPr lIns="50800" tIns="50800" rIns="50800" bIns="50800" rtlCol="0" anchor="ctr"/>
+            <a:lstStyle/>
+            <a:p>
+              <a:pPr algn="ctr">
+                <a:lnSpc>
+                  <a:spcPts val="2659"/>
+                </a:lnSpc>
+              </a:pPr>
+              <a:endParaRPr/>
+            </a:p>
+          </p:txBody>
+        </p:sp>
+      </p:grpSp>
+      <p:sp>
+        <p:nvSpPr>
+          <p:cNvPr id="15" name="TextBox 15">
+            <a:extLst>
+              <a:ext uri="{FF2B5EF4-FFF2-40B4-BE49-F238E27FC236}">
+                <a16:creationId xmlns:a16="http://schemas.microsoft.com/office/drawing/2014/main" id="{ABE0AB94-776F-2C13-6497-74ED6134EEEE}"/>
+              </a:ext>
+            </a:extLst>
+          </p:cNvPr>
+          <p:cNvSpPr txBox="1"/>
+          <p:nvPr/>
+        </p:nvSpPr>
+        <p:spPr>
+          <a:xfrm>
+            <a:off x="790434" y="4457700"/>
+            <a:ext cx="8321721" cy="2342693"/>
+          </a:xfrm>
+          <a:prstGeom prst="rect">
+            <a:avLst/>
+          </a:prstGeom>
+        </p:spPr>
+        <p:txBody>
+          <a:bodyPr wrap="square" lIns="0" tIns="0" rIns="0" bIns="0" rtlCol="0" anchor="t">
+            <a:spAutoFit/>
+          </a:bodyPr>
+          <a:lstStyle/>
+          <a:p>
+            <a:pPr algn="ctr">
+              <a:lnSpc>
+                <a:spcPts val="6159"/>
+              </a:lnSpc>
+              <a:spcBef>
+                <a:spcPct val="0"/>
+              </a:spcBef>
+            </a:pPr>
+            <a:r>
+              <a:rPr lang="es-ES" sz="4400" b="1" dirty="0"/>
+              <a:t>Fundamentos del Catálogo y Gobierno de Datos</a:t>
+            </a:r>
+          </a:p>
+          <a:p>
+            <a:pPr algn="ctr">
+              <a:lnSpc>
+                <a:spcPts val="6159"/>
+              </a:lnSpc>
+              <a:spcBef>
+                <a:spcPct val="0"/>
+              </a:spcBef>
+            </a:pPr>
+            <a:endParaRPr lang="es-CO" sz="4350" b="1" noProof="0" dirty="0">
+              <a:solidFill>
+                <a:srgbClr val="700A89"/>
+              </a:solidFill>
+              <a:latin typeface="Poppins 1 Bold"/>
+              <a:cs typeface="Poppins 1 Bold"/>
+              <a:sym typeface="Poppins 1 Bold"/>
+            </a:endParaRPr>
+          </a:p>
+        </p:txBody>
+      </p:sp>
+    </p:spTree>
+    <p:extLst>
+      <p:ext uri="{BB962C8B-B14F-4D97-AF65-F5344CB8AC3E}">
+        <p14:creationId xmlns:p14="http://schemas.microsoft.com/office/powerpoint/2010/main" val="1275157545"/>
+      </p:ext>
+    </p:extLst>
+  </p:cSld>
+  <p:clrMapOvr>
+    <a:masterClrMapping/>
+  </p:clrMapOvr>
+</p:sld>
+</file>
+
+<file path=ppt/slides/slide9.xml><?xml version="1.0" encoding="utf-8"?>
+<p:sld xmlns:a="http://schemas.openxmlformats.org/drawingml/2006/main" xmlns:r="http://schemas.openxmlformats.org/officeDocument/2006/relationships" xmlns:p="http://schemas.openxmlformats.org/presentationml/2006/main">
+  <p:cSld>
+    <p:spTree>
+      <p:nvGrpSpPr>
+        <p:cNvPr id="1" name="">
+          <a:extLst>
+            <a:ext uri="{FF2B5EF4-FFF2-40B4-BE49-F238E27FC236}">
+              <a16:creationId xmlns:a16="http://schemas.microsoft.com/office/drawing/2014/main" id="{3B9EFC6E-A5CD-9E5C-4311-FF65B43EFC60}"/>
+            </a:ext>
+          </a:extLst>
+        </p:cNvPr>
+        <p:cNvGrpSpPr/>
+        <p:nvPr/>
+      </p:nvGrpSpPr>
+      <p:grpSpPr>
+        <a:xfrm>
+          <a:off x="0" y="0"/>
+          <a:ext cx="0" cy="0"/>
+          <a:chOff x="0" y="0"/>
+          <a:chExt cx="0" cy="0"/>
+        </a:xfrm>
+      </p:grpSpPr>
+      <p:sp>
+        <p:nvSpPr>
+          <p:cNvPr id="2" name="Freeform 2">
+            <a:extLst>
+              <a:ext uri="{FF2B5EF4-FFF2-40B4-BE49-F238E27FC236}">
+                <a16:creationId xmlns:a16="http://schemas.microsoft.com/office/drawing/2014/main" id="{1CC49C0E-1754-9F32-2373-EC45F069D606}"/>
+              </a:ext>
+            </a:extLst>
+          </p:cNvPr>
+          <p:cNvSpPr/>
+          <p:nvPr/>
+        </p:nvSpPr>
+        <p:spPr>
+          <a:xfrm>
+            <a:off x="16240722" y="9245973"/>
+            <a:ext cx="1388509" cy="555404"/>
+          </a:xfrm>
+          <a:custGeom>
+            <a:avLst/>
+            <a:gdLst/>
+            <a:ahLst/>
+            <a:cxnLst/>
+            <a:rect l="l" t="t" r="r" b="b"/>
+            <a:pathLst>
+              <a:path w="1388509" h="555404">
+                <a:moveTo>
+                  <a:pt x="0" y="0"/>
+                </a:moveTo>
+                <a:lnTo>
+                  <a:pt x="1388510" y="0"/>
+                </a:lnTo>
+                <a:lnTo>
+                  <a:pt x="1388510" y="555404"/>
+                </a:lnTo>
+                <a:lnTo>
+                  <a:pt x="0" y="555404"/>
+                </a:lnTo>
+                <a:lnTo>
+                  <a:pt x="0" y="0"/>
+                </a:lnTo>
+                <a:close/>
+              </a:path>
+            </a:pathLst>
+          </a:custGeom>
+          <a:blipFill>
+            <a:blip r:embed="rId2"/>
+            <a:stretch>
+              <a:fillRect/>
+            </a:stretch>
+          </a:blipFill>
+        </p:spPr>
+        <p:txBody>
+          <a:bodyPr/>
+          <a:lstStyle/>
+          <a:p>
+            <a:endParaRPr lang="es-CO"/>
+          </a:p>
+        </p:txBody>
+      </p:sp>
+      <p:grpSp>
+        <p:nvGrpSpPr>
+          <p:cNvPr id="3" name="Group 3">
+            <a:extLst>
+              <a:ext uri="{FF2B5EF4-FFF2-40B4-BE49-F238E27FC236}">
+                <a16:creationId xmlns:a16="http://schemas.microsoft.com/office/drawing/2014/main" id="{99337439-6C28-FBCA-4F0C-5E4A2EE9A447}"/>
+              </a:ext>
+            </a:extLst>
+          </p:cNvPr>
+          <p:cNvGrpSpPr/>
+          <p:nvPr/>
+        </p:nvGrpSpPr>
+        <p:grpSpPr>
+          <a:xfrm flipV="1">
+            <a:off x="-762000" y="1516854"/>
+            <a:ext cx="8458200" cy="45719"/>
+            <a:chOff x="0" y="0"/>
+            <a:chExt cx="1495010" cy="20069"/>
+          </a:xfrm>
+        </p:grpSpPr>
+        <p:sp>
+          <p:nvSpPr>
+            <p:cNvPr id="4" name="Freeform 4">
+              <a:extLst>
+                <a:ext uri="{FF2B5EF4-FFF2-40B4-BE49-F238E27FC236}">
+                  <a16:creationId xmlns:a16="http://schemas.microsoft.com/office/drawing/2014/main" id="{21D743D3-CA48-1123-7331-BA57B6C2D700}"/>
+                </a:ext>
+              </a:extLst>
+            </p:cNvPr>
+            <p:cNvSpPr/>
+            <p:nvPr/>
+          </p:nvSpPr>
+          <p:spPr>
+            <a:xfrm>
+              <a:off x="0" y="0"/>
+              <a:ext cx="1495010" cy="20069"/>
+            </a:xfrm>
+            <a:custGeom>
+              <a:avLst/>
+              <a:gdLst/>
+              <a:ahLst/>
+              <a:cxnLst/>
+              <a:rect l="l" t="t" r="r" b="b"/>
+              <a:pathLst>
+                <a:path w="1495010" h="20069">
+                  <a:moveTo>
+                    <a:pt x="10035" y="0"/>
+                  </a:moveTo>
+                  <a:lnTo>
+                    <a:pt x="1484976" y="0"/>
+                  </a:lnTo>
+                  <a:cubicBezTo>
+                    <a:pt x="1487637" y="0"/>
+                    <a:pt x="1490189" y="1057"/>
+                    <a:pt x="1492071" y="2939"/>
+                  </a:cubicBezTo>
+                  <a:cubicBezTo>
+                    <a:pt x="1493953" y="4821"/>
+                    <a:pt x="1495010" y="7373"/>
+                    <a:pt x="1495010" y="10035"/>
+                  </a:cubicBezTo>
+                  <a:lnTo>
+                    <a:pt x="1495010" y="10035"/>
+                  </a:lnTo>
+                  <a:cubicBezTo>
+                    <a:pt x="1495010" y="12696"/>
+                    <a:pt x="1493953" y="15248"/>
+                    <a:pt x="1492071" y="17130"/>
+                  </a:cubicBezTo>
+                  <a:cubicBezTo>
+                    <a:pt x="1490189" y="19012"/>
+                    <a:pt x="1487637" y="20069"/>
+                    <a:pt x="1484976" y="20069"/>
+                  </a:cubicBezTo>
+                  <a:lnTo>
+                    <a:pt x="10035" y="20069"/>
+                  </a:lnTo>
+                  <a:cubicBezTo>
+                    <a:pt x="7373" y="20069"/>
+                    <a:pt x="4821" y="19012"/>
+                    <a:pt x="2939" y="17130"/>
+                  </a:cubicBezTo>
+                  <a:cubicBezTo>
+                    <a:pt x="1057" y="15248"/>
+                    <a:pt x="0" y="12696"/>
+                    <a:pt x="0" y="10035"/>
+                  </a:cubicBezTo>
+                  <a:lnTo>
+                    <a:pt x="0" y="10035"/>
+                  </a:lnTo>
+                  <a:cubicBezTo>
+                    <a:pt x="0" y="7373"/>
+                    <a:pt x="1057" y="4821"/>
+                    <a:pt x="2939" y="2939"/>
+                  </a:cubicBezTo>
+                  <a:cubicBezTo>
+                    <a:pt x="4821" y="1057"/>
+                    <a:pt x="7373" y="0"/>
+                    <a:pt x="10035" y="0"/>
+                  </a:cubicBezTo>
+                  <a:close/>
+                </a:path>
+              </a:pathLst>
+            </a:custGeom>
+            <a:gradFill rotWithShape="1">
+              <a:gsLst>
+                <a:gs pos="0">
+                  <a:srgbClr val="6B1374">
+                    <a:alpha val="100000"/>
+                  </a:srgbClr>
+                </a:gs>
+                <a:gs pos="33333">
+                  <a:srgbClr val="700A89">
+                    <a:alpha val="100000"/>
+                  </a:srgbClr>
+                </a:gs>
+                <a:gs pos="66667">
+                  <a:srgbClr val="C20052">
+                    <a:alpha val="100000"/>
+                  </a:srgbClr>
+                </a:gs>
+                <a:gs pos="100000">
+                  <a:srgbClr val="FF0055">
+                    <a:alpha val="100000"/>
+                  </a:srgbClr>
+                </a:gs>
+              </a:gsLst>
+              <a:lin ang="0"/>
+            </a:gradFill>
+          </p:spPr>
+          <p:txBody>
+            <a:bodyPr/>
+            <a:lstStyle/>
+            <a:p>
+              <a:endParaRPr lang="es-CO"/>
+            </a:p>
+          </p:txBody>
+        </p:sp>
+        <p:sp>
+          <p:nvSpPr>
+            <p:cNvPr id="5" name="TextBox 5">
+              <a:extLst>
+                <a:ext uri="{FF2B5EF4-FFF2-40B4-BE49-F238E27FC236}">
+                  <a16:creationId xmlns:a16="http://schemas.microsoft.com/office/drawing/2014/main" id="{F7807437-F125-3B9C-4F31-3570A28EFA56}"/>
+                </a:ext>
+              </a:extLst>
+            </p:cNvPr>
+            <p:cNvSpPr txBox="1"/>
+            <p:nvPr/>
+          </p:nvSpPr>
+          <p:spPr>
+            <a:xfrm>
+              <a:off x="0" y="-38100"/>
+              <a:ext cx="1495010" cy="58169"/>
+            </a:xfrm>
+            <a:prstGeom prst="rect">
+              <a:avLst/>
+            </a:prstGeom>
+          </p:spPr>
+          <p:txBody>
+            <a:bodyPr lIns="50800" tIns="50800" rIns="50800" bIns="50800" rtlCol="0" anchor="ctr"/>
+            <a:lstStyle/>
+            <a:p>
+              <a:pPr algn="ctr">
+                <a:lnSpc>
+                  <a:spcPts val="2659"/>
+                </a:lnSpc>
+              </a:pPr>
+              <a:endParaRPr/>
+            </a:p>
+          </p:txBody>
+        </p:sp>
+      </p:grpSp>
+      <p:grpSp>
+        <p:nvGrpSpPr>
+          <p:cNvPr id="6" name="Group 6">
+            <a:extLst>
+              <a:ext uri="{FF2B5EF4-FFF2-40B4-BE49-F238E27FC236}">
+                <a16:creationId xmlns:a16="http://schemas.microsoft.com/office/drawing/2014/main" id="{31044BC0-693B-691C-3219-35747D6A8A35}"/>
+              </a:ext>
+            </a:extLst>
+          </p:cNvPr>
+          <p:cNvGrpSpPr/>
+          <p:nvPr/>
+        </p:nvGrpSpPr>
+        <p:grpSpPr>
+          <a:xfrm>
+            <a:off x="17896105" y="0"/>
+            <a:ext cx="449045" cy="10287000"/>
+            <a:chOff x="0" y="0"/>
+            <a:chExt cx="598727" cy="13716000"/>
+          </a:xfrm>
+        </p:grpSpPr>
+        <p:grpSp>
+          <p:nvGrpSpPr>
+            <p:cNvPr id="7" name="Group 7">
+              <a:extLst>
+                <a:ext uri="{FF2B5EF4-FFF2-40B4-BE49-F238E27FC236}">
+                  <a16:creationId xmlns:a16="http://schemas.microsoft.com/office/drawing/2014/main" id="{0C9CA8E9-5F04-4FCE-7D1D-8A68AC35FC77}"/>
+                </a:ext>
+              </a:extLst>
+            </p:cNvPr>
+            <p:cNvGrpSpPr/>
+            <p:nvPr/>
+          </p:nvGrpSpPr>
+          <p:grpSpPr>
+            <a:xfrm>
+              <a:off x="77114" y="0"/>
+              <a:ext cx="444500" cy="13716000"/>
+              <a:chOff x="0" y="0"/>
+              <a:chExt cx="87802" cy="2709333"/>
+            </a:xfrm>
+          </p:grpSpPr>
+          <p:sp>
+            <p:nvSpPr>
+              <p:cNvPr id="8" name="Freeform 8">
+                <a:extLst>
+                  <a:ext uri="{FF2B5EF4-FFF2-40B4-BE49-F238E27FC236}">
+                    <a16:creationId xmlns:a16="http://schemas.microsoft.com/office/drawing/2014/main" id="{E711F5DD-7AB1-8A81-F7E2-373F97A20AB5}"/>
+                  </a:ext>
+                </a:extLst>
+              </p:cNvPr>
+              <p:cNvSpPr/>
+              <p:nvPr/>
+            </p:nvSpPr>
+            <p:spPr>
+              <a:xfrm>
+                <a:off x="0" y="0"/>
+                <a:ext cx="87802" cy="2709333"/>
+              </a:xfrm>
+              <a:custGeom>
+                <a:avLst/>
+                <a:gdLst/>
+                <a:ahLst/>
+                <a:cxnLst/>
+                <a:rect l="l" t="t" r="r" b="b"/>
+                <a:pathLst>
+                  <a:path w="87802" h="2709333">
+                    <a:moveTo>
+                      <a:pt x="0" y="0"/>
+                    </a:moveTo>
+                    <a:lnTo>
+                      <a:pt x="87802" y="0"/>
+                    </a:lnTo>
+                    <a:lnTo>
+                      <a:pt x="87802" y="2709333"/>
+                    </a:lnTo>
+                    <a:lnTo>
+                      <a:pt x="0" y="2709333"/>
+                    </a:lnTo>
+                    <a:close/>
+                  </a:path>
+                </a:pathLst>
+              </a:custGeom>
+              <a:gradFill rotWithShape="1">
+                <a:gsLst>
+                  <a:gs pos="0">
+                    <a:srgbClr val="6B1374">
+                      <a:alpha val="100000"/>
+                    </a:srgbClr>
+                  </a:gs>
+                  <a:gs pos="33333">
+                    <a:srgbClr val="700A89">
+                      <a:alpha val="100000"/>
+                    </a:srgbClr>
+                  </a:gs>
+                  <a:gs pos="66667">
+                    <a:srgbClr val="C20052">
+                      <a:alpha val="100000"/>
+                    </a:srgbClr>
+                  </a:gs>
+                  <a:gs pos="100000">
+                    <a:srgbClr val="FF0055">
+                      <a:alpha val="100000"/>
+                    </a:srgbClr>
+                  </a:gs>
+                </a:gsLst>
+                <a:lin ang="5400000"/>
+              </a:gradFill>
+            </p:spPr>
+            <p:txBody>
+              <a:bodyPr/>
+              <a:lstStyle/>
+              <a:p>
+                <a:endParaRPr lang="es-CO"/>
+              </a:p>
+            </p:txBody>
+          </p:sp>
+          <p:sp>
+            <p:nvSpPr>
+              <p:cNvPr id="9" name="TextBox 9">
+                <a:extLst>
+                  <a:ext uri="{FF2B5EF4-FFF2-40B4-BE49-F238E27FC236}">
+                    <a16:creationId xmlns:a16="http://schemas.microsoft.com/office/drawing/2014/main" id="{BA55F2D7-D7D9-82D4-F9A6-E6D7C9137352}"/>
+                  </a:ext>
+                </a:extLst>
+              </p:cNvPr>
+              <p:cNvSpPr txBox="1"/>
+              <p:nvPr/>
+            </p:nvSpPr>
+            <p:spPr>
+              <a:xfrm>
+                <a:off x="0" y="-38100"/>
+                <a:ext cx="87802" cy="2747433"/>
+              </a:xfrm>
+              <a:prstGeom prst="rect">
+                <a:avLst/>
+              </a:prstGeom>
+            </p:spPr>
+            <p:txBody>
+              <a:bodyPr lIns="50800" tIns="50800" rIns="50800" bIns="50800" rtlCol="0" anchor="ctr"/>
+              <a:lstStyle/>
+              <a:p>
+                <a:pPr algn="ctr">
+                  <a:lnSpc>
+                    <a:spcPts val="2659"/>
+                  </a:lnSpc>
+                </a:pPr>
+                <a:endParaRPr/>
+              </a:p>
+            </p:txBody>
+          </p:sp>
+        </p:grpSp>
+        <p:sp>
+          <p:nvSpPr>
+            <p:cNvPr id="10" name="Freeform 10">
+              <a:extLst>
+                <a:ext uri="{FF2B5EF4-FFF2-40B4-BE49-F238E27FC236}">
+                  <a16:creationId xmlns:a16="http://schemas.microsoft.com/office/drawing/2014/main" id="{1FB331B8-4917-F854-3846-36D0781CECD8}"/>
+                </a:ext>
+              </a:extLst>
+            </p:cNvPr>
+            <p:cNvSpPr/>
+            <p:nvPr/>
+          </p:nvSpPr>
+          <p:spPr>
+            <a:xfrm>
+              <a:off x="22810" y="1020609"/>
+              <a:ext cx="553108" cy="542737"/>
+            </a:xfrm>
+            <a:custGeom>
+              <a:avLst/>
+              <a:gdLst/>
+              <a:ahLst/>
+              <a:cxnLst/>
+              <a:rect l="l" t="t" r="r" b="b"/>
+              <a:pathLst>
+                <a:path w="553108" h="542737">
+                  <a:moveTo>
+                    <a:pt x="0" y="0"/>
+                  </a:moveTo>
+                  <a:lnTo>
+                    <a:pt x="553108" y="0"/>
+                  </a:lnTo>
+                  <a:lnTo>
+                    <a:pt x="553108" y="542737"/>
+                  </a:lnTo>
+                  <a:lnTo>
+                    <a:pt x="0" y="542737"/>
+                  </a:lnTo>
+                  <a:lnTo>
+                    <a:pt x="0" y="0"/>
+                  </a:lnTo>
+                  <a:close/>
+                </a:path>
+              </a:pathLst>
+            </a:custGeom>
+            <a:blipFill>
+              <a:blip r:embed="rId3">
+                <a:extLst>
+                  <a:ext uri="{96DAC541-7B7A-43D3-8B79-37D633B846F1}">
+                    <asvg:svgBlip xmlns:asvg="http://schemas.microsoft.com/office/drawing/2016/SVG/main" r:embed="rId4"/>
+                  </a:ext>
+                </a:extLst>
+              </a:blip>
+              <a:stretch>
+                <a:fillRect/>
+              </a:stretch>
+            </a:blipFill>
+          </p:spPr>
+          <p:txBody>
+            <a:bodyPr/>
+            <a:lstStyle/>
+            <a:p>
+              <a:endParaRPr lang="es-CO"/>
+            </a:p>
+          </p:txBody>
+        </p:sp>
+        <p:sp>
+          <p:nvSpPr>
+            <p:cNvPr id="11" name="Freeform 11">
+              <a:extLst>
+                <a:ext uri="{FF2B5EF4-FFF2-40B4-BE49-F238E27FC236}">
+                  <a16:creationId xmlns:a16="http://schemas.microsoft.com/office/drawing/2014/main" id="{A82BF2E0-25BC-0029-251E-069D8EA2E7D6}"/>
+                </a:ext>
+              </a:extLst>
+            </p:cNvPr>
+            <p:cNvSpPr/>
+            <p:nvPr/>
+          </p:nvSpPr>
+          <p:spPr>
+            <a:xfrm rot="-10800000">
+              <a:off x="22810" y="102655"/>
+              <a:ext cx="553108" cy="542737"/>
+            </a:xfrm>
+            <a:custGeom>
+              <a:avLst/>
+              <a:gdLst/>
+              <a:ahLst/>
+              <a:cxnLst/>
+              <a:rect l="l" t="t" r="r" b="b"/>
+              <a:pathLst>
+                <a:path w="553108" h="542737">
+                  <a:moveTo>
+                    <a:pt x="0" y="0"/>
+                  </a:moveTo>
+                  <a:lnTo>
+                    <a:pt x="553108" y="0"/>
+                  </a:lnTo>
+                  <a:lnTo>
+                    <a:pt x="553108" y="542737"/>
+                  </a:lnTo>
+                  <a:lnTo>
+                    <a:pt x="0" y="542737"/>
+                  </a:lnTo>
+                  <a:lnTo>
+                    <a:pt x="0" y="0"/>
+                  </a:lnTo>
+                  <a:close/>
+                </a:path>
+              </a:pathLst>
+            </a:custGeom>
+            <a:blipFill>
+              <a:blip r:embed="rId3">
+                <a:extLst>
+                  <a:ext uri="{96DAC541-7B7A-43D3-8B79-37D633B846F1}">
+                    <asvg:svgBlip xmlns:asvg="http://schemas.microsoft.com/office/drawing/2016/SVG/main" r:embed="rId4"/>
+                  </a:ext>
+                </a:extLst>
+              </a:blip>
+              <a:stretch>
+                <a:fillRect/>
+              </a:stretch>
+            </a:blipFill>
+          </p:spPr>
+          <p:txBody>
+            <a:bodyPr/>
+            <a:lstStyle/>
+            <a:p>
+              <a:endParaRPr lang="es-CO"/>
+            </a:p>
+          </p:txBody>
+        </p:sp>
+        <p:grpSp>
+          <p:nvGrpSpPr>
+            <p:cNvPr id="12" name="Group 12">
+              <a:extLst>
+                <a:ext uri="{FF2B5EF4-FFF2-40B4-BE49-F238E27FC236}">
+                  <a16:creationId xmlns:a16="http://schemas.microsoft.com/office/drawing/2014/main" id="{00DB9B39-18D7-B8B7-1D1E-B569F2543D6A}"/>
+                </a:ext>
+              </a:extLst>
+            </p:cNvPr>
+            <p:cNvGrpSpPr/>
+            <p:nvPr/>
+          </p:nvGrpSpPr>
+          <p:grpSpPr>
+            <a:xfrm rot="1460314">
+              <a:off x="1518" y="765089"/>
+              <a:ext cx="595692" cy="135824"/>
+              <a:chOff x="0" y="0"/>
+              <a:chExt cx="1355149" cy="308989"/>
+            </a:xfrm>
+          </p:grpSpPr>
+          <p:sp>
+            <p:nvSpPr>
+              <p:cNvPr id="13" name="Freeform 13">
+                <a:extLst>
+                  <a:ext uri="{FF2B5EF4-FFF2-40B4-BE49-F238E27FC236}">
+                    <a16:creationId xmlns:a16="http://schemas.microsoft.com/office/drawing/2014/main" id="{EA788FAC-38FC-FE05-B21F-35A28AE29CDC}"/>
+                  </a:ext>
+                </a:extLst>
+              </p:cNvPr>
+              <p:cNvSpPr/>
+              <p:nvPr/>
+            </p:nvSpPr>
+            <p:spPr>
+              <a:xfrm>
+                <a:off x="0" y="0"/>
+                <a:ext cx="1355149" cy="308989"/>
+              </a:xfrm>
+              <a:custGeom>
+                <a:avLst/>
+                <a:gdLst/>
+                <a:ahLst/>
+                <a:cxnLst/>
+                <a:rect l="l" t="t" r="r" b="b"/>
+                <a:pathLst>
+                  <a:path w="1355149" h="308989">
+                    <a:moveTo>
+                      <a:pt x="154494" y="0"/>
+                    </a:moveTo>
+                    <a:lnTo>
+                      <a:pt x="1200655" y="0"/>
+                    </a:lnTo>
+                    <a:cubicBezTo>
+                      <a:pt x="1241629" y="0"/>
+                      <a:pt x="1280926" y="16277"/>
+                      <a:pt x="1309899" y="45250"/>
+                    </a:cubicBezTo>
+                    <a:cubicBezTo>
+                      <a:pt x="1338872" y="74224"/>
+                      <a:pt x="1355149" y="113520"/>
+                      <a:pt x="1355149" y="154494"/>
+                    </a:cubicBezTo>
+                    <a:lnTo>
+                      <a:pt x="1355149" y="154494"/>
+                    </a:lnTo>
+                    <a:cubicBezTo>
+                      <a:pt x="1355149" y="239819"/>
+                      <a:pt x="1285980" y="308989"/>
+                      <a:pt x="1200655" y="308989"/>
+                    </a:cubicBezTo>
+                    <a:lnTo>
+                      <a:pt x="154494" y="308989"/>
+                    </a:lnTo>
+                    <a:cubicBezTo>
+                      <a:pt x="113520" y="308989"/>
+                      <a:pt x="74224" y="292712"/>
+                      <a:pt x="45250" y="263738"/>
+                    </a:cubicBezTo>
+                    <a:cubicBezTo>
+                      <a:pt x="16277" y="234765"/>
+                      <a:pt x="0" y="195469"/>
+                      <a:pt x="0" y="154494"/>
+                    </a:cubicBezTo>
+                    <a:lnTo>
+                      <a:pt x="0" y="154494"/>
+                    </a:lnTo>
+                    <a:cubicBezTo>
+                      <a:pt x="0" y="113520"/>
+                      <a:pt x="16277" y="74224"/>
+                      <a:pt x="45250" y="45250"/>
+                    </a:cubicBezTo>
+                    <a:cubicBezTo>
+                      <a:pt x="74224" y="16277"/>
+                      <a:pt x="113520" y="0"/>
+                      <a:pt x="154494" y="0"/>
+                    </a:cubicBezTo>
+                    <a:close/>
+                  </a:path>
+                </a:pathLst>
+              </a:custGeom>
+              <a:solidFill>
+                <a:srgbClr val="FFFFFF"/>
+              </a:solidFill>
+            </p:spPr>
+            <p:txBody>
+              <a:bodyPr/>
+              <a:lstStyle/>
+              <a:p>
+                <a:endParaRPr lang="es-CO"/>
+              </a:p>
+            </p:txBody>
+          </p:sp>
+          <p:sp>
+            <p:nvSpPr>
+              <p:cNvPr id="14" name="TextBox 14">
+                <a:extLst>
+                  <a:ext uri="{FF2B5EF4-FFF2-40B4-BE49-F238E27FC236}">
+                    <a16:creationId xmlns:a16="http://schemas.microsoft.com/office/drawing/2014/main" id="{5584151F-3190-7AB1-C98A-F0C2BBB8AF18}"/>
+                  </a:ext>
+                </a:extLst>
+              </p:cNvPr>
+              <p:cNvSpPr txBox="1"/>
+              <p:nvPr/>
+            </p:nvSpPr>
+            <p:spPr>
+              <a:xfrm>
+                <a:off x="0" y="-38100"/>
+                <a:ext cx="1355149" cy="347089"/>
+              </a:xfrm>
+              <a:prstGeom prst="rect">
+                <a:avLst/>
+              </a:prstGeom>
+            </p:spPr>
+            <p:txBody>
+              <a:bodyPr lIns="50800" tIns="50800" rIns="50800" bIns="50800" rtlCol="0" anchor="ctr"/>
+              <a:lstStyle/>
+              <a:p>
+                <a:pPr algn="ctr">
+                  <a:lnSpc>
+                    <a:spcPts val="2659"/>
+                  </a:lnSpc>
+                </a:pPr>
+                <a:endParaRPr/>
+              </a:p>
+            </p:txBody>
+          </p:sp>
+        </p:grpSp>
+      </p:grpSp>
+      <p:sp>
+        <p:nvSpPr>
+          <p:cNvPr id="16" name="CuadroTexto 15">
+            <a:extLst>
+              <a:ext uri="{FF2B5EF4-FFF2-40B4-BE49-F238E27FC236}">
+                <a16:creationId xmlns:a16="http://schemas.microsoft.com/office/drawing/2014/main" id="{A09C7E0D-B603-D015-945F-4A6AD4A7A8C4}"/>
+              </a:ext>
+            </a:extLst>
+          </p:cNvPr>
+          <p:cNvSpPr txBox="1"/>
+          <p:nvPr/>
+        </p:nvSpPr>
+        <p:spPr>
+          <a:xfrm>
+            <a:off x="609600" y="2476500"/>
+            <a:ext cx="15322680" cy="6494085"/>
+          </a:xfrm>
+          <a:prstGeom prst="rect">
+            <a:avLst/>
+          </a:prstGeom>
+          <a:noFill/>
+        </p:spPr>
+        <p:txBody>
+          <a:bodyPr wrap="square">
+            <a:spAutoFit/>
+          </a:bodyPr>
+          <a:lstStyle/>
+          <a:p>
+            <a:pPr>
+              <a:buFont typeface="Arial" panose="020B0604020202020204" pitchFamily="34" charset="0"/>
+              <a:buChar char="•"/>
+            </a:pPr>
+            <a:r>
+              <a:rPr lang="es-ES" sz="3200" b="1" dirty="0"/>
+              <a:t>Necesidad de un Framework:</a:t>
+            </a:r>
+            <a:r>
+              <a:rPr lang="es-ES" sz="3200" dirty="0"/>
+              <a:t> Las organizaciones requieren un marco de gobierno de datos para extraer </a:t>
+            </a:r>
+            <a:r>
+              <a:rPr lang="es-ES" sz="3200" i="1" dirty="0" err="1"/>
+              <a:t>insights</a:t>
+            </a:r>
+            <a:r>
+              <a:rPr lang="es-ES" sz="3200" dirty="0"/>
+              <a:t> técnicos y de negocio profundos de sus activos de información.</a:t>
+            </a:r>
+          </a:p>
+          <a:p>
+            <a:pPr>
+              <a:buFont typeface="Arial" panose="020B0604020202020204" pitchFamily="34" charset="0"/>
+              <a:buChar char="•"/>
+            </a:pPr>
+            <a:endParaRPr lang="es-ES" sz="3200" dirty="0"/>
+          </a:p>
+          <a:p>
+            <a:pPr>
+              <a:buFont typeface="Arial" panose="020B0604020202020204" pitchFamily="34" charset="0"/>
+              <a:buChar char="•"/>
+            </a:pPr>
+            <a:r>
+              <a:rPr lang="es-ES" sz="3200" b="1" dirty="0"/>
+              <a:t>El Núcleo son los Metadatos:</a:t>
+            </a:r>
+            <a:r>
+              <a:rPr lang="es-ES" sz="3200" dirty="0"/>
+              <a:t> Un catálogo de gobierno gira en torno a dos categorías principales:</a:t>
+            </a:r>
+          </a:p>
+          <a:p>
+            <a:pPr marL="742950" lvl="1" indent="-285750">
+              <a:buFont typeface="Arial" panose="020B0604020202020204" pitchFamily="34" charset="0"/>
+              <a:buChar char="•"/>
+            </a:pPr>
+            <a:r>
+              <a:rPr lang="es-ES" sz="3200" b="1" dirty="0"/>
+              <a:t>Metadatos Técnicos:</a:t>
+            </a:r>
+            <a:r>
+              <a:rPr lang="es-ES" sz="3200" dirty="0"/>
+              <a:t> Información operativa como autor, fechas de creación/modificación, sistema de origen y tamaño del </a:t>
+            </a:r>
+            <a:r>
+              <a:rPr lang="es-ES" sz="3200" i="1" dirty="0" err="1"/>
+              <a:t>dataset</a:t>
+            </a:r>
+            <a:r>
+              <a:rPr lang="es-ES" sz="3200" dirty="0"/>
+              <a:t>.</a:t>
+            </a:r>
+          </a:p>
+          <a:p>
+            <a:pPr marL="742950" lvl="1" indent="-285750">
+              <a:buFont typeface="Arial" panose="020B0604020202020204" pitchFamily="34" charset="0"/>
+              <a:buChar char="•"/>
+            </a:pPr>
+            <a:r>
+              <a:rPr lang="es-ES" sz="3200" b="1" dirty="0"/>
+              <a:t>Metadatos de Negocio:</a:t>
+            </a:r>
+            <a:r>
+              <a:rPr lang="es-ES" sz="3200" dirty="0"/>
+              <a:t> Contexto que enriquece al dato, incluyendo clasificación, estructura, taxonomía y periodos de retención.</a:t>
+            </a:r>
+          </a:p>
+          <a:p>
+            <a:pPr lvl="1"/>
+            <a:endParaRPr lang="es-ES" sz="3200" dirty="0"/>
+          </a:p>
+          <a:p>
+            <a:pPr>
+              <a:buFont typeface="Arial" panose="020B0604020202020204" pitchFamily="34" charset="0"/>
+              <a:buChar char="•"/>
+            </a:pPr>
+            <a:r>
+              <a:rPr lang="es-ES" sz="3200" b="1" dirty="0"/>
+              <a:t>Cultura "Data-</a:t>
+            </a:r>
+            <a:r>
+              <a:rPr lang="es-ES" sz="3200" b="1" dirty="0" err="1"/>
+              <a:t>Driven</a:t>
+            </a:r>
+            <a:r>
+              <a:rPr lang="es-ES" sz="3200" b="1" dirty="0"/>
+              <a:t>":</a:t>
+            </a:r>
+            <a:r>
+              <a:rPr lang="es-ES" sz="3200" dirty="0"/>
+              <a:t> La falta de decisiones basadas en datos limita el potencial de la empresa, relegando las estrategias a simples suposiciones. Un enfoque centrado en los datos optimiza la logística, las ventas y la interacción con el cliente.</a:t>
+            </a:r>
+          </a:p>
+        </p:txBody>
+      </p:sp>
+      <p:sp>
+        <p:nvSpPr>
+          <p:cNvPr id="18" name="CuadroTexto 17">
+            <a:extLst>
+              <a:ext uri="{FF2B5EF4-FFF2-40B4-BE49-F238E27FC236}">
+                <a16:creationId xmlns:a16="http://schemas.microsoft.com/office/drawing/2014/main" id="{FDC8DC18-E4EB-5F51-703F-64513938A365}"/>
+              </a:ext>
+            </a:extLst>
+          </p:cNvPr>
+          <p:cNvSpPr txBox="1"/>
+          <p:nvPr/>
+        </p:nvSpPr>
+        <p:spPr>
+          <a:xfrm>
+            <a:off x="381000" y="594478"/>
+            <a:ext cx="9560256" cy="646331"/>
+          </a:xfrm>
+          <a:prstGeom prst="rect">
+            <a:avLst/>
+          </a:prstGeom>
+          <a:noFill/>
+        </p:spPr>
+        <p:txBody>
+          <a:bodyPr wrap="square">
+            <a:spAutoFit/>
+          </a:bodyPr>
+          <a:lstStyle/>
+          <a:p>
+            <a:pPr>
+              <a:buNone/>
+            </a:pPr>
+            <a:r>
+              <a:rPr lang="es-ES" sz="3600" b="1" dirty="0"/>
+              <a:t>Fundamentos del Catálogo y Gobierno de Datos</a:t>
+            </a:r>
+          </a:p>
+        </p:txBody>
+      </p:sp>
+    </p:spTree>
+    <p:extLst>
+      <p:ext uri="{BB962C8B-B14F-4D97-AF65-F5344CB8AC3E}">
+        <p14:creationId xmlns:p14="http://schemas.microsoft.com/office/powerpoint/2010/main" val="3670276952"/>
       </p:ext>
     </p:extLst>
   </p:cSld>
@@ -31795,14 +28049,12 @@
 </file>
 
 <file path=customXml/item1.xml><?xml version="1.0" encoding="utf-8"?>
-<p:properties xmlns:p="http://schemas.microsoft.com/office/2006/metadata/properties" xmlns:xsi="http://www.w3.org/2001/XMLSchema-instance" xmlns:pc="http://schemas.microsoft.com/office/infopath/2007/PartnerControls">
-  <documentManagement>
-    <TaxCatchAll xmlns="cd0e0202-030e-462a-aa27-6a6a82479e70" xsi:nil="true"/>
-    <lcf76f155ced4ddcb4097134ff3c332f xmlns="6c275f7e-0654-4a6d-8904-2cca8e28e712">
-      <Terms xmlns="http://schemas.microsoft.com/office/infopath/2007/PartnerControls"/>
-    </lcf76f155ced4ddcb4097134ff3c332f>
-  </documentManagement>
-</p:properties>
+<?mso-contentType ?>
+<FormTemplates xmlns="http://schemas.microsoft.com/sharepoint/v3/contenttype/forms">
+  <Display>DocumentLibraryForm</Display>
+  <Edit>DocumentLibraryForm</Edit>
+  <New>DocumentLibraryForm</New>
+</FormTemplates>
 </file>
 
 <file path=customXml/item2.xml><?xml version="1.0" encoding="utf-8"?>
@@ -31951,27 +28203,20 @@
 </file>
 
 <file path=customXml/item3.xml><?xml version="1.0" encoding="utf-8"?>
-<?mso-contentType ?>
-<FormTemplates xmlns="http://schemas.microsoft.com/sharepoint/v3/contenttype/forms">
-  <Display>DocumentLibraryForm</Display>
-  <Edit>DocumentLibraryForm</Edit>
-  <New>DocumentLibraryForm</New>
-</FormTemplates>
+<p:properties xmlns:p="http://schemas.microsoft.com/office/2006/metadata/properties" xmlns:xsi="http://www.w3.org/2001/XMLSchema-instance" xmlns:pc="http://schemas.microsoft.com/office/infopath/2007/PartnerControls">
+  <documentManagement>
+    <TaxCatchAll xmlns="cd0e0202-030e-462a-aa27-6a6a82479e70" xsi:nil="true"/>
+    <lcf76f155ced4ddcb4097134ff3c332f xmlns="6c275f7e-0654-4a6d-8904-2cca8e28e712">
+      <Terms xmlns="http://schemas.microsoft.com/office/infopath/2007/PartnerControls"/>
+    </lcf76f155ced4ddcb4097134ff3c332f>
+  </documentManagement>
+</p:properties>
 </file>
 
 <file path=customXml/itemProps1.xml><?xml version="1.0" encoding="utf-8"?>
-<ds:datastoreItem xmlns:ds="http://schemas.openxmlformats.org/officeDocument/2006/customXml" ds:itemID="{D6E0BB8D-833E-4C50-9216-ACEFA67B89FD}">
+<ds:datastoreItem xmlns:ds="http://schemas.openxmlformats.org/officeDocument/2006/customXml" ds:itemID="{5A23B340-D820-43E7-9E27-6EAE6AACC61A}">
   <ds:schemaRefs>
-    <ds:schemaRef ds:uri="http://purl.org/dc/dcmitype/"/>
-    <ds:schemaRef ds:uri="http://schemas.microsoft.com/office/2006/metadata/properties"/>
-    <ds:schemaRef ds:uri="http://purl.org/dc/terms/"/>
-    <ds:schemaRef ds:uri="http://www.w3.org/XML/1998/namespace"/>
-    <ds:schemaRef ds:uri="http://purl.org/dc/elements/1.1/"/>
-    <ds:schemaRef ds:uri="http://schemas.microsoft.com/office/2006/documentManagement/types"/>
-    <ds:schemaRef ds:uri="http://schemas.microsoft.com/office/infopath/2007/PartnerControls"/>
-    <ds:schemaRef ds:uri="http://schemas.openxmlformats.org/package/2006/metadata/core-properties"/>
-    <ds:schemaRef ds:uri="cd0e0202-030e-462a-aa27-6a6a82479e70"/>
-    <ds:schemaRef ds:uri="6c275f7e-0654-4a6d-8904-2cca8e28e712"/>
+    <ds:schemaRef ds:uri="http://schemas.microsoft.com/sharepoint/v3/contenttype/forms"/>
   </ds:schemaRefs>
 </ds:datastoreItem>
 </file>
@@ -31996,9 +28241,18 @@
 </file>
 
 <file path=customXml/itemProps3.xml><?xml version="1.0" encoding="utf-8"?>
-<ds:datastoreItem xmlns:ds="http://schemas.openxmlformats.org/officeDocument/2006/customXml" ds:itemID="{5A23B340-D820-43E7-9E27-6EAE6AACC61A}">
+<ds:datastoreItem xmlns:ds="http://schemas.openxmlformats.org/officeDocument/2006/customXml" ds:itemID="{D6E0BB8D-833E-4C50-9216-ACEFA67B89FD}">
   <ds:schemaRefs>
-    <ds:schemaRef ds:uri="http://schemas.microsoft.com/sharepoint/v3/contenttype/forms"/>
+    <ds:schemaRef ds:uri="http://purl.org/dc/dcmitype/"/>
+    <ds:schemaRef ds:uri="http://schemas.microsoft.com/office/2006/metadata/properties"/>
+    <ds:schemaRef ds:uri="http://purl.org/dc/terms/"/>
+    <ds:schemaRef ds:uri="http://www.w3.org/XML/1998/namespace"/>
+    <ds:schemaRef ds:uri="http://purl.org/dc/elements/1.1/"/>
+    <ds:schemaRef ds:uri="http://schemas.microsoft.com/office/2006/documentManagement/types"/>
+    <ds:schemaRef ds:uri="http://schemas.microsoft.com/office/infopath/2007/PartnerControls"/>
+    <ds:schemaRef ds:uri="http://schemas.openxmlformats.org/package/2006/metadata/core-properties"/>
+    <ds:schemaRef ds:uri="cd0e0202-030e-462a-aa27-6a6a82479e70"/>
+    <ds:schemaRef ds:uri="6c275f7e-0654-4a6d-8904-2cca8e28e712"/>
   </ds:schemaRefs>
 </ds:datastoreItem>
 </file>